--- a/static/ppts/G6_Math_T5_Averages.pptx
+++ b/static/ppts/G6_Math_T5_Averages.pptx
@@ -9,9 +9,11 @@
     <p:sldId id="257" r:id="rId3"/>
     <p:sldId id="258" r:id="rId4"/>
     <p:sldId id="259" r:id="rId5"/>
+    <p:sldId id="260" r:id="rId6"/>
+    <p:sldId id="261" r:id="rId7"/>
   </p:sldIdLst>
   <p:notesMasterIdLst>
-    <p:notesMasterId r:id="rId6"/>
+    <p:notesMasterId r:id="rId8"/>
   </p:notesMasterIdLst>
   <p:sldSz cx="9144000" cy="5143500"/>
   <p:notesSz cx="5143500" cy="9144000"/>
@@ -811,6 +813,182 @@
 </p:notes>
 </file>
 
+<file path=ppt/notesSlides/notesSlide5.xml><?xml version="1.0" encoding="utf-8"?>
+<p:notes xmlns:a="http://schemas.openxmlformats.org/drawingml/2006/main" xmlns:r="http://schemas.openxmlformats.org/officeDocument/2006/relationships" xmlns:p="http://schemas.openxmlformats.org/presentationml/2006/main">
+  <p:cSld>
+    <p:spTree>
+      <p:nvGrpSpPr>
+        <p:cNvPr id="1" name=""/>
+        <p:cNvGrpSpPr/>
+        <p:nvPr/>
+      </p:nvGrpSpPr>
+      <p:grpSpPr>
+        <a:xfrm>
+          <a:off x="0" y="0"/>
+          <a:ext cx="0" cy="0"/>
+          <a:chOff x="0" y="0"/>
+          <a:chExt cx="0" cy="0"/>
+        </a:xfrm>
+      </p:grpSpPr>
+      <p:sp>
+        <p:nvSpPr>
+          <p:cNvPr id="2" name="Slide Image Placeholder 1"/>
+          <p:cNvSpPr>
+            <a:spLocks noGrp="1" noRot="1" noChangeAspect="1"/>
+          </p:cNvSpPr>
+          <p:nvPr>
+            <p:ph type="sldImg"/>
+          </p:nvPr>
+        </p:nvSpPr>
+        <p:spPr/>
+      </p:sp>
+      <p:sp>
+        <p:nvSpPr>
+          <p:cNvPr id="3" name="Notes Placeholder 2"/>
+          <p:cNvSpPr>
+            <a:spLocks noGrp="1"/>
+          </p:cNvSpPr>
+          <p:nvPr>
+            <p:ph type="body" idx="1"/>
+          </p:nvPr>
+        </p:nvSpPr>
+        <p:spPr/>
+        <p:txBody>
+          <a:bodyPr/>
+          <a:lstStyle/>
+          <a:p>
+            <a:r>
+              <a:rPr lang="en-US" dirty="0"/>
+              <a:t/>
+            </a:r>
+            <a:endParaRPr lang="en-US" dirty="0"/>
+          </a:p>
+        </p:txBody>
+      </p:sp>
+      <p:sp>
+        <p:nvSpPr>
+          <p:cNvPr id="4" name="Slide Number Placeholder 3"/>
+          <p:cNvSpPr>
+            <a:spLocks noGrp="1"/>
+          </p:cNvSpPr>
+          <p:nvPr>
+            <p:ph type="sldNum" sz="quarter" idx="10"/>
+          </p:nvPr>
+        </p:nvSpPr>
+        <p:spPr/>
+        <p:txBody>
+          <a:bodyPr/>
+          <a:lstStyle/>
+          <a:p>
+            <a:fld id="{F7021451-1387-4CA6-816F-3879F97B5CBC}" type="slidenum">
+              <a:rPr lang="en-US"/>
+              <a:t>5</a:t>
+            </a:fld>
+            <a:endParaRPr lang="en-US"/>
+          </a:p>
+        </p:txBody>
+      </p:sp>
+    </p:spTree>
+    <p:extLst>
+      <p:ext uri="{BB962C8B-B14F-4D97-AF65-F5344CB8AC3E}">
+        <p14:creationId xmlns:p14="http://schemas.microsoft.com/office/powerpoint/2010/main" val="1024086991"/>
+      </p:ext>
+    </p:extLst>
+  </p:cSld>
+  <p:clrMapOvr>
+    <a:masterClrMapping/>
+  </p:clrMapOvr>
+</p:notes>
+</file>
+
+<file path=ppt/notesSlides/notesSlide6.xml><?xml version="1.0" encoding="utf-8"?>
+<p:notes xmlns:a="http://schemas.openxmlformats.org/drawingml/2006/main" xmlns:r="http://schemas.openxmlformats.org/officeDocument/2006/relationships" xmlns:p="http://schemas.openxmlformats.org/presentationml/2006/main">
+  <p:cSld>
+    <p:spTree>
+      <p:nvGrpSpPr>
+        <p:cNvPr id="1" name=""/>
+        <p:cNvGrpSpPr/>
+        <p:nvPr/>
+      </p:nvGrpSpPr>
+      <p:grpSpPr>
+        <a:xfrm>
+          <a:off x="0" y="0"/>
+          <a:ext cx="0" cy="0"/>
+          <a:chOff x="0" y="0"/>
+          <a:chExt cx="0" cy="0"/>
+        </a:xfrm>
+      </p:grpSpPr>
+      <p:sp>
+        <p:nvSpPr>
+          <p:cNvPr id="2" name="Slide Image Placeholder 1"/>
+          <p:cNvSpPr>
+            <a:spLocks noGrp="1" noRot="1" noChangeAspect="1"/>
+          </p:cNvSpPr>
+          <p:nvPr>
+            <p:ph type="sldImg"/>
+          </p:nvPr>
+        </p:nvSpPr>
+        <p:spPr/>
+      </p:sp>
+      <p:sp>
+        <p:nvSpPr>
+          <p:cNvPr id="3" name="Notes Placeholder 2"/>
+          <p:cNvSpPr>
+            <a:spLocks noGrp="1"/>
+          </p:cNvSpPr>
+          <p:nvPr>
+            <p:ph type="body" idx="1"/>
+          </p:nvPr>
+        </p:nvSpPr>
+        <p:spPr/>
+        <p:txBody>
+          <a:bodyPr/>
+          <a:lstStyle/>
+          <a:p>
+            <a:r>
+              <a:rPr lang="en-US" dirty="0"/>
+              <a:t/>
+            </a:r>
+            <a:endParaRPr lang="en-US" dirty="0"/>
+          </a:p>
+        </p:txBody>
+      </p:sp>
+      <p:sp>
+        <p:nvSpPr>
+          <p:cNvPr id="4" name="Slide Number Placeholder 3"/>
+          <p:cNvSpPr>
+            <a:spLocks noGrp="1"/>
+          </p:cNvSpPr>
+          <p:nvPr>
+            <p:ph type="sldNum" sz="quarter" idx="10"/>
+          </p:nvPr>
+        </p:nvSpPr>
+        <p:spPr/>
+        <p:txBody>
+          <a:bodyPr/>
+          <a:lstStyle/>
+          <a:p>
+            <a:fld id="{F7021451-1387-4CA6-816F-3879F97B5CBC}" type="slidenum">
+              <a:rPr lang="en-US"/>
+              <a:t>6</a:t>
+            </a:fld>
+            <a:endParaRPr lang="en-US"/>
+          </a:p>
+        </p:txBody>
+      </p:sp>
+    </p:spTree>
+    <p:extLst>
+      <p:ext uri="{BB962C8B-B14F-4D97-AF65-F5344CB8AC3E}">
+        <p14:creationId xmlns:p14="http://schemas.microsoft.com/office/powerpoint/2010/main" val="1024086991"/>
+      </p:ext>
+    </p:extLst>
+  </p:cSld>
+  <p:clrMapOvr>
+    <a:masterClrMapping/>
+  </p:clrMapOvr>
+</p:notes>
+</file>
+
 <file path=ppt/slideLayouts/slideLayout1.xml><?xml version="1.0" encoding="utf-8"?>
 <p:sldLayout xmlns:a="http://schemas.openxmlformats.org/drawingml/2006/main" xmlns:r="http://schemas.openxmlformats.org/officeDocument/2006/relationships" xmlns:p="http://schemas.openxmlformats.org/presentationml/2006/main" preserve="1">
   <p:cSld name="DEFAULT">
@@ -1170,7 +1348,7 @@
         </p:nvSpPr>
         <p:spPr>
           <a:xfrm>
-            <a:off x="731520" y="1280160"/>
+            <a:off x="731520" y="1097280"/>
             <a:ext cx="7772400" cy="1371600"/>
           </a:xfrm>
           <a:prstGeom prst="rect">
@@ -1187,7 +1365,7 @@
               <a:buNone/>
             </a:pPr>
             <a:r>
-              <a:rPr lang="en-US" sz="3600" b="1" dirty="0">
+              <a:rPr lang="en-US" sz="4000" b="1" dirty="0">
                 <a:solidFill>
                   <a:srgbClr val="FFFFFF"/>
                 </a:solidFill>
@@ -1197,7 +1375,7 @@
               </a:rPr>
               <a:t>Mean, Median, Mode, Range</a:t>
             </a:r>
-            <a:endParaRPr lang="en-US" sz="3600" dirty="0"/>
+            <a:endParaRPr lang="en-US" sz="4000" dirty="0"/>
           </a:p>
         </p:txBody>
       </p:sp>
@@ -1209,7 +1387,7 @@
         </p:nvSpPr>
         <p:spPr>
           <a:xfrm>
-            <a:off x="731520" y="2743200"/>
+            <a:off x="731520" y="2560320"/>
             <a:ext cx="7772400" cy="548640"/>
           </a:xfrm>
           <a:prstGeom prst="rect">
@@ -1228,13 +1406,13 @@
             <a:r>
               <a:rPr lang="en-US" sz="1600" dirty="0">
                 <a:solidFill>
-                  <a:srgbClr val="9B9690"/>
+                  <a:srgbClr val="E9C46A"/>
                 </a:solidFill>
                 <a:latin typeface="Calibri" pitchFamily="34" charset="0"/>
                 <a:ea typeface="Calibri" pitchFamily="34" charset="-122"/>
                 <a:cs typeface="Calibri" pitchFamily="34" charset="-120"/>
               </a:rPr>
-              <a:t>G6 Maths · Probability &amp; Statistics</a:t>
+              <a:t>Grade 6 Mathematics · Mr Zocchi</a:t>
             </a:r>
             <a:endParaRPr lang="en-US" sz="1600" dirty="0"/>
           </a:p>
@@ -1242,14 +1420,36 @@
       </p:sp>
       <p:sp>
         <p:nvSpPr>
-          <p:cNvPr id="5" name="Text 3"/>
-          <p:cNvSpPr/>
-          <p:nvPr/>
-        </p:nvSpPr>
-        <p:spPr>
-          <a:xfrm>
-            <a:off x="731520" y="4389120"/>
-            <a:ext cx="7772400" cy="457200"/>
+          <p:cNvPr id="5" name="Shape 3"/>
+          <p:cNvSpPr/>
+          <p:nvPr/>
+        </p:nvSpPr>
+        <p:spPr>
+          <a:xfrm>
+            <a:off x="731520" y="3474720"/>
+            <a:ext cx="2011680" cy="411480"/>
+          </a:xfrm>
+          <a:prstGeom prst="roundRect">
+            <a:avLst>
+              <a:gd name="adj" fmla="val 17778"/>
+            </a:avLst>
+          </a:prstGeom>
+          <a:solidFill>
+            <a:srgbClr val="2A9D8F"/>
+          </a:solidFill>
+          <a:ln/>
+        </p:spPr>
+      </p:sp>
+      <p:sp>
+        <p:nvSpPr>
+          <p:cNvPr id="6" name="Text 4"/>
+          <p:cNvSpPr/>
+          <p:nvPr/>
+        </p:nvSpPr>
+        <p:spPr>
+          <a:xfrm>
+            <a:off x="731520" y="3474720"/>
+            <a:ext cx="2011680" cy="411480"/>
           </a:xfrm>
           <a:prstGeom prst="rect">
             <a:avLst/>
@@ -1261,21 +1461,21 @@
           <a:bodyPr wrap="square" rtlCol="0" anchor="ctr"/>
           <a:lstStyle/>
           <a:p>
-            <a:pPr indent="0" marL="0">
+            <a:pPr algn="ctr" indent="0" marL="0">
               <a:buNone/>
             </a:pPr>
             <a:r>
-              <a:rPr lang="en-US" sz="1000" dirty="0">
-                <a:solidFill>
-                  <a:srgbClr val="6B6660"/>
+              <a:rPr lang="en-US" sz="1200" b="1" dirty="0">
+                <a:solidFill>
+                  <a:srgbClr val="FFFFFF"/>
                 </a:solidFill>
                 <a:latin typeface="Calibri" pitchFamily="34" charset="0"/>
                 <a:ea typeface="Calibri" pitchFamily="34" charset="-122"/>
                 <a:cs typeface="Calibri" pitchFamily="34" charset="-120"/>
               </a:rPr>
-              <a:t>Mr Zocchi · mrzocchi.com</a:t>
-            </a:r>
-            <a:endParaRPr lang="en-US" sz="1000" dirty="0"/>
+              <a:t>Term 5 · Probability &amp; Statistics</a:t>
+            </a:r>
+            <a:endParaRPr lang="en-US" sz="1200" dirty="0"/>
           </a:p>
         </p:txBody>
       </p:sp>
@@ -1293,7 +1493,7 @@
     <p:bg>
       <p:bgPr>
         <a:solidFill>
-          <a:srgbClr val="FFFFFF"/>
+          <a:srgbClr val="FAF8F5"/>
         </a:solidFill>
       </p:bgPr>
     </p:bg>
@@ -1339,8 +1539,8 @@
         </p:nvSpPr>
         <p:spPr>
           <a:xfrm>
-            <a:off x="548640" y="274320"/>
-            <a:ext cx="8046720" cy="640080"/>
+            <a:off x="7772400" y="4709160"/>
+            <a:ext cx="1097280" cy="320040"/>
           </a:xfrm>
           <a:prstGeom prst="rect">
             <a:avLst/>
@@ -1349,14 +1549,105 @@
           <a:ln/>
         </p:spPr>
         <p:txBody>
-          <a:bodyPr wrap="square" lIns="0" tIns="0" rIns="0" bIns="0" rtlCol="0" anchor="ctr"/>
+          <a:bodyPr wrap="square" rtlCol="0" anchor="ctr"/>
+          <a:lstStyle/>
+          <a:p>
+            <a:pPr algn="r" indent="0" marL="0">
+              <a:buNone/>
+            </a:pPr>
+            <a:r>
+              <a:rPr lang="en-US" sz="900" dirty="0">
+                <a:solidFill>
+                  <a:srgbClr val="6B6660"/>
+                </a:solidFill>
+                <a:latin typeface="Calibri" pitchFamily="34" charset="0"/>
+                <a:ea typeface="Calibri" pitchFamily="34" charset="-122"/>
+                <a:cs typeface="Calibri" pitchFamily="34" charset="-120"/>
+              </a:rPr>
+              <a:t>2 / 6</a:t>
+            </a:r>
+            <a:endParaRPr lang="en-US" sz="900" dirty="0"/>
+          </a:p>
+        </p:txBody>
+      </p:sp>
+      <p:sp>
+        <p:nvSpPr>
+          <p:cNvPr id="4" name="Shape 2"/>
+          <p:cNvSpPr/>
+          <p:nvPr/>
+        </p:nvSpPr>
+        <p:spPr>
+          <a:xfrm>
+            <a:off x="1371600" y="914400"/>
+            <a:ext cx="6400800" cy="3200400"/>
+          </a:xfrm>
+          <a:prstGeom prst="rect">
+            <a:avLst/>
+          </a:prstGeom>
+          <a:solidFill>
+            <a:srgbClr val="FFFFFF"/>
+          </a:solidFill>
+          <a:ln w="12700">
+            <a:solidFill>
+              <a:srgbClr val="E5E2DC"/>
+            </a:solidFill>
+            <a:prstDash val="solid"/>
+          </a:ln>
+          <a:effectLst>
+            <a:outerShdw sx="100000" sy="100000" kx="0" ky="0" algn="bl" rotWithShape="0" blurRad="50800" dist="25400" dir="8100000">
+              <a:srgbClr val="000000">
+                <a:alpha val="10000"/>
+              </a:srgbClr>
+            </a:outerShdw>
+          </a:effectLst>
+        </p:spPr>
+      </p:sp>
+      <p:sp>
+        <p:nvSpPr>
+          <p:cNvPr id="5" name="Shape 3"/>
+          <p:cNvSpPr/>
+          <p:nvPr/>
+        </p:nvSpPr>
+        <p:spPr>
+          <a:xfrm>
+            <a:off x="1371600" y="914400"/>
+            <a:ext cx="91440" cy="3200400"/>
+          </a:xfrm>
+          <a:prstGeom prst="rect">
+            <a:avLst/>
+          </a:prstGeom>
+          <a:solidFill>
+            <a:srgbClr val="2A9D8F"/>
+          </a:solidFill>
+          <a:ln/>
+        </p:spPr>
+      </p:sp>
+      <p:sp>
+        <p:nvSpPr>
+          <p:cNvPr id="6" name="Text 4"/>
+          <p:cNvSpPr/>
+          <p:nvPr/>
+        </p:nvSpPr>
+        <p:spPr>
+          <a:xfrm>
+            <a:off x="1828800" y="1097280"/>
+            <a:ext cx="5669280" cy="640080"/>
+          </a:xfrm>
+          <a:prstGeom prst="rect">
+            <a:avLst/>
+          </a:prstGeom>
+          <a:noFill/>
+          <a:ln/>
+        </p:spPr>
+        <p:txBody>
+          <a:bodyPr wrap="square" rtlCol="0" anchor="ctr"/>
           <a:lstStyle/>
           <a:p>
             <a:pPr indent="0" marL="0">
               <a:buNone/>
             </a:pPr>
             <a:r>
-              <a:rPr lang="en-US" sz="2600" b="1" dirty="0">
+              <a:rPr lang="en-US" sz="2400" b="1" dirty="0">
                 <a:solidFill>
                   <a:srgbClr val="1B2A4A"/>
                 </a:solidFill>
@@ -1364,22 +1655,22 @@
                 <a:ea typeface="Georgia" pitchFamily="34" charset="-122"/>
                 <a:cs typeface="Georgia" pitchFamily="34" charset="-120"/>
               </a:rPr>
-              <a:t>Averages &amp; Range</a:t>
-            </a:r>
-            <a:endParaRPr lang="en-US" sz="2600" dirty="0"/>
-          </a:p>
-        </p:txBody>
-      </p:sp>
-      <p:sp>
-        <p:nvSpPr>
-          <p:cNvPr id="4" name="Text 2"/>
-          <p:cNvSpPr/>
-          <p:nvPr/>
-        </p:nvSpPr>
-        <p:spPr>
-          <a:xfrm>
-            <a:off x="548640" y="1097280"/>
-            <a:ext cx="8046720" cy="3474720"/>
+              <a:t>Averages and Spread</a:t>
+            </a:r>
+            <a:endParaRPr lang="en-US" sz="2400" dirty="0"/>
+          </a:p>
+        </p:txBody>
+      </p:sp>
+      <p:sp>
+        <p:nvSpPr>
+          <p:cNvPr id="7" name="Text 5"/>
+          <p:cNvSpPr/>
+          <p:nvPr/>
+        </p:nvSpPr>
+        <p:spPr>
+          <a:xfrm>
+            <a:off x="1828800" y="1828800"/>
+            <a:ext cx="5669280" cy="2011680"/>
           </a:xfrm>
           <a:prstGeom prst="rect">
             <a:avLst/>
@@ -1391,12 +1682,11 @@
           <a:bodyPr wrap="square" rtlCol="0" anchor="t"/>
           <a:lstStyle/>
           <a:p>
-            <a:pPr marL="342900" indent="-342900">
-              <a:spcAft>
-                <a:spcPts val="800"/>
-              </a:spcAft>
-              <a:buSzPct val="100000"/>
-              <a:buChar char="•"/>
+            <a:pPr indent="0" marL="0">
+              <a:lnSpc>
+                <a:spcPct val="130000"/>
+              </a:lnSpc>
+              <a:buNone/>
             </a:pPr>
             <a:r>
               <a:rPr lang="en-US" sz="1500" dirty="0">
@@ -1407,129 +1697,9 @@
                 <a:ea typeface="Calibri" pitchFamily="34" charset="-122"/>
                 <a:cs typeface="Calibri" pitchFamily="34" charset="-120"/>
               </a:rPr>
-              <a:t>MEAN: add all values, divide by how many there are</a:t>
+              <a:t>An average represents a 'typical' value in a data set. There are three types: mean, median, and mode. The range measures how spread out the data is. Each average is useful in different situations — choosing the right one matters.</a:t>
             </a:r>
             <a:endParaRPr lang="en-US" sz="1500" dirty="0"/>
-          </a:p>
-          <a:p>
-            <a:pPr marL="342900" indent="-342900">
-              <a:spcAft>
-                <a:spcPts val="800"/>
-              </a:spcAft>
-              <a:buSzPct val="100000"/>
-              <a:buChar char="•"/>
-            </a:pPr>
-            <a:r>
-              <a:rPr lang="en-US" sz="1500" dirty="0">
-                <a:solidFill>
-                  <a:srgbClr val="3D3A36"/>
-                </a:solidFill>
-                <a:latin typeface="Calibri" pitchFamily="34" charset="0"/>
-                <a:ea typeface="Calibri" pitchFamily="34" charset="-122"/>
-                <a:cs typeface="Calibri" pitchFamily="34" charset="-120"/>
-              </a:rPr>
-              <a:t>MEDIAN: the middle value when data is in ORDER</a:t>
-            </a:r>
-            <a:endParaRPr lang="en-US" sz="1500" dirty="0"/>
-          </a:p>
-          <a:p>
-            <a:pPr marL="342900" indent="-342900">
-              <a:spcAft>
-                <a:spcPts val="800"/>
-              </a:spcAft>
-              <a:buSzPct val="100000"/>
-              <a:buChar char="•"/>
-            </a:pPr>
-            <a:r>
-              <a:rPr lang="en-US" sz="1500" dirty="0">
-                <a:solidFill>
-                  <a:srgbClr val="3D3A36"/>
-                </a:solidFill>
-                <a:latin typeface="Calibri" pitchFamily="34" charset="0"/>
-                <a:ea typeface="Calibri" pitchFamily="34" charset="-122"/>
-                <a:cs typeface="Calibri" pitchFamily="34" charset="-120"/>
-              </a:rPr>
-              <a:t>MODE: the most common value (can have none, one, or more than one)</a:t>
-            </a:r>
-            <a:endParaRPr lang="en-US" sz="1500" dirty="0"/>
-          </a:p>
-          <a:p>
-            <a:pPr marL="342900" indent="-342900">
-              <a:spcAft>
-                <a:spcPts val="800"/>
-              </a:spcAft>
-              <a:buSzPct val="100000"/>
-              <a:buChar char="•"/>
-            </a:pPr>
-            <a:r>
-              <a:rPr lang="en-US" sz="1500" dirty="0">
-                <a:solidFill>
-                  <a:srgbClr val="3D3A36"/>
-                </a:solidFill>
-                <a:latin typeface="Calibri" pitchFamily="34" charset="0"/>
-                <a:ea typeface="Calibri" pitchFamily="34" charset="-122"/>
-                <a:cs typeface="Calibri" pitchFamily="34" charset="-120"/>
-              </a:rPr>
-              <a:t>RANGE: highest value minus lowest value (measures spread, NOT an average)</a:t>
-            </a:r>
-            <a:endParaRPr lang="en-US" sz="1500" dirty="0"/>
-          </a:p>
-          <a:p>
-            <a:pPr marL="342900" indent="-342900">
-              <a:spcAft>
-                <a:spcPts val="800"/>
-              </a:spcAft>
-              <a:buSzPct val="100000"/>
-              <a:buChar char="•"/>
-            </a:pPr>
-            <a:r>
-              <a:rPr lang="en-US" sz="1500" dirty="0">
-                <a:solidFill>
-                  <a:srgbClr val="3D3A36"/>
-                </a:solidFill>
-                <a:latin typeface="Calibri" pitchFamily="34" charset="0"/>
-                <a:ea typeface="Calibri" pitchFamily="34" charset="-122"/>
-                <a:cs typeface="Calibri" pitchFamily="34" charset="-120"/>
-              </a:rPr>
-              <a:t>If two middle values (even number of data): median = mean of the two middle values</a:t>
-            </a:r>
-            <a:endParaRPr lang="en-US" sz="1500" dirty="0"/>
-          </a:p>
-        </p:txBody>
-      </p:sp>
-      <p:sp>
-        <p:nvSpPr>
-          <p:cNvPr id="5" name="Text 3"/>
-          <p:cNvSpPr/>
-          <p:nvPr/>
-        </p:nvSpPr>
-        <p:spPr>
-          <a:xfrm>
-            <a:off x="548640" y="4800600"/>
-            <a:ext cx="3657600" cy="274320"/>
-          </a:xfrm>
-          <a:prstGeom prst="rect">
-            <a:avLst/>
-          </a:prstGeom>
-          <a:noFill/>
-          <a:ln/>
-        </p:spPr>
-        <p:txBody>
-          <a:bodyPr wrap="square" rtlCol="0" anchor="ctr"/>
-          <a:lstStyle/>
-          <a:p>
-            <a:pPr indent="0" marL="0">
-              <a:buNone/>
-            </a:pPr>
-            <a:r>
-              <a:rPr lang="en-US" sz="800" dirty="0">
-                <a:solidFill>
-                  <a:srgbClr val="9B9690"/>
-                </a:solidFill>
-              </a:rPr>
-              <a:t>mrzocchi.com</a:t>
-            </a:r>
-            <a:endParaRPr lang="en-US" sz="800" dirty="0"/>
           </a:p>
         </p:txBody>
       </p:sp>
@@ -1547,7 +1717,7 @@
     <p:bg>
       <p:bgPr>
         <a:solidFill>
-          <a:srgbClr val="FFFFFF"/>
+          <a:srgbClr val="FAF8F5"/>
         </a:solidFill>
       </p:bgPr>
     </p:bg>
@@ -1593,8 +1763,8 @@
         </p:nvSpPr>
         <p:spPr>
           <a:xfrm>
-            <a:off x="548640" y="274320"/>
-            <a:ext cx="8046720" cy="640080"/>
+            <a:off x="7772400" y="4709160"/>
+            <a:ext cx="1097280" cy="320040"/>
           </a:xfrm>
           <a:prstGeom prst="rect">
             <a:avLst/>
@@ -1603,7 +1773,46 @@
           <a:ln/>
         </p:spPr>
         <p:txBody>
-          <a:bodyPr wrap="square" lIns="0" tIns="0" rIns="0" bIns="0" rtlCol="0" anchor="ctr"/>
+          <a:bodyPr wrap="square" rtlCol="0" anchor="ctr"/>
+          <a:lstStyle/>
+          <a:p>
+            <a:pPr algn="r" indent="0" marL="0">
+              <a:buNone/>
+            </a:pPr>
+            <a:r>
+              <a:rPr lang="en-US" sz="900" dirty="0">
+                <a:solidFill>
+                  <a:srgbClr val="6B6660"/>
+                </a:solidFill>
+                <a:latin typeface="Calibri" pitchFamily="34" charset="0"/>
+                <a:ea typeface="Calibri" pitchFamily="34" charset="-122"/>
+                <a:cs typeface="Calibri" pitchFamily="34" charset="-120"/>
+              </a:rPr>
+              <a:t>3 / 6</a:t>
+            </a:r>
+            <a:endParaRPr lang="en-US" sz="900" dirty="0"/>
+          </a:p>
+        </p:txBody>
+      </p:sp>
+      <p:sp>
+        <p:nvSpPr>
+          <p:cNvPr id="4" name="Text 2"/>
+          <p:cNvSpPr/>
+          <p:nvPr/>
+        </p:nvSpPr>
+        <p:spPr>
+          <a:xfrm>
+            <a:off x="457200" y="274320"/>
+            <a:ext cx="8229600" cy="640080"/>
+          </a:xfrm>
+          <a:prstGeom prst="rect">
+            <a:avLst/>
+          </a:prstGeom>
+          <a:noFill/>
+          <a:ln/>
+        </p:spPr>
+        <p:txBody>
+          <a:bodyPr wrap="square" rtlCol="0" anchor="ctr"/>
           <a:lstStyle/>
           <a:p>
             <a:pPr indent="0" marL="0">
@@ -1618,7 +1827,7 @@
                 <a:ea typeface="Georgia" pitchFamily="34" charset="-122"/>
                 <a:cs typeface="Georgia" pitchFamily="34" charset="-120"/>
               </a:rPr>
-              <a:t>When to Use Each</a:t>
+              <a:t>The Three Averages</a:t>
             </a:r>
             <a:endParaRPr lang="en-US" sz="2600" dirty="0"/>
           </a:p>
@@ -1626,14 +1835,66 @@
       </p:sp>
       <p:sp>
         <p:nvSpPr>
-          <p:cNvPr id="4" name="Text 2"/>
-          <p:cNvSpPr/>
-          <p:nvPr/>
-        </p:nvSpPr>
-        <p:spPr>
-          <a:xfrm>
-            <a:off x="548640" y="1097280"/>
-            <a:ext cx="8046720" cy="3474720"/>
+          <p:cNvPr id="5" name="Shape 3"/>
+          <p:cNvSpPr/>
+          <p:nvPr/>
+        </p:nvSpPr>
+        <p:spPr>
+          <a:xfrm>
+            <a:off x="457200" y="1188720"/>
+            <a:ext cx="2560320" cy="1828800"/>
+          </a:xfrm>
+          <a:prstGeom prst="rect">
+            <a:avLst/>
+          </a:prstGeom>
+          <a:solidFill>
+            <a:srgbClr val="FFFFFF"/>
+          </a:solidFill>
+          <a:ln w="12700">
+            <a:solidFill>
+              <a:srgbClr val="E5E2DC"/>
+            </a:solidFill>
+            <a:prstDash val="solid"/>
+          </a:ln>
+          <a:effectLst>
+            <a:outerShdw sx="100000" sy="100000" kx="0" ky="0" algn="bl" rotWithShape="0" blurRad="50800" dist="25400" dir="8100000">
+              <a:srgbClr val="000000">
+                <a:alpha val="10000"/>
+              </a:srgbClr>
+            </a:outerShdw>
+          </a:effectLst>
+        </p:spPr>
+      </p:sp>
+      <p:sp>
+        <p:nvSpPr>
+          <p:cNvPr id="6" name="Shape 4"/>
+          <p:cNvSpPr/>
+          <p:nvPr/>
+        </p:nvSpPr>
+        <p:spPr>
+          <a:xfrm>
+            <a:off x="457200" y="1188720"/>
+            <a:ext cx="2560320" cy="54864"/>
+          </a:xfrm>
+          <a:prstGeom prst="rect">
+            <a:avLst/>
+          </a:prstGeom>
+          <a:solidFill>
+            <a:srgbClr val="2A9D8F"/>
+          </a:solidFill>
+          <a:ln/>
+        </p:spPr>
+      </p:sp>
+      <p:sp>
+        <p:nvSpPr>
+          <p:cNvPr id="7" name="Text 5"/>
+          <p:cNvSpPr/>
+          <p:nvPr/>
+        </p:nvSpPr>
+        <p:spPr>
+          <a:xfrm>
+            <a:off x="594360" y="1325880"/>
+            <a:ext cx="2286000" cy="365760"/>
           </a:xfrm>
           <a:prstGeom prst="rect">
             <a:avLst/>
@@ -1642,39 +1903,53 @@
           <a:ln/>
         </p:spPr>
         <p:txBody>
-          <a:bodyPr wrap="square" rtlCol="0" anchor="t"/>
-          <a:lstStyle/>
-          <a:p>
-            <a:pPr marL="342900" indent="-342900">
-              <a:spcAft>
-                <a:spcPts val="800"/>
-              </a:spcAft>
-              <a:buSzPct val="100000"/>
-              <a:buChar char="•"/>
-            </a:pPr>
-            <a:r>
-              <a:rPr lang="en-US" sz="1500" dirty="0">
-                <a:solidFill>
-                  <a:srgbClr val="3D3A36"/>
+          <a:bodyPr wrap="square" rtlCol="0" anchor="ctr"/>
+          <a:lstStyle/>
+          <a:p>
+            <a:pPr indent="0" marL="0">
+              <a:buNone/>
+            </a:pPr>
+            <a:r>
+              <a:rPr lang="en-US" sz="1400" b="1" dirty="0">
+                <a:solidFill>
+                  <a:srgbClr val="1B2A4A"/>
                 </a:solidFill>
                 <a:latin typeface="Calibri" pitchFamily="34" charset="0"/>
                 <a:ea typeface="Calibri" pitchFamily="34" charset="-122"/>
                 <a:cs typeface="Calibri" pitchFamily="34" charset="-120"/>
               </a:rPr>
-              <a:t>Mean: best for data with no extreme values</a:t>
-            </a:r>
-            <a:endParaRPr lang="en-US" sz="1500" dirty="0"/>
-          </a:p>
-          <a:p>
-            <a:pPr marL="342900" indent="-342900">
-              <a:spcAft>
-                <a:spcPts val="800"/>
-              </a:spcAft>
-              <a:buSzPct val="100000"/>
-              <a:buChar char="•"/>
-            </a:pPr>
-            <a:r>
-              <a:rPr lang="en-US" sz="1500" dirty="0">
+              <a:t>Mean</a:t>
+            </a:r>
+            <a:endParaRPr lang="en-US" sz="1400" dirty="0"/>
+          </a:p>
+        </p:txBody>
+      </p:sp>
+      <p:sp>
+        <p:nvSpPr>
+          <p:cNvPr id="8" name="Text 6"/>
+          <p:cNvSpPr/>
+          <p:nvPr/>
+        </p:nvSpPr>
+        <p:spPr>
+          <a:xfrm>
+            <a:off x="594360" y="1737360"/>
+            <a:ext cx="2286000" cy="1097280"/>
+          </a:xfrm>
+          <a:prstGeom prst="rect">
+            <a:avLst/>
+          </a:prstGeom>
+          <a:noFill/>
+          <a:ln/>
+        </p:spPr>
+        <p:txBody>
+          <a:bodyPr wrap="square" rtlCol="0" anchor="t"/>
+          <a:lstStyle/>
+          <a:p>
+            <a:pPr indent="0" marL="0">
+              <a:buNone/>
+            </a:pPr>
+            <a:r>
+              <a:rPr lang="en-US" sz="1100" dirty="0">
                 <a:solidFill>
                   <a:srgbClr val="3D3A36"/>
                 </a:solidFill>
@@ -1682,41 +1957,129 @@
                 <a:ea typeface="Calibri" pitchFamily="34" charset="-122"/>
                 <a:cs typeface="Calibri" pitchFamily="34" charset="-120"/>
               </a:rPr>
-              <a:t>Median: best when there are outliers (extreme values)</a:t>
-            </a:r>
-            <a:endParaRPr lang="en-US" sz="1500" dirty="0"/>
-          </a:p>
-          <a:p>
-            <a:pPr marL="342900" indent="-342900">
-              <a:spcAft>
-                <a:spcPts val="800"/>
-              </a:spcAft>
-              <a:buSzPct val="100000"/>
-              <a:buChar char="•"/>
-            </a:pPr>
-            <a:r>
-              <a:rPr lang="en-US" sz="1500" dirty="0">
-                <a:solidFill>
-                  <a:srgbClr val="3D3A36"/>
+              <a:t>Add all values, divide by how many. Most common average. Affected by outliers. Example: 3,5,7,9,11 → mean = 35÷5 = 7.</a:t>
+            </a:r>
+            <a:endParaRPr lang="en-US" sz="1100" dirty="0"/>
+          </a:p>
+        </p:txBody>
+      </p:sp>
+      <p:sp>
+        <p:nvSpPr>
+          <p:cNvPr id="9" name="Shape 7"/>
+          <p:cNvSpPr/>
+          <p:nvPr/>
+        </p:nvSpPr>
+        <p:spPr>
+          <a:xfrm>
+            <a:off x="3291840" y="1188720"/>
+            <a:ext cx="2560320" cy="1828800"/>
+          </a:xfrm>
+          <a:prstGeom prst="rect">
+            <a:avLst/>
+          </a:prstGeom>
+          <a:solidFill>
+            <a:srgbClr val="FFFFFF"/>
+          </a:solidFill>
+          <a:ln w="12700">
+            <a:solidFill>
+              <a:srgbClr val="E5E2DC"/>
+            </a:solidFill>
+            <a:prstDash val="solid"/>
+          </a:ln>
+          <a:effectLst>
+            <a:outerShdw sx="100000" sy="100000" kx="0" ky="0" algn="bl" rotWithShape="0" blurRad="50800" dist="25400" dir="8100000">
+              <a:srgbClr val="000000">
+                <a:alpha val="10000"/>
+              </a:srgbClr>
+            </a:outerShdw>
+          </a:effectLst>
+        </p:spPr>
+      </p:sp>
+      <p:sp>
+        <p:nvSpPr>
+          <p:cNvPr id="10" name="Shape 8"/>
+          <p:cNvSpPr/>
+          <p:nvPr/>
+        </p:nvSpPr>
+        <p:spPr>
+          <a:xfrm>
+            <a:off x="3291840" y="1188720"/>
+            <a:ext cx="2560320" cy="54864"/>
+          </a:xfrm>
+          <a:prstGeom prst="rect">
+            <a:avLst/>
+          </a:prstGeom>
+          <a:solidFill>
+            <a:srgbClr val="2A9D8F"/>
+          </a:solidFill>
+          <a:ln/>
+        </p:spPr>
+      </p:sp>
+      <p:sp>
+        <p:nvSpPr>
+          <p:cNvPr id="11" name="Text 9"/>
+          <p:cNvSpPr/>
+          <p:nvPr/>
+        </p:nvSpPr>
+        <p:spPr>
+          <a:xfrm>
+            <a:off x="3429000" y="1325880"/>
+            <a:ext cx="2286000" cy="365760"/>
+          </a:xfrm>
+          <a:prstGeom prst="rect">
+            <a:avLst/>
+          </a:prstGeom>
+          <a:noFill/>
+          <a:ln/>
+        </p:spPr>
+        <p:txBody>
+          <a:bodyPr wrap="square" rtlCol="0" anchor="ctr"/>
+          <a:lstStyle/>
+          <a:p>
+            <a:pPr indent="0" marL="0">
+              <a:buNone/>
+            </a:pPr>
+            <a:r>
+              <a:rPr lang="en-US" sz="1400" b="1" dirty="0">
+                <a:solidFill>
+                  <a:srgbClr val="1B2A4A"/>
                 </a:solidFill>
                 <a:latin typeface="Calibri" pitchFamily="34" charset="0"/>
                 <a:ea typeface="Calibri" pitchFamily="34" charset="-122"/>
                 <a:cs typeface="Calibri" pitchFamily="34" charset="-120"/>
               </a:rPr>
-              <a:t>Mode: best for categorical data or 'most popular'</a:t>
-            </a:r>
-            <a:endParaRPr lang="en-US" sz="1500" dirty="0"/>
-          </a:p>
-          <a:p>
-            <a:pPr marL="342900" indent="-342900">
-              <a:spcAft>
-                <a:spcPts val="800"/>
-              </a:spcAft>
-              <a:buSzPct val="100000"/>
-              <a:buChar char="•"/>
-            </a:pPr>
-            <a:r>
-              <a:rPr lang="en-US" sz="1500" dirty="0">
+              <a:t>Median</a:t>
+            </a:r>
+            <a:endParaRPr lang="en-US" sz="1400" dirty="0"/>
+          </a:p>
+        </p:txBody>
+      </p:sp>
+      <p:sp>
+        <p:nvSpPr>
+          <p:cNvPr id="12" name="Text 10"/>
+          <p:cNvSpPr/>
+          <p:nvPr/>
+        </p:nvSpPr>
+        <p:spPr>
+          <a:xfrm>
+            <a:off x="3429000" y="1737360"/>
+            <a:ext cx="2286000" cy="1097280"/>
+          </a:xfrm>
+          <a:prstGeom prst="rect">
+            <a:avLst/>
+          </a:prstGeom>
+          <a:noFill/>
+          <a:ln/>
+        </p:spPr>
+        <p:txBody>
+          <a:bodyPr wrap="square" rtlCol="0" anchor="t"/>
+          <a:lstStyle/>
+          <a:p>
+            <a:pPr indent="0" marL="0">
+              <a:buNone/>
+            </a:pPr>
+            <a:r>
+              <a:rPr lang="en-US" sz="1100" dirty="0">
                 <a:solidFill>
                   <a:srgbClr val="3D3A36"/>
                 </a:solidFill>
@@ -1724,43 +2087,113 @@
                 <a:ea typeface="Calibri" pitchFamily="34" charset="-122"/>
                 <a:cs typeface="Calibri" pitchFamily="34" charset="-120"/>
               </a:rPr>
-              <a:t>Range: always report alongside an average to show spread</a:t>
-            </a:r>
-            <a:endParaRPr lang="en-US" sz="1500" dirty="0"/>
-          </a:p>
-          <a:p>
-            <a:pPr marL="342900" indent="-342900">
-              <a:spcAft>
-                <a:spcPts val="800"/>
-              </a:spcAft>
-              <a:buSzPct val="100000"/>
-              <a:buChar char="•"/>
-            </a:pPr>
-            <a:r>
-              <a:rPr lang="en-US" sz="1500" dirty="0">
-                <a:solidFill>
-                  <a:srgbClr val="3D3A36"/>
+              <a:t>The MIDDLE value when data is in order. If even number of values, average the two middle ones. Example: 3,5,7,9,11 → median = 7. Example: 2,4,6,8 → median = (4+6)÷2 = 5.</a:t>
+            </a:r>
+            <a:endParaRPr lang="en-US" sz="1100" dirty="0"/>
+          </a:p>
+        </p:txBody>
+      </p:sp>
+      <p:sp>
+        <p:nvSpPr>
+          <p:cNvPr id="13" name="Shape 11"/>
+          <p:cNvSpPr/>
+          <p:nvPr/>
+        </p:nvSpPr>
+        <p:spPr>
+          <a:xfrm>
+            <a:off x="6126480" y="1188720"/>
+            <a:ext cx="2560320" cy="1828800"/>
+          </a:xfrm>
+          <a:prstGeom prst="rect">
+            <a:avLst/>
+          </a:prstGeom>
+          <a:solidFill>
+            <a:srgbClr val="FFFFFF"/>
+          </a:solidFill>
+          <a:ln w="12700">
+            <a:solidFill>
+              <a:srgbClr val="E5E2DC"/>
+            </a:solidFill>
+            <a:prstDash val="solid"/>
+          </a:ln>
+          <a:effectLst>
+            <a:outerShdw sx="100000" sy="100000" kx="0" ky="0" algn="bl" rotWithShape="0" blurRad="50800" dist="25400" dir="8100000">
+              <a:srgbClr val="000000">
+                <a:alpha val="10000"/>
+              </a:srgbClr>
+            </a:outerShdw>
+          </a:effectLst>
+        </p:spPr>
+      </p:sp>
+      <p:sp>
+        <p:nvSpPr>
+          <p:cNvPr id="14" name="Shape 12"/>
+          <p:cNvSpPr/>
+          <p:nvPr/>
+        </p:nvSpPr>
+        <p:spPr>
+          <a:xfrm>
+            <a:off x="6126480" y="1188720"/>
+            <a:ext cx="2560320" cy="54864"/>
+          </a:xfrm>
+          <a:prstGeom prst="rect">
+            <a:avLst/>
+          </a:prstGeom>
+          <a:solidFill>
+            <a:srgbClr val="2A9D8F"/>
+          </a:solidFill>
+          <a:ln/>
+        </p:spPr>
+      </p:sp>
+      <p:sp>
+        <p:nvSpPr>
+          <p:cNvPr id="15" name="Text 13"/>
+          <p:cNvSpPr/>
+          <p:nvPr/>
+        </p:nvSpPr>
+        <p:spPr>
+          <a:xfrm>
+            <a:off x="6263640" y="1325880"/>
+            <a:ext cx="2286000" cy="365760"/>
+          </a:xfrm>
+          <a:prstGeom prst="rect">
+            <a:avLst/>
+          </a:prstGeom>
+          <a:noFill/>
+          <a:ln/>
+        </p:spPr>
+        <p:txBody>
+          <a:bodyPr wrap="square" rtlCol="0" anchor="ctr"/>
+          <a:lstStyle/>
+          <a:p>
+            <a:pPr indent="0" marL="0">
+              <a:buNone/>
+            </a:pPr>
+            <a:r>
+              <a:rPr lang="en-US" sz="1400" b="1" dirty="0">
+                <a:solidFill>
+                  <a:srgbClr val="1B2A4A"/>
                 </a:solidFill>
                 <a:latin typeface="Calibri" pitchFamily="34" charset="0"/>
                 <a:ea typeface="Calibri" pitchFamily="34" charset="-122"/>
                 <a:cs typeface="Calibri" pitchFamily="34" charset="-120"/>
               </a:rPr>
-              <a:t>Outlier: a value much higher or lower than the rest — affects the mean</a:t>
-            </a:r>
-            <a:endParaRPr lang="en-US" sz="1500" dirty="0"/>
-          </a:p>
-        </p:txBody>
-      </p:sp>
-      <p:sp>
-        <p:nvSpPr>
-          <p:cNvPr id="5" name="Text 3"/>
-          <p:cNvSpPr/>
-          <p:nvPr/>
-        </p:nvSpPr>
-        <p:spPr>
-          <a:xfrm>
-            <a:off x="548640" y="4800600"/>
-            <a:ext cx="3657600" cy="274320"/>
+              <a:t>Mode</a:t>
+            </a:r>
+            <a:endParaRPr lang="en-US" sz="1400" dirty="0"/>
+          </a:p>
+        </p:txBody>
+      </p:sp>
+      <p:sp>
+        <p:nvSpPr>
+          <p:cNvPr id="16" name="Text 14"/>
+          <p:cNvSpPr/>
+          <p:nvPr/>
+        </p:nvSpPr>
+        <p:spPr>
+          <a:xfrm>
+            <a:off x="6263640" y="1737360"/>
+            <a:ext cx="2286000" cy="1097280"/>
           </a:xfrm>
           <a:prstGeom prst="rect">
             <a:avLst/>
@@ -1769,21 +2202,24 @@
           <a:ln/>
         </p:spPr>
         <p:txBody>
-          <a:bodyPr wrap="square" rtlCol="0" anchor="ctr"/>
+          <a:bodyPr wrap="square" rtlCol="0" anchor="t"/>
           <a:lstStyle/>
           <a:p>
             <a:pPr indent="0" marL="0">
               <a:buNone/>
             </a:pPr>
             <a:r>
-              <a:rPr lang="en-US" sz="800" dirty="0">
-                <a:solidFill>
-                  <a:srgbClr val="9B9690"/>
-                </a:solidFill>
-              </a:rPr>
-              <a:t>mrzocchi.com</a:t>
-            </a:r>
-            <a:endParaRPr lang="en-US" sz="800" dirty="0"/>
+              <a:rPr lang="en-US" sz="1100" dirty="0">
+                <a:solidFill>
+                  <a:srgbClr val="3D3A36"/>
+                </a:solidFill>
+                <a:latin typeface="Calibri" pitchFamily="34" charset="0"/>
+                <a:ea typeface="Calibri" pitchFamily="34" charset="-122"/>
+                <a:cs typeface="Calibri" pitchFamily="34" charset="-120"/>
+              </a:rPr>
+              <a:t>The most FREQUENT value. There can be more than one mode, or no mode. Example: 2,3,3,5,7 → mode = 3. Useful for categorical data (e.g. most popular colour).</a:t>
+            </a:r>
+            <a:endParaRPr lang="en-US" sz="1100" dirty="0"/>
           </a:p>
         </p:txBody>
       </p:sp>
@@ -1798,6 +2234,744 @@
 <file path=ppt/slides/slide4.xml><?xml version="1.0" encoding="utf-8"?>
 <p:sld xmlns:a="http://schemas.openxmlformats.org/drawingml/2006/main" xmlns:r="http://schemas.openxmlformats.org/officeDocument/2006/relationships" xmlns:p="http://schemas.openxmlformats.org/presentationml/2006/main">
   <p:cSld name="Slide 4">
+    <p:bg>
+      <p:bgPr>
+        <a:solidFill>
+          <a:srgbClr val="FAF8F5"/>
+        </a:solidFill>
+      </p:bgPr>
+    </p:bg>
+    <p:spTree>
+      <p:nvGrpSpPr>
+        <p:cNvPr id="1" name=""/>
+        <p:cNvGrpSpPr/>
+        <p:nvPr/>
+      </p:nvGrpSpPr>
+      <p:grpSpPr>
+        <a:xfrm>
+          <a:off x="0" y="0"/>
+          <a:ext cx="0" cy="0"/>
+          <a:chOff x="0" y="0"/>
+          <a:chExt cx="0" cy="0"/>
+        </a:xfrm>
+      </p:grpSpPr>
+      <p:sp>
+        <p:nvSpPr>
+          <p:cNvPr id="2" name="Shape 0"/>
+          <p:cNvSpPr/>
+          <p:nvPr/>
+        </p:nvSpPr>
+        <p:spPr>
+          <a:xfrm>
+            <a:off x="0" y="0"/>
+            <a:ext cx="9144000" cy="54864"/>
+          </a:xfrm>
+          <a:prstGeom prst="rect">
+            <a:avLst/>
+          </a:prstGeom>
+          <a:solidFill>
+            <a:srgbClr val="2A9D8F"/>
+          </a:solidFill>
+          <a:ln/>
+        </p:spPr>
+      </p:sp>
+      <p:sp>
+        <p:nvSpPr>
+          <p:cNvPr id="3" name="Text 1"/>
+          <p:cNvSpPr/>
+          <p:nvPr/>
+        </p:nvSpPr>
+        <p:spPr>
+          <a:xfrm>
+            <a:off x="7772400" y="4709160"/>
+            <a:ext cx="1097280" cy="320040"/>
+          </a:xfrm>
+          <a:prstGeom prst="rect">
+            <a:avLst/>
+          </a:prstGeom>
+          <a:noFill/>
+          <a:ln/>
+        </p:spPr>
+        <p:txBody>
+          <a:bodyPr wrap="square" rtlCol="0" anchor="ctr"/>
+          <a:lstStyle/>
+          <a:p>
+            <a:pPr algn="r" indent="0" marL="0">
+              <a:buNone/>
+            </a:pPr>
+            <a:r>
+              <a:rPr lang="en-US" sz="900" dirty="0">
+                <a:solidFill>
+                  <a:srgbClr val="6B6660"/>
+                </a:solidFill>
+                <a:latin typeface="Calibri" pitchFamily="34" charset="0"/>
+                <a:ea typeface="Calibri" pitchFamily="34" charset="-122"/>
+                <a:cs typeface="Calibri" pitchFamily="34" charset="-120"/>
+              </a:rPr>
+              <a:t>4 / 6</a:t>
+            </a:r>
+            <a:endParaRPr lang="en-US" sz="900" dirty="0"/>
+          </a:p>
+        </p:txBody>
+      </p:sp>
+      <p:sp>
+        <p:nvSpPr>
+          <p:cNvPr id="4" name="Text 2"/>
+          <p:cNvSpPr/>
+          <p:nvPr/>
+        </p:nvSpPr>
+        <p:spPr>
+          <a:xfrm>
+            <a:off x="457200" y="274320"/>
+            <a:ext cx="8229600" cy="640080"/>
+          </a:xfrm>
+          <a:prstGeom prst="rect">
+            <a:avLst/>
+          </a:prstGeom>
+          <a:noFill/>
+          <a:ln/>
+        </p:spPr>
+        <p:txBody>
+          <a:bodyPr wrap="square" rtlCol="0" anchor="ctr"/>
+          <a:lstStyle/>
+          <a:p>
+            <a:pPr indent="0" marL="0">
+              <a:buNone/>
+            </a:pPr>
+            <a:r>
+              <a:rPr lang="en-US" sz="2600" b="1" dirty="0">
+                <a:solidFill>
+                  <a:srgbClr val="1B2A4A"/>
+                </a:solidFill>
+                <a:latin typeface="Georgia" pitchFamily="34" charset="0"/>
+                <a:ea typeface="Georgia" pitchFamily="34" charset="-122"/>
+                <a:cs typeface="Georgia" pitchFamily="34" charset="-120"/>
+              </a:rPr>
+              <a:t>Range</a:t>
+            </a:r>
+            <a:endParaRPr lang="en-US" sz="2600" dirty="0"/>
+          </a:p>
+        </p:txBody>
+      </p:sp>
+      <p:sp>
+        <p:nvSpPr>
+          <p:cNvPr id="5" name="Text 3"/>
+          <p:cNvSpPr/>
+          <p:nvPr/>
+        </p:nvSpPr>
+        <p:spPr>
+          <a:xfrm>
+            <a:off x="457200" y="1188720"/>
+            <a:ext cx="3840480" cy="3474720"/>
+          </a:xfrm>
+          <a:prstGeom prst="rect">
+            <a:avLst/>
+          </a:prstGeom>
+          <a:noFill/>
+          <a:ln/>
+        </p:spPr>
+        <p:txBody>
+          <a:bodyPr wrap="square" rtlCol="0" anchor="t"/>
+          <a:lstStyle/>
+          <a:p>
+            <a:pPr marL="342900" indent="-342900">
+              <a:spcAft>
+                <a:spcPts val="600"/>
+              </a:spcAft>
+              <a:buSzPct val="100000"/>
+              <a:buChar char="•"/>
+            </a:pPr>
+            <a:r>
+              <a:rPr lang="en-US" sz="1400" dirty="0">
+                <a:solidFill>
+                  <a:srgbClr val="3D3A36"/>
+                </a:solidFill>
+                <a:latin typeface="Calibri" pitchFamily="34" charset="0"/>
+                <a:ea typeface="Calibri" pitchFamily="34" charset="-122"/>
+                <a:cs typeface="Calibri" pitchFamily="34" charset="-120"/>
+              </a:rPr>
+              <a:t>Range = highest value − lowest value</a:t>
+            </a:r>
+            <a:endParaRPr lang="en-US" sz="1400" dirty="0"/>
+          </a:p>
+          <a:p>
+            <a:pPr marL="342900" indent="-342900">
+              <a:spcAft>
+                <a:spcPts val="600"/>
+              </a:spcAft>
+              <a:buSzPct val="100000"/>
+              <a:buChar char="•"/>
+            </a:pPr>
+            <a:r>
+              <a:rPr lang="en-US" sz="1400" dirty="0">
+                <a:solidFill>
+                  <a:srgbClr val="3D3A36"/>
+                </a:solidFill>
+                <a:latin typeface="Calibri" pitchFamily="34" charset="0"/>
+                <a:ea typeface="Calibri" pitchFamily="34" charset="-122"/>
+                <a:cs typeface="Calibri" pitchFamily="34" charset="-120"/>
+              </a:rPr>
+              <a:t>Measures the SPREAD of data</a:t>
+            </a:r>
+            <a:endParaRPr lang="en-US" sz="1400" dirty="0"/>
+          </a:p>
+          <a:p>
+            <a:pPr marL="342900" indent="-342900">
+              <a:spcAft>
+                <a:spcPts val="600"/>
+              </a:spcAft>
+              <a:buSzPct val="100000"/>
+              <a:buChar char="•"/>
+            </a:pPr>
+            <a:r>
+              <a:rPr lang="en-US" sz="1400" dirty="0">
+                <a:solidFill>
+                  <a:srgbClr val="3D3A36"/>
+                </a:solidFill>
+                <a:latin typeface="Calibri" pitchFamily="34" charset="0"/>
+                <a:ea typeface="Calibri" pitchFamily="34" charset="-122"/>
+                <a:cs typeface="Calibri" pitchFamily="34" charset="-120"/>
+              </a:rPr>
+              <a:t>Example: 3,5,7,9,11 → range = 11−3 = 8</a:t>
+            </a:r>
+            <a:endParaRPr lang="en-US" sz="1400" dirty="0"/>
+          </a:p>
+          <a:p>
+            <a:pPr marL="342900" indent="-342900">
+              <a:spcAft>
+                <a:spcPts val="600"/>
+              </a:spcAft>
+              <a:buSzPct val="100000"/>
+              <a:buChar char="•"/>
+            </a:pPr>
+            <a:r>
+              <a:rPr lang="en-US" sz="1400" dirty="0">
+                <a:solidFill>
+                  <a:srgbClr val="3D3A36"/>
+                </a:solidFill>
+                <a:latin typeface="Calibri" pitchFamily="34" charset="0"/>
+                <a:ea typeface="Calibri" pitchFamily="34" charset="-122"/>
+                <a:cs typeface="Calibri" pitchFamily="34" charset="-120"/>
+              </a:rPr>
+              <a:t>A large range = data is spread out</a:t>
+            </a:r>
+            <a:endParaRPr lang="en-US" sz="1400" dirty="0"/>
+          </a:p>
+          <a:p>
+            <a:pPr marL="342900" indent="-342900">
+              <a:spcAft>
+                <a:spcPts val="600"/>
+              </a:spcAft>
+              <a:buSzPct val="100000"/>
+              <a:buChar char="•"/>
+            </a:pPr>
+            <a:r>
+              <a:rPr lang="en-US" sz="1400" dirty="0">
+                <a:solidFill>
+                  <a:srgbClr val="3D3A36"/>
+                </a:solidFill>
+                <a:latin typeface="Calibri" pitchFamily="34" charset="0"/>
+                <a:ea typeface="Calibri" pitchFamily="34" charset="-122"/>
+                <a:cs typeface="Calibri" pitchFamily="34" charset="-120"/>
+              </a:rPr>
+              <a:t>A small range = data is consistent</a:t>
+            </a:r>
+            <a:endParaRPr lang="en-US" sz="1400" dirty="0"/>
+          </a:p>
+          <a:p>
+            <a:pPr marL="342900" indent="-342900">
+              <a:spcAft>
+                <a:spcPts val="600"/>
+              </a:spcAft>
+              <a:buSzPct val="100000"/>
+              <a:buChar char="•"/>
+            </a:pPr>
+            <a:r>
+              <a:rPr lang="en-US" sz="1400" dirty="0">
+                <a:solidFill>
+                  <a:srgbClr val="3D3A36"/>
+                </a:solidFill>
+                <a:latin typeface="Calibri" pitchFamily="34" charset="0"/>
+                <a:ea typeface="Calibri" pitchFamily="34" charset="-122"/>
+                <a:cs typeface="Calibri" pitchFamily="34" charset="-120"/>
+              </a:rPr>
+              <a:t>The range is affected by outliers</a:t>
+            </a:r>
+            <a:endParaRPr lang="en-US" sz="1400" dirty="0"/>
+          </a:p>
+        </p:txBody>
+      </p:sp>
+      <p:sp>
+        <p:nvSpPr>
+          <p:cNvPr id="6" name="Shape 4"/>
+          <p:cNvSpPr/>
+          <p:nvPr/>
+        </p:nvSpPr>
+        <p:spPr>
+          <a:xfrm>
+            <a:off x="4846320" y="1188720"/>
+            <a:ext cx="3840480" cy="3474720"/>
+          </a:xfrm>
+          <a:prstGeom prst="rect">
+            <a:avLst/>
+          </a:prstGeom>
+          <a:solidFill>
+            <a:srgbClr val="FFFFFF"/>
+          </a:solidFill>
+          <a:ln w="12700">
+            <a:solidFill>
+              <a:srgbClr val="E5E2DC"/>
+            </a:solidFill>
+            <a:prstDash val="solid"/>
+          </a:ln>
+          <a:effectLst>
+            <a:outerShdw sx="100000" sy="100000" kx="0" ky="0" algn="bl" rotWithShape="0" blurRad="50800" dist="25400" dir="8100000">
+              <a:srgbClr val="000000">
+                <a:alpha val="10000"/>
+              </a:srgbClr>
+            </a:outerShdw>
+          </a:effectLst>
+        </p:spPr>
+      </p:sp>
+      <p:sp>
+        <p:nvSpPr>
+          <p:cNvPr id="7" name="Shape 5"/>
+          <p:cNvSpPr/>
+          <p:nvPr/>
+        </p:nvSpPr>
+        <p:spPr>
+          <a:xfrm>
+            <a:off x="4846320" y="1188720"/>
+            <a:ext cx="3840480" cy="54864"/>
+          </a:xfrm>
+          <a:prstGeom prst="rect">
+            <a:avLst/>
+          </a:prstGeom>
+          <a:solidFill>
+            <a:srgbClr val="2A9D8F"/>
+          </a:solidFill>
+          <a:ln/>
+        </p:spPr>
+      </p:sp>
+      <p:sp>
+        <p:nvSpPr>
+          <p:cNvPr id="8" name="Text 6"/>
+          <p:cNvSpPr/>
+          <p:nvPr/>
+        </p:nvSpPr>
+        <p:spPr>
+          <a:xfrm>
+            <a:off x="5120640" y="1371600"/>
+            <a:ext cx="3291840" cy="3108960"/>
+          </a:xfrm>
+          <a:prstGeom prst="rect">
+            <a:avLst/>
+          </a:prstGeom>
+          <a:noFill/>
+          <a:ln/>
+        </p:spPr>
+        <p:txBody>
+          <a:bodyPr wrap="square" rtlCol="0" anchor="t"/>
+          <a:lstStyle/>
+          <a:p>
+            <a:pPr indent="0" marL="0">
+              <a:spcAft>
+                <a:spcPts val="400"/>
+              </a:spcAft>
+              <a:buNone/>
+            </a:pPr>
+            <a:r>
+              <a:rPr lang="en-US" sz="1600" b="1" dirty="0">
+                <a:solidFill>
+                  <a:srgbClr val="1B2A4A"/>
+                </a:solidFill>
+                <a:latin typeface="Calibri" pitchFamily="34" charset="0"/>
+                <a:ea typeface="Calibri" pitchFamily="34" charset="-122"/>
+                <a:cs typeface="Calibri" pitchFamily="34" charset="-120"/>
+              </a:rPr>
+              <a:t>When to Use Which?</a:t>
+            </a:r>
+            <a:endParaRPr lang="en-US" sz="1600" dirty="0"/>
+          </a:p>
+          <a:p>
+            <a:pPr indent="0" marL="0">
+              <a:spcAft>
+                <a:spcPts val="400"/>
+              </a:spcAft>
+              <a:buNone/>
+            </a:pPr>
+            <a:endParaRPr lang="en-US" sz="1600" dirty="0"/>
+          </a:p>
+          <a:p>
+            <a:pPr indent="0" marL="0">
+              <a:spcAft>
+                <a:spcPts val="400"/>
+              </a:spcAft>
+              <a:buNone/>
+            </a:pPr>
+            <a:r>
+              <a:rPr lang="en-US" sz="1300" dirty="0">
+                <a:solidFill>
+                  <a:srgbClr val="3D3A36"/>
+                </a:solidFill>
+                <a:latin typeface="Calibri" pitchFamily="34" charset="0"/>
+                <a:ea typeface="Calibri" pitchFamily="34" charset="-122"/>
+                <a:cs typeface="Calibri" pitchFamily="34" charset="-120"/>
+              </a:rPr>
+              <a:t>Mean: best for numerical data without outliers</a:t>
+            </a:r>
+            <a:endParaRPr lang="en-US" sz="1600" dirty="0"/>
+          </a:p>
+          <a:p>
+            <a:pPr indent="0" marL="0">
+              <a:spcAft>
+                <a:spcPts val="400"/>
+              </a:spcAft>
+              <a:buNone/>
+            </a:pPr>
+            <a:r>
+              <a:rPr lang="en-US" sz="1300" dirty="0">
+                <a:solidFill>
+                  <a:srgbClr val="3D3A36"/>
+                </a:solidFill>
+                <a:latin typeface="Calibri" pitchFamily="34" charset="0"/>
+                <a:ea typeface="Calibri" pitchFamily="34" charset="-122"/>
+                <a:cs typeface="Calibri" pitchFamily="34" charset="-120"/>
+              </a:rPr>
+              <a:t>Median: best when there are outliers (not affected)</a:t>
+            </a:r>
+            <a:endParaRPr lang="en-US" sz="1600" dirty="0"/>
+          </a:p>
+          <a:p>
+            <a:pPr indent="0" marL="0">
+              <a:spcAft>
+                <a:spcPts val="400"/>
+              </a:spcAft>
+              <a:buNone/>
+            </a:pPr>
+            <a:r>
+              <a:rPr lang="en-US" sz="1300" dirty="0">
+                <a:solidFill>
+                  <a:srgbClr val="3D3A36"/>
+                </a:solidFill>
+                <a:latin typeface="Calibri" pitchFamily="34" charset="0"/>
+                <a:ea typeface="Calibri" pitchFamily="34" charset="-122"/>
+                <a:cs typeface="Calibri" pitchFamily="34" charset="-120"/>
+              </a:rPr>
+              <a:t>Mode: best for categorical data or 'most popular'</a:t>
+            </a:r>
+            <a:endParaRPr lang="en-US" sz="1600" dirty="0"/>
+          </a:p>
+          <a:p>
+            <a:pPr indent="0" marL="0">
+              <a:spcAft>
+                <a:spcPts val="400"/>
+              </a:spcAft>
+              <a:buNone/>
+            </a:pPr>
+            <a:r>
+              <a:rPr lang="en-US" sz="1300" dirty="0">
+                <a:solidFill>
+                  <a:srgbClr val="3D3A36"/>
+                </a:solidFill>
+                <a:latin typeface="Calibri" pitchFamily="34" charset="0"/>
+                <a:ea typeface="Calibri" pitchFamily="34" charset="-122"/>
+                <a:cs typeface="Calibri" pitchFamily="34" charset="-120"/>
+              </a:rPr>
+              <a:t>Range: always useful to show spread</a:t>
+            </a:r>
+            <a:endParaRPr lang="en-US" sz="1600" dirty="0"/>
+          </a:p>
+          <a:p>
+            <a:pPr indent="0" marL="0">
+              <a:spcAft>
+                <a:spcPts val="400"/>
+              </a:spcAft>
+              <a:buNone/>
+            </a:pPr>
+            <a:r>
+              <a:rPr lang="en-US" sz="1300" dirty="0">
+                <a:solidFill>
+                  <a:srgbClr val="3D3A36"/>
+                </a:solidFill>
+                <a:latin typeface="Calibri" pitchFamily="34" charset="0"/>
+                <a:ea typeface="Calibri" pitchFamily="34" charset="-122"/>
+                <a:cs typeface="Calibri" pitchFamily="34" charset="-120"/>
+              </a:rPr>
+              <a:t>Example: salaries with one billionaire → median is more representative than mean</a:t>
+            </a:r>
+            <a:endParaRPr lang="en-US" sz="1600" dirty="0"/>
+          </a:p>
+        </p:txBody>
+      </p:sp>
+    </p:spTree>
+  </p:cSld>
+  <p:clrMapOvr>
+    <a:masterClrMapping/>
+  </p:clrMapOvr>
+</p:sld>
+</file>
+
+<file path=ppt/slides/slide5.xml><?xml version="1.0" encoding="utf-8"?>
+<p:sld xmlns:a="http://schemas.openxmlformats.org/drawingml/2006/main" xmlns:r="http://schemas.openxmlformats.org/officeDocument/2006/relationships" xmlns:p="http://schemas.openxmlformats.org/presentationml/2006/main">
+  <p:cSld name="Slide 5">
+    <p:bg>
+      <p:bgPr>
+        <a:solidFill>
+          <a:srgbClr val="FAF8F5"/>
+        </a:solidFill>
+      </p:bgPr>
+    </p:bg>
+    <p:spTree>
+      <p:nvGrpSpPr>
+        <p:cNvPr id="1" name=""/>
+        <p:cNvGrpSpPr/>
+        <p:nvPr/>
+      </p:nvGrpSpPr>
+      <p:grpSpPr>
+        <a:xfrm>
+          <a:off x="0" y="0"/>
+          <a:ext cx="0" cy="0"/>
+          <a:chOff x="0" y="0"/>
+          <a:chExt cx="0" cy="0"/>
+        </a:xfrm>
+      </p:grpSpPr>
+      <p:sp>
+        <p:nvSpPr>
+          <p:cNvPr id="2" name="Shape 0"/>
+          <p:cNvSpPr/>
+          <p:nvPr/>
+        </p:nvSpPr>
+        <p:spPr>
+          <a:xfrm>
+            <a:off x="0" y="0"/>
+            <a:ext cx="9144000" cy="54864"/>
+          </a:xfrm>
+          <a:prstGeom prst="rect">
+            <a:avLst/>
+          </a:prstGeom>
+          <a:solidFill>
+            <a:srgbClr val="2A9D8F"/>
+          </a:solidFill>
+          <a:ln/>
+        </p:spPr>
+      </p:sp>
+      <p:sp>
+        <p:nvSpPr>
+          <p:cNvPr id="3" name="Text 1"/>
+          <p:cNvSpPr/>
+          <p:nvPr/>
+        </p:nvSpPr>
+        <p:spPr>
+          <a:xfrm>
+            <a:off x="7772400" y="4709160"/>
+            <a:ext cx="1097280" cy="320040"/>
+          </a:xfrm>
+          <a:prstGeom prst="rect">
+            <a:avLst/>
+          </a:prstGeom>
+          <a:noFill/>
+          <a:ln/>
+        </p:spPr>
+        <p:txBody>
+          <a:bodyPr wrap="square" rtlCol="0" anchor="ctr"/>
+          <a:lstStyle/>
+          <a:p>
+            <a:pPr algn="r" indent="0" marL="0">
+              <a:buNone/>
+            </a:pPr>
+            <a:r>
+              <a:rPr lang="en-US" sz="900" dirty="0">
+                <a:solidFill>
+                  <a:srgbClr val="6B6660"/>
+                </a:solidFill>
+                <a:latin typeface="Calibri" pitchFamily="34" charset="0"/>
+                <a:ea typeface="Calibri" pitchFamily="34" charset="-122"/>
+                <a:cs typeface="Calibri" pitchFamily="34" charset="-120"/>
+              </a:rPr>
+              <a:t>5 / 6</a:t>
+            </a:r>
+            <a:endParaRPr lang="en-US" sz="900" dirty="0"/>
+          </a:p>
+        </p:txBody>
+      </p:sp>
+      <p:sp>
+        <p:nvSpPr>
+          <p:cNvPr id="4" name="Text 2"/>
+          <p:cNvSpPr/>
+          <p:nvPr/>
+        </p:nvSpPr>
+        <p:spPr>
+          <a:xfrm>
+            <a:off x="457200" y="274320"/>
+            <a:ext cx="8229600" cy="640080"/>
+          </a:xfrm>
+          <a:prstGeom prst="rect">
+            <a:avLst/>
+          </a:prstGeom>
+          <a:noFill/>
+          <a:ln/>
+        </p:spPr>
+        <p:txBody>
+          <a:bodyPr wrap="square" rtlCol="0" anchor="ctr"/>
+          <a:lstStyle/>
+          <a:p>
+            <a:pPr indent="0" marL="0">
+              <a:buNone/>
+            </a:pPr>
+            <a:r>
+              <a:rPr lang="en-US" sz="2600" b="1" dirty="0">
+                <a:solidFill>
+                  <a:srgbClr val="1B2A4A"/>
+                </a:solidFill>
+                <a:latin typeface="Georgia" pitchFamily="34" charset="0"/>
+                <a:ea typeface="Georgia" pitchFamily="34" charset="-122"/>
+                <a:cs typeface="Georgia" pitchFamily="34" charset="-120"/>
+              </a:rPr>
+              <a:t>Calculating from Frequency Tables</a:t>
+            </a:r>
+            <a:endParaRPr lang="en-US" sz="2600" dirty="0"/>
+          </a:p>
+        </p:txBody>
+      </p:sp>
+      <p:sp>
+        <p:nvSpPr>
+          <p:cNvPr id="5" name="Text 3"/>
+          <p:cNvSpPr/>
+          <p:nvPr/>
+        </p:nvSpPr>
+        <p:spPr>
+          <a:xfrm>
+            <a:off x="457200" y="1097280"/>
+            <a:ext cx="8229600" cy="3657600"/>
+          </a:xfrm>
+          <a:prstGeom prst="rect">
+            <a:avLst/>
+          </a:prstGeom>
+          <a:noFill/>
+          <a:ln/>
+        </p:spPr>
+        <p:txBody>
+          <a:bodyPr wrap="square" rtlCol="0" anchor="t"/>
+          <a:lstStyle/>
+          <a:p>
+            <a:pPr marL="342900" indent="-342900">
+              <a:spcAft>
+                <a:spcPts val="800"/>
+              </a:spcAft>
+              <a:buSzPct val="100000"/>
+              <a:buChar char="•"/>
+            </a:pPr>
+            <a:r>
+              <a:rPr lang="en-US" sz="1400" dirty="0">
+                <a:solidFill>
+                  <a:srgbClr val="3D3A36"/>
+                </a:solidFill>
+                <a:latin typeface="Calibri" pitchFamily="34" charset="0"/>
+                <a:ea typeface="Calibri" pitchFamily="34" charset="-122"/>
+                <a:cs typeface="Calibri" pitchFamily="34" charset="-120"/>
+              </a:rPr>
+              <a:t>Multiply each value by its frequency</a:t>
+            </a:r>
+            <a:endParaRPr lang="en-US" sz="1400" dirty="0"/>
+          </a:p>
+          <a:p>
+            <a:pPr marL="342900" indent="-342900">
+              <a:spcAft>
+                <a:spcPts val="800"/>
+              </a:spcAft>
+              <a:buSzPct val="100000"/>
+              <a:buChar char="•"/>
+            </a:pPr>
+            <a:r>
+              <a:rPr lang="en-US" sz="1400" dirty="0">
+                <a:solidFill>
+                  <a:srgbClr val="3D3A36"/>
+                </a:solidFill>
+                <a:latin typeface="Calibri" pitchFamily="34" charset="0"/>
+                <a:ea typeface="Calibri" pitchFamily="34" charset="-122"/>
+                <a:cs typeface="Calibri" pitchFamily="34" charset="-120"/>
+              </a:rPr>
+              <a:t>Add all the (value × frequency) products</a:t>
+            </a:r>
+            <a:endParaRPr lang="en-US" sz="1400" dirty="0"/>
+          </a:p>
+          <a:p>
+            <a:pPr marL="342900" indent="-342900">
+              <a:spcAft>
+                <a:spcPts val="800"/>
+              </a:spcAft>
+              <a:buSzPct val="100000"/>
+              <a:buChar char="•"/>
+            </a:pPr>
+            <a:r>
+              <a:rPr lang="en-US" sz="1400" dirty="0">
+                <a:solidFill>
+                  <a:srgbClr val="3D3A36"/>
+                </a:solidFill>
+                <a:latin typeface="Calibri" pitchFamily="34" charset="0"/>
+                <a:ea typeface="Calibri" pitchFamily="34" charset="-122"/>
+                <a:cs typeface="Calibri" pitchFamily="34" charset="-120"/>
+              </a:rPr>
+              <a:t>Divide by the total frequency</a:t>
+            </a:r>
+            <a:endParaRPr lang="en-US" sz="1400" dirty="0"/>
+          </a:p>
+          <a:p>
+            <a:pPr marL="342900" indent="-342900">
+              <a:spcAft>
+                <a:spcPts val="800"/>
+              </a:spcAft>
+              <a:buSzPct val="100000"/>
+              <a:buChar char="•"/>
+            </a:pPr>
+            <a:r>
+              <a:rPr lang="en-US" sz="1400" dirty="0">
+                <a:solidFill>
+                  <a:srgbClr val="3D3A36"/>
+                </a:solidFill>
+                <a:latin typeface="Calibri" pitchFamily="34" charset="0"/>
+                <a:ea typeface="Calibri" pitchFamily="34" charset="-122"/>
+                <a:cs typeface="Calibri" pitchFamily="34" charset="-120"/>
+              </a:rPr>
+              <a:t>Example: Score 1(×3), 2(×5), 3(×2) → mean = (3+10+6)÷10 = 1.9</a:t>
+            </a:r>
+            <a:endParaRPr lang="en-US" sz="1400" dirty="0"/>
+          </a:p>
+          <a:p>
+            <a:pPr marL="342900" indent="-342900">
+              <a:spcAft>
+                <a:spcPts val="800"/>
+              </a:spcAft>
+              <a:buSzPct val="100000"/>
+              <a:buChar char="•"/>
+            </a:pPr>
+            <a:r>
+              <a:rPr lang="en-US" sz="1400" dirty="0">
+                <a:solidFill>
+                  <a:srgbClr val="3D3A36"/>
+                </a:solidFill>
+                <a:latin typeface="Calibri" pitchFamily="34" charset="0"/>
+                <a:ea typeface="Calibri" pitchFamily="34" charset="-122"/>
+                <a:cs typeface="Calibri" pitchFamily="34" charset="-120"/>
+              </a:rPr>
+              <a:t>For grouped data, use the MIDPOINT of each group</a:t>
+            </a:r>
+            <a:endParaRPr lang="en-US" sz="1400" dirty="0"/>
+          </a:p>
+        </p:txBody>
+      </p:sp>
+    </p:spTree>
+  </p:cSld>
+  <p:clrMapOvr>
+    <a:masterClrMapping/>
+  </p:clrMapOvr>
+</p:sld>
+</file>
+
+<file path=ppt/slides/slide6.xml><?xml version="1.0" encoding="utf-8"?>
+<p:sld xmlns:a="http://schemas.openxmlformats.org/drawingml/2006/main" xmlns:r="http://schemas.openxmlformats.org/officeDocument/2006/relationships" xmlns:p="http://schemas.openxmlformats.org/presentationml/2006/main">
+  <p:cSld name="Slide 6">
     <p:bg>
       <p:bgPr>
         <a:solidFill>
@@ -1828,13 +3002,13 @@
         <p:spPr>
           <a:xfrm>
             <a:off x="0" y="0"/>
-            <a:ext cx="9144000" cy="54864"/>
-          </a:xfrm>
-          <a:prstGeom prst="rect">
-            <a:avLst/>
-          </a:prstGeom>
-          <a:solidFill>
-            <a:srgbClr val="2A9D8F"/>
+            <a:ext cx="109728" cy="5143500"/>
+          </a:xfrm>
+          <a:prstGeom prst="rect">
+            <a:avLst/>
+          </a:prstGeom>
+          <a:solidFill>
+            <a:srgbClr val="E9C46A"/>
           </a:solidFill>
           <a:ln/>
         </p:spPr>
@@ -1847,8 +3021,8 @@
         </p:nvSpPr>
         <p:spPr>
           <a:xfrm>
-            <a:off x="548640" y="457200"/>
-            <a:ext cx="8046720" cy="640080"/>
+            <a:off x="731520" y="457200"/>
+            <a:ext cx="7772400" cy="731520"/>
           </a:xfrm>
           <a:prstGeom prst="rect">
             <a:avLst/>
@@ -1864,7 +3038,7 @@
               <a:buNone/>
             </a:pPr>
             <a:r>
-              <a:rPr lang="en-US" sz="2800" b="1" dirty="0">
+              <a:rPr lang="en-US" sz="3200" b="1" dirty="0">
                 <a:solidFill>
                   <a:srgbClr val="FFFFFF"/>
                 </a:solidFill>
@@ -1874,7 +3048,7 @@
               </a:rPr>
               <a:t>Key Takeaways</a:t>
             </a:r>
-            <a:endParaRPr lang="en-US" sz="2800" dirty="0"/>
+            <a:endParaRPr lang="en-US" sz="3200" dirty="0"/>
           </a:p>
         </p:txBody>
       </p:sp>
@@ -1886,8 +3060,8 @@
         </p:nvSpPr>
         <p:spPr>
           <a:xfrm>
-            <a:off x="731520" y="1371600"/>
-            <a:ext cx="7680960" cy="3200400"/>
+            <a:off x="731520" y="1463040"/>
+            <a:ext cx="7772400" cy="3200400"/>
           </a:xfrm>
           <a:prstGeom prst="rect">
             <a:avLst/>
@@ -1907,7 +3081,7 @@
               <a:buChar char="•"/>
             </a:pPr>
             <a:r>
-              <a:rPr lang="en-US" sz="1600" dirty="0">
+              <a:rPr lang="en-US" sz="1500" dirty="0">
                 <a:solidFill>
                   <a:srgbClr val="CADCFC"/>
                 </a:solidFill>
@@ -1915,9 +3089,9 @@
                 <a:ea typeface="Calibri" pitchFamily="34" charset="-122"/>
                 <a:cs typeface="Calibri" pitchFamily="34" charset="-120"/>
               </a:rPr>
-              <a:t>Mean = total ÷ count | Median = middle value | Mode = most common</a:t>
-            </a:r>
-            <a:endParaRPr lang="en-US" sz="1600" dirty="0"/>
+              <a:t>Mean: add all ÷ count. Median: middle value. Mode: most frequent. Range: highest−lowest</a:t>
+            </a:r>
+            <a:endParaRPr lang="en-US" sz="1500" dirty="0"/>
           </a:p>
           <a:p>
             <a:pPr marL="342900" indent="-342900">
@@ -1928,7 +3102,7 @@
               <a:buChar char="•"/>
             </a:pPr>
             <a:r>
-              <a:rPr lang="en-US" sz="1600" dirty="0">
+              <a:rPr lang="en-US" sz="1500" dirty="0">
                 <a:solidFill>
                   <a:srgbClr val="CADCFC"/>
                 </a:solidFill>
@@ -1936,9 +3110,9 @@
                 <a:ea typeface="Calibri" pitchFamily="34" charset="-122"/>
                 <a:cs typeface="Calibri" pitchFamily="34" charset="-120"/>
               </a:rPr>
-              <a:t>Range = highest - lowest (not an average)</a:t>
-            </a:r>
-            <a:endParaRPr lang="en-US" sz="1600" dirty="0"/>
+              <a:t>Mean affected by outliers; median is not</a:t>
+            </a:r>
+            <a:endParaRPr lang="en-US" sz="1500" dirty="0"/>
           </a:p>
           <a:p>
             <a:pPr marL="342900" indent="-342900">
@@ -1949,7 +3123,7 @@
               <a:buChar char="•"/>
             </a:pPr>
             <a:r>
-              <a:rPr lang="en-US" sz="1600" dirty="0">
+              <a:rPr lang="en-US" sz="1500" dirty="0">
                 <a:solidFill>
                   <a:srgbClr val="CADCFC"/>
                 </a:solidFill>
@@ -1957,9 +3131,9 @@
                 <a:ea typeface="Calibri" pitchFamily="34" charset="-122"/>
                 <a:cs typeface="Calibri" pitchFamily="34" charset="-120"/>
               </a:rPr>
-              <a:t>Median resists outliers better than the mean</a:t>
-            </a:r>
-            <a:endParaRPr lang="en-US" sz="1600" dirty="0"/>
+              <a:t>From frequency tables: multiply value × frequency, sum, divide by total</a:t>
+            </a:r>
+            <a:endParaRPr lang="en-US" sz="1500" dirty="0"/>
           </a:p>
           <a:p>
             <a:pPr marL="342900" indent="-342900">
@@ -1970,7 +3144,7 @@
               <a:buChar char="•"/>
             </a:pPr>
             <a:r>
-              <a:rPr lang="en-US" sz="1600" dirty="0">
+              <a:rPr lang="en-US" sz="1500" dirty="0">
                 <a:solidFill>
                   <a:srgbClr val="CADCFC"/>
                 </a:solidFill>
@@ -1978,9 +3152,30 @@
                 <a:ea typeface="Calibri" pitchFamily="34" charset="-122"/>
                 <a:cs typeface="Calibri" pitchFamily="34" charset="-120"/>
               </a:rPr>
-              <a:t>Always put data in ORDER before finding the median</a:t>
-            </a:r>
-            <a:endParaRPr lang="en-US" sz="1600" dirty="0"/>
+              <a:t>Choose the right average for the situation</a:t>
+            </a:r>
+            <a:endParaRPr lang="en-US" sz="1500" dirty="0"/>
+          </a:p>
+          <a:p>
+            <a:pPr marL="342900" indent="-342900">
+              <a:spcAft>
+                <a:spcPts val="1000"/>
+              </a:spcAft>
+              <a:buSzPct val="100000"/>
+              <a:buChar char="•"/>
+            </a:pPr>
+            <a:r>
+              <a:rPr lang="en-US" sz="1500" dirty="0">
+                <a:solidFill>
+                  <a:srgbClr val="CADCFC"/>
+                </a:solidFill>
+                <a:latin typeface="Calibri" pitchFamily="34" charset="0"/>
+                <a:ea typeface="Calibri" pitchFamily="34" charset="-122"/>
+                <a:cs typeface="Calibri" pitchFamily="34" charset="-120"/>
+              </a:rPr>
+              <a:t>Range measures spread (large = spread out, small = consistent)</a:t>
+            </a:r>
+            <a:endParaRPr lang="en-US" sz="1500" dirty="0"/>
           </a:p>
         </p:txBody>
       </p:sp>
@@ -1992,8 +3187,8 @@
         </p:nvSpPr>
         <p:spPr>
           <a:xfrm>
-            <a:off x="548640" y="4572000"/>
-            <a:ext cx="3657600" cy="274320"/>
+            <a:off x="731520" y="4572000"/>
+            <a:ext cx="7772400" cy="365760"/>
           </a:xfrm>
           <a:prstGeom prst="rect">
             <a:avLst/>
@@ -2009,14 +3204,17 @@
               <a:buNone/>
             </a:pPr>
             <a:r>
-              <a:rPr lang="en-US" sz="1000" dirty="0">
-                <a:solidFill>
-                  <a:srgbClr val="6B6660"/>
-                </a:solidFill>
+              <a:rPr lang="en-US" sz="1100" dirty="0">
+                <a:solidFill>
+                  <a:srgbClr val="E9C46A"/>
+                </a:solidFill>
+                <a:latin typeface="Calibri" pitchFamily="34" charset="0"/>
+                <a:ea typeface="Calibri" pitchFamily="34" charset="-122"/>
+                <a:cs typeface="Calibri" pitchFamily="34" charset="-120"/>
               </a:rPr>
               <a:t>mrzocchi.com</a:t>
             </a:r>
-            <a:endParaRPr lang="en-US" sz="1000" dirty="0"/>
+            <a:endParaRPr lang="en-US" sz="1100" dirty="0"/>
           </a:p>
         </p:txBody>
       </p:sp>

--- a/static/ppts/G6_Math_T5_Averages.pptx
+++ b/static/ppts/G6_Math_T5_Averages.pptx
@@ -11,9 +11,10 @@
     <p:sldId id="259" r:id="rId5"/>
     <p:sldId id="260" r:id="rId6"/>
     <p:sldId id="261" r:id="rId7"/>
+    <p:sldId id="262" r:id="rId8"/>
   </p:sldIdLst>
   <p:notesMasterIdLst>
-    <p:notesMasterId r:id="rId8"/>
+    <p:notesMasterId r:id="rId9"/>
   </p:notesMasterIdLst>
   <p:sldSz cx="9144000" cy="5143500"/>
   <p:notesSz cx="5143500" cy="9144000"/>
@@ -989,6 +990,94 @@
 </p:notes>
 </file>
 
+<file path=ppt/notesSlides/notesSlide7.xml><?xml version="1.0" encoding="utf-8"?>
+<p:notes xmlns:a="http://schemas.openxmlformats.org/drawingml/2006/main" xmlns:r="http://schemas.openxmlformats.org/officeDocument/2006/relationships" xmlns:p="http://schemas.openxmlformats.org/presentationml/2006/main">
+  <p:cSld>
+    <p:spTree>
+      <p:nvGrpSpPr>
+        <p:cNvPr id="1" name=""/>
+        <p:cNvGrpSpPr/>
+        <p:nvPr/>
+      </p:nvGrpSpPr>
+      <p:grpSpPr>
+        <a:xfrm>
+          <a:off x="0" y="0"/>
+          <a:ext cx="0" cy="0"/>
+          <a:chOff x="0" y="0"/>
+          <a:chExt cx="0" cy="0"/>
+        </a:xfrm>
+      </p:grpSpPr>
+      <p:sp>
+        <p:nvSpPr>
+          <p:cNvPr id="2" name="Slide Image Placeholder 1"/>
+          <p:cNvSpPr>
+            <a:spLocks noGrp="1" noRot="1" noChangeAspect="1"/>
+          </p:cNvSpPr>
+          <p:nvPr>
+            <p:ph type="sldImg"/>
+          </p:nvPr>
+        </p:nvSpPr>
+        <p:spPr/>
+      </p:sp>
+      <p:sp>
+        <p:nvSpPr>
+          <p:cNvPr id="3" name="Notes Placeholder 2"/>
+          <p:cNvSpPr>
+            <a:spLocks noGrp="1"/>
+          </p:cNvSpPr>
+          <p:nvPr>
+            <p:ph type="body" idx="1"/>
+          </p:nvPr>
+        </p:nvSpPr>
+        <p:spPr/>
+        <p:txBody>
+          <a:bodyPr/>
+          <a:lstStyle/>
+          <a:p>
+            <a:r>
+              <a:rPr lang="en-US" dirty="0"/>
+              <a:t/>
+            </a:r>
+            <a:endParaRPr lang="en-US" dirty="0"/>
+          </a:p>
+        </p:txBody>
+      </p:sp>
+      <p:sp>
+        <p:nvSpPr>
+          <p:cNvPr id="4" name="Slide Number Placeholder 3"/>
+          <p:cNvSpPr>
+            <a:spLocks noGrp="1"/>
+          </p:cNvSpPr>
+          <p:nvPr>
+            <p:ph type="sldNum" sz="quarter" idx="10"/>
+          </p:nvPr>
+        </p:nvSpPr>
+        <p:spPr/>
+        <p:txBody>
+          <a:bodyPr/>
+          <a:lstStyle/>
+          <a:p>
+            <a:fld id="{F7021451-1387-4CA6-816F-3879F97B5CBC}" type="slidenum">
+              <a:rPr lang="en-US"/>
+              <a:t>7</a:t>
+            </a:fld>
+            <a:endParaRPr lang="en-US"/>
+          </a:p>
+        </p:txBody>
+      </p:sp>
+    </p:spTree>
+    <p:extLst>
+      <p:ext uri="{BB962C8B-B14F-4D97-AF65-F5344CB8AC3E}">
+        <p14:creationId xmlns:p14="http://schemas.microsoft.com/office/powerpoint/2010/main" val="1024086991"/>
+      </p:ext>
+    </p:extLst>
+  </p:cSld>
+  <p:clrMapOvr>
+    <a:masterClrMapping/>
+  </p:clrMapOvr>
+</p:notes>
+</file>
+
 <file path=ppt/slideLayouts/slideLayout1.xml><?xml version="1.0" encoding="utf-8"?>
 <p:sldLayout xmlns:a="http://schemas.openxmlformats.org/drawingml/2006/main" xmlns:r="http://schemas.openxmlformats.org/officeDocument/2006/relationships" xmlns:p="http://schemas.openxmlformats.org/presentationml/2006/main" preserve="1">
   <p:cSld name="DEFAULT">
@@ -1299,13 +1388,6 @@
 <file path=ppt/slides/slide1.xml><?xml version="1.0" encoding="utf-8"?>
 <p:sld xmlns:a="http://schemas.openxmlformats.org/drawingml/2006/main" xmlns:r="http://schemas.openxmlformats.org/officeDocument/2006/relationships" xmlns:p="http://schemas.openxmlformats.org/presentationml/2006/main">
   <p:cSld name="Slide 1">
-    <p:bg>
-      <p:bgPr>
-        <a:solidFill>
-          <a:srgbClr val="1B2A4A"/>
-        </a:solidFill>
-      </p:bgPr>
-    </p:bg>
     <p:spTree>
       <p:nvGrpSpPr>
         <p:cNvPr id="1" name=""/>
@@ -1329,7 +1411,27 @@
         <p:spPr>
           <a:xfrm>
             <a:off x="0" y="0"/>
-            <a:ext cx="109728" cy="5143500"/>
+            <a:ext cx="9144000" cy="5143500"/>
+          </a:xfrm>
+          <a:prstGeom prst="rect">
+            <a:avLst/>
+          </a:prstGeom>
+          <a:solidFill>
+            <a:srgbClr val="1B2A4A"/>
+          </a:solidFill>
+          <a:ln/>
+        </p:spPr>
+      </p:sp>
+      <p:sp>
+        <p:nvSpPr>
+          <p:cNvPr id="3" name="Shape 1"/>
+          <p:cNvSpPr/>
+          <p:nvPr/>
+        </p:nvSpPr>
+        <p:spPr>
+          <a:xfrm>
+            <a:off x="0" y="4777740"/>
+            <a:ext cx="9144000" cy="365760"/>
           </a:xfrm>
           <a:prstGeom prst="rect">
             <a:avLst/>
@@ -1342,14 +1444,36 @@
       </p:sp>
       <p:sp>
         <p:nvSpPr>
-          <p:cNvPr id="3" name="Text 1"/>
-          <p:cNvSpPr/>
-          <p:nvPr/>
-        </p:nvSpPr>
-        <p:spPr>
-          <a:xfrm>
-            <a:off x="731520" y="1097280"/>
-            <a:ext cx="7772400" cy="1371600"/>
+          <p:cNvPr id="4" name="Shape 2"/>
+          <p:cNvSpPr/>
+          <p:nvPr/>
+        </p:nvSpPr>
+        <p:spPr>
+          <a:xfrm>
+            <a:off x="6858000" y="-1371600"/>
+            <a:ext cx="4572000" cy="4572000"/>
+          </a:xfrm>
+          <a:prstGeom prst="ellipse">
+            <a:avLst/>
+          </a:prstGeom>
+          <a:solidFill>
+            <a:srgbClr val="2A9D8F">
+              <a:alpha val="12000"/>
+            </a:srgbClr>
+          </a:solidFill>
+          <a:ln/>
+        </p:spPr>
+      </p:sp>
+      <p:sp>
+        <p:nvSpPr>
+          <p:cNvPr id="5" name="Text 3"/>
+          <p:cNvSpPr/>
+          <p:nvPr/>
+        </p:nvSpPr>
+        <p:spPr>
+          <a:xfrm>
+            <a:off x="731520" y="914400"/>
+            <a:ext cx="7680960" cy="457200"/>
           </a:xfrm>
           <a:prstGeom prst="rect">
             <a:avLst/>
@@ -1365,7 +1489,46 @@
               <a:buNone/>
             </a:pPr>
             <a:r>
-              <a:rPr lang="en-US" sz="4000" b="1" dirty="0">
+              <a:rPr lang="en-US" sz="1300" b="1" spc="500" kern="0" dirty="0">
+                <a:solidFill>
+                  <a:srgbClr val="2A9D8F"/>
+                </a:solidFill>
+                <a:latin typeface="Calibri" pitchFamily="34" charset="0"/>
+                <a:ea typeface="Calibri" pitchFamily="34" charset="-122"/>
+                <a:cs typeface="Calibri" pitchFamily="34" charset="-120"/>
+              </a:rPr>
+              <a:t>GRADE 6 MATHEMATICS</a:t>
+            </a:r>
+            <a:endParaRPr lang="en-US" sz="1300" dirty="0"/>
+          </a:p>
+        </p:txBody>
+      </p:sp>
+      <p:sp>
+        <p:nvSpPr>
+          <p:cNvPr id="6" name="Text 4"/>
+          <p:cNvSpPr/>
+          <p:nvPr/>
+        </p:nvSpPr>
+        <p:spPr>
+          <a:xfrm>
+            <a:off x="731520" y="1463040"/>
+            <a:ext cx="6858000" cy="1645920"/>
+          </a:xfrm>
+          <a:prstGeom prst="rect">
+            <a:avLst/>
+          </a:prstGeom>
+          <a:noFill/>
+          <a:ln/>
+        </p:spPr>
+        <p:txBody>
+          <a:bodyPr wrap="square" rtlCol="0" anchor="t"/>
+          <a:lstStyle/>
+          <a:p>
+            <a:pPr indent="0" marL="0">
+              <a:buNone/>
+            </a:pPr>
+            <a:r>
+              <a:rPr lang="en-US" sz="3800" b="1" dirty="0">
                 <a:solidFill>
                   <a:srgbClr val="FFFFFF"/>
                 </a:solidFill>
@@ -1373,46 +1536,63 @@
                 <a:ea typeface="Georgia" pitchFamily="34" charset="-122"/>
                 <a:cs typeface="Georgia" pitchFamily="34" charset="-120"/>
               </a:rPr>
-              <a:t>Mean, Median, Mode, Range</a:t>
-            </a:r>
-            <a:endParaRPr lang="en-US" sz="4000" dirty="0"/>
-          </a:p>
-        </p:txBody>
-      </p:sp>
-      <p:sp>
-        <p:nvSpPr>
-          <p:cNvPr id="4" name="Text 2"/>
-          <p:cNvSpPr/>
-          <p:nvPr/>
-        </p:nvSpPr>
-        <p:spPr>
-          <a:xfrm>
-            <a:off x="731520" y="2560320"/>
-            <a:ext cx="7772400" cy="548640"/>
-          </a:xfrm>
-          <a:prstGeom prst="rect">
-            <a:avLst/>
-          </a:prstGeom>
-          <a:noFill/>
-          <a:ln/>
-        </p:spPr>
-        <p:txBody>
-          <a:bodyPr wrap="square" rtlCol="0" anchor="ctr"/>
-          <a:lstStyle/>
+              <a:t>Mean, Median,</a:t>
+            </a:r>
+            <a:endParaRPr lang="en-US" sz="3800" dirty="0"/>
+          </a:p>
           <a:p>
             <a:pPr indent="0" marL="0">
               <a:buNone/>
             </a:pPr>
             <a:r>
-              <a:rPr lang="en-US" sz="1600" dirty="0">
-                <a:solidFill>
-                  <a:srgbClr val="E9C46A"/>
+              <a:rPr lang="en-US" sz="3800" b="1" dirty="0">
+                <a:solidFill>
+                  <a:srgbClr val="FFFFFF"/>
+                </a:solidFill>
+                <a:latin typeface="Georgia" pitchFamily="34" charset="0"/>
+                <a:ea typeface="Georgia" pitchFamily="34" charset="-122"/>
+                <a:cs typeface="Georgia" pitchFamily="34" charset="-120"/>
+              </a:rPr>
+              <a:t>Mode, Range</a:t>
+            </a:r>
+            <a:endParaRPr lang="en-US" sz="3800" dirty="0"/>
+          </a:p>
+        </p:txBody>
+      </p:sp>
+      <p:sp>
+        <p:nvSpPr>
+          <p:cNvPr id="7" name="Text 5"/>
+          <p:cNvSpPr/>
+          <p:nvPr/>
+        </p:nvSpPr>
+        <p:spPr>
+          <a:xfrm>
+            <a:off x="731520" y="3200400"/>
+            <a:ext cx="6400800" cy="548640"/>
+          </a:xfrm>
+          <a:prstGeom prst="rect">
+            <a:avLst/>
+          </a:prstGeom>
+          <a:noFill/>
+          <a:ln/>
+        </p:spPr>
+        <p:txBody>
+          <a:bodyPr wrap="square" rtlCol="0" anchor="ctr"/>
+          <a:lstStyle/>
+          <a:p>
+            <a:pPr indent="0" marL="0">
+              <a:buNone/>
+            </a:pPr>
+            <a:r>
+              <a:rPr lang="en-US" sz="1600" i="1" dirty="0">
+                <a:solidFill>
+                  <a:srgbClr val="9B9690"/>
                 </a:solidFill>
                 <a:latin typeface="Calibri" pitchFamily="34" charset="0"/>
                 <a:ea typeface="Calibri" pitchFamily="34" charset="-122"/>
                 <a:cs typeface="Calibri" pitchFamily="34" charset="-120"/>
               </a:rPr>
-              <a:t>Grade 6 Mathematics · Mr Zocchi</a:t>
+              <a:t>Ways to summarise a set of data</a:t>
             </a:r>
             <a:endParaRPr lang="en-US" sz="1600" dirty="0"/>
           </a:p>
@@ -1420,36 +1600,14 @@
       </p:sp>
       <p:sp>
         <p:nvSpPr>
-          <p:cNvPr id="5" name="Shape 3"/>
-          <p:cNvSpPr/>
-          <p:nvPr/>
-        </p:nvSpPr>
-        <p:spPr>
-          <a:xfrm>
-            <a:off x="731520" y="3474720"/>
-            <a:ext cx="2011680" cy="411480"/>
-          </a:xfrm>
-          <a:prstGeom prst="roundRect">
-            <a:avLst>
-              <a:gd name="adj" fmla="val 17778"/>
-            </a:avLst>
-          </a:prstGeom>
-          <a:solidFill>
-            <a:srgbClr val="2A9D8F"/>
-          </a:solidFill>
-          <a:ln/>
-        </p:spPr>
-      </p:sp>
-      <p:sp>
-        <p:nvSpPr>
-          <p:cNvPr id="6" name="Text 4"/>
-          <p:cNvSpPr/>
-          <p:nvPr/>
-        </p:nvSpPr>
-        <p:spPr>
-          <a:xfrm>
-            <a:off x="731520" y="3474720"/>
-            <a:ext cx="2011680" cy="411480"/>
+          <p:cNvPr id="8" name="Text 6"/>
+          <p:cNvSpPr/>
+          <p:nvPr/>
+        </p:nvSpPr>
+        <p:spPr>
+          <a:xfrm>
+            <a:off x="731520" y="4297680"/>
+            <a:ext cx="2743200" cy="365760"/>
           </a:xfrm>
           <a:prstGeom prst="rect">
             <a:avLst/>
@@ -1461,21 +1619,21 @@
           <a:bodyPr wrap="square" rtlCol="0" anchor="ctr"/>
           <a:lstStyle/>
           <a:p>
-            <a:pPr algn="ctr" indent="0" marL="0">
+            <a:pPr indent="0" marL="0">
               <a:buNone/>
             </a:pPr>
             <a:r>
-              <a:rPr lang="en-US" sz="1200" b="1" dirty="0">
-                <a:solidFill>
-                  <a:srgbClr val="FFFFFF"/>
+              <a:rPr lang="en-US" sz="1100" dirty="0">
+                <a:solidFill>
+                  <a:srgbClr val="9B9690"/>
                 </a:solidFill>
                 <a:latin typeface="Calibri" pitchFamily="34" charset="0"/>
                 <a:ea typeface="Calibri" pitchFamily="34" charset="-122"/>
                 <a:cs typeface="Calibri" pitchFamily="34" charset="-120"/>
               </a:rPr>
-              <a:t>Term 5 · Probability &amp; Statistics</a:t>
-            </a:r>
-            <a:endParaRPr lang="en-US" sz="1200" dirty="0"/>
+              <a:t>mrzocchi.com</a:t>
+            </a:r>
+            <a:endParaRPr lang="en-US" sz="1100" dirty="0"/>
           </a:p>
         </p:txBody>
       </p:sp>
@@ -1520,7 +1678,47 @@
         <p:spPr>
           <a:xfrm>
             <a:off x="0" y="0"/>
-            <a:ext cx="9144000" cy="54864"/>
+            <a:ext cx="9144000" cy="822960"/>
+          </a:xfrm>
+          <a:prstGeom prst="rect">
+            <a:avLst/>
+          </a:prstGeom>
+          <a:solidFill>
+            <a:srgbClr val="FFFFFF"/>
+          </a:solidFill>
+          <a:ln/>
+        </p:spPr>
+      </p:sp>
+      <p:sp>
+        <p:nvSpPr>
+          <p:cNvPr id="3" name="Shape 1"/>
+          <p:cNvSpPr/>
+          <p:nvPr/>
+        </p:nvSpPr>
+        <p:spPr>
+          <a:xfrm>
+            <a:off x="0" y="804672"/>
+            <a:ext cx="9144000" cy="27432"/>
+          </a:xfrm>
+          <a:prstGeom prst="rect">
+            <a:avLst/>
+          </a:prstGeom>
+          <a:solidFill>
+            <a:srgbClr val="E5E2DC"/>
+          </a:solidFill>
+          <a:ln/>
+        </p:spPr>
+      </p:sp>
+      <p:sp>
+        <p:nvSpPr>
+          <p:cNvPr id="4" name="Shape 2"/>
+          <p:cNvSpPr/>
+          <p:nvPr/>
+        </p:nvSpPr>
+        <p:spPr>
+          <a:xfrm>
+            <a:off x="548640" y="201168"/>
+            <a:ext cx="54864" cy="420624"/>
           </a:xfrm>
           <a:prstGeom prst="rect">
             <a:avLst/>
@@ -1533,14 +1731,14 @@
       </p:sp>
       <p:sp>
         <p:nvSpPr>
-          <p:cNvPr id="3" name="Text 1"/>
-          <p:cNvSpPr/>
-          <p:nvPr/>
-        </p:nvSpPr>
-        <p:spPr>
-          <a:xfrm>
-            <a:off x="7772400" y="4709160"/>
-            <a:ext cx="1097280" cy="320040"/>
+          <p:cNvPr id="5" name="Text 3"/>
+          <p:cNvSpPr/>
+          <p:nvPr/>
+        </p:nvSpPr>
+        <p:spPr>
+          <a:xfrm>
+            <a:off x="777240" y="137160"/>
+            <a:ext cx="7772400" cy="548640"/>
           </a:xfrm>
           <a:prstGeom prst="rect">
             <a:avLst/>
@@ -1549,37 +1747,37 @@
           <a:ln/>
         </p:spPr>
         <p:txBody>
-          <a:bodyPr wrap="square" rtlCol="0" anchor="ctr"/>
-          <a:lstStyle/>
-          <a:p>
-            <a:pPr algn="r" indent="0" marL="0">
+          <a:bodyPr wrap="square" lIns="0" tIns="0" rIns="0" bIns="0" rtlCol="0" anchor="ctr"/>
+          <a:lstStyle/>
+          <a:p>
+            <a:pPr indent="0" marL="0">
               <a:buNone/>
             </a:pPr>
             <a:r>
-              <a:rPr lang="en-US" sz="900" dirty="0">
-                <a:solidFill>
-                  <a:srgbClr val="6B6660"/>
-                </a:solidFill>
-                <a:latin typeface="Calibri" pitchFamily="34" charset="0"/>
-                <a:ea typeface="Calibri" pitchFamily="34" charset="-122"/>
-                <a:cs typeface="Calibri" pitchFamily="34" charset="-120"/>
-              </a:rPr>
-              <a:t>2 / 6</a:t>
-            </a:r>
-            <a:endParaRPr lang="en-US" sz="900" dirty="0"/>
-          </a:p>
-        </p:txBody>
-      </p:sp>
-      <p:sp>
-        <p:nvSpPr>
-          <p:cNvPr id="4" name="Shape 2"/>
-          <p:cNvSpPr/>
-          <p:nvPr/>
-        </p:nvSpPr>
-        <p:spPr>
-          <a:xfrm>
-            <a:off x="1371600" y="914400"/>
-            <a:ext cx="6400800" cy="3200400"/>
+              <a:rPr lang="en-US" sz="2000" b="1" dirty="0">
+                <a:solidFill>
+                  <a:srgbClr val="1B2A4A"/>
+                </a:solidFill>
+                <a:latin typeface="Georgia" pitchFamily="34" charset="0"/>
+                <a:ea typeface="Georgia" pitchFamily="34" charset="-122"/>
+                <a:cs typeface="Georgia" pitchFamily="34" charset="-120"/>
+              </a:rPr>
+              <a:t>Key Vocabulary</a:t>
+            </a:r>
+            <a:endParaRPr lang="en-US" sz="2000" dirty="0"/>
+          </a:p>
+        </p:txBody>
+      </p:sp>
+      <p:sp>
+        <p:nvSpPr>
+          <p:cNvPr id="6" name="Shape 4"/>
+          <p:cNvSpPr/>
+          <p:nvPr/>
+        </p:nvSpPr>
+        <p:spPr>
+          <a:xfrm>
+            <a:off x="731520" y="1051560"/>
+            <a:ext cx="3657600" cy="658368"/>
           </a:xfrm>
           <a:prstGeom prst="rect">
             <a:avLst/>
@@ -1587,12 +1785,7 @@
           <a:solidFill>
             <a:srgbClr val="FFFFFF"/>
           </a:solidFill>
-          <a:ln w="12700">
-            <a:solidFill>
-              <a:srgbClr val="E5E2DC"/>
-            </a:solidFill>
-            <a:prstDash val="solid"/>
-          </a:ln>
+          <a:ln/>
           <a:effectLst>
             <a:outerShdw sx="100000" sy="100000" kx="0" ky="0" algn="bl" rotWithShape="0" blurRad="50800" dist="25400" dir="8100000">
               <a:srgbClr val="000000">
@@ -1604,14 +1797,14 @@
       </p:sp>
       <p:sp>
         <p:nvSpPr>
-          <p:cNvPr id="5" name="Shape 3"/>
-          <p:cNvSpPr/>
-          <p:nvPr/>
-        </p:nvSpPr>
-        <p:spPr>
-          <a:xfrm>
-            <a:off x="1371600" y="914400"/>
-            <a:ext cx="91440" cy="3200400"/>
+          <p:cNvPr id="7" name="Shape 5"/>
+          <p:cNvSpPr/>
+          <p:nvPr/>
+        </p:nvSpPr>
+        <p:spPr>
+          <a:xfrm>
+            <a:off x="731520" y="1051560"/>
+            <a:ext cx="54864" cy="658368"/>
           </a:xfrm>
           <a:prstGeom prst="rect">
             <a:avLst/>
@@ -1624,14 +1817,14 @@
       </p:sp>
       <p:sp>
         <p:nvSpPr>
-          <p:cNvPr id="6" name="Text 4"/>
-          <p:cNvSpPr/>
-          <p:nvPr/>
-        </p:nvSpPr>
-        <p:spPr>
-          <a:xfrm>
-            <a:off x="1828800" y="1097280"/>
-            <a:ext cx="5669280" cy="640080"/>
+          <p:cNvPr id="8" name="Text 6"/>
+          <p:cNvSpPr/>
+          <p:nvPr/>
+        </p:nvSpPr>
+        <p:spPr>
+          <a:xfrm>
+            <a:off x="914400" y="1051560"/>
+            <a:ext cx="1463040" cy="658368"/>
           </a:xfrm>
           <a:prstGeom prst="rect">
             <a:avLst/>
@@ -1640,14 +1833,14 @@
           <a:ln/>
         </p:spPr>
         <p:txBody>
-          <a:bodyPr wrap="square" rtlCol="0" anchor="ctr"/>
+          <a:bodyPr wrap="square" lIns="0" tIns="0" rIns="0" bIns="0" rtlCol="0" anchor="ctr"/>
           <a:lstStyle/>
           <a:p>
             <a:pPr indent="0" marL="0">
               <a:buNone/>
             </a:pPr>
             <a:r>
-              <a:rPr lang="en-US" sz="2400" b="1" dirty="0">
+              <a:rPr lang="en-US" sz="1300" b="1" dirty="0">
                 <a:solidFill>
                   <a:srgbClr val="1B2A4A"/>
                 </a:solidFill>
@@ -1655,22 +1848,22 @@
                 <a:ea typeface="Georgia" pitchFamily="34" charset="-122"/>
                 <a:cs typeface="Georgia" pitchFamily="34" charset="-120"/>
               </a:rPr>
-              <a:t>Averages and Spread</a:t>
-            </a:r>
-            <a:endParaRPr lang="en-US" sz="2400" dirty="0"/>
-          </a:p>
-        </p:txBody>
-      </p:sp>
-      <p:sp>
-        <p:nvSpPr>
-          <p:cNvPr id="7" name="Text 5"/>
-          <p:cNvSpPr/>
-          <p:nvPr/>
-        </p:nvSpPr>
-        <p:spPr>
-          <a:xfrm>
-            <a:off x="1828800" y="1828800"/>
-            <a:ext cx="5669280" cy="2011680"/>
+              <a:t>Mean</a:t>
+            </a:r>
+            <a:endParaRPr lang="en-US" sz="1300" dirty="0"/>
+          </a:p>
+        </p:txBody>
+      </p:sp>
+      <p:sp>
+        <p:nvSpPr>
+          <p:cNvPr id="9" name="Text 7"/>
+          <p:cNvSpPr/>
+          <p:nvPr/>
+        </p:nvSpPr>
+        <p:spPr>
+          <a:xfrm>
+            <a:off x="2377440" y="1051560"/>
+            <a:ext cx="1920240" cy="658368"/>
           </a:xfrm>
           <a:prstGeom prst="rect">
             <a:avLst/>
@@ -1679,27 +1872,649 @@
           <a:ln/>
         </p:spPr>
         <p:txBody>
-          <a:bodyPr wrap="square" rtlCol="0" anchor="t"/>
+          <a:bodyPr wrap="square" lIns="0" tIns="0" rIns="0" bIns="0" rtlCol="0" anchor="ctr"/>
           <a:lstStyle/>
           <a:p>
             <a:pPr indent="0" marL="0">
-              <a:lnSpc>
-                <a:spcPct val="130000"/>
-              </a:lnSpc>
               <a:buNone/>
             </a:pPr>
             <a:r>
-              <a:rPr lang="en-US" sz="1500" dirty="0">
-                <a:solidFill>
-                  <a:srgbClr val="3D3A36"/>
+              <a:rPr lang="en-US" sz="1100" dirty="0">
+                <a:solidFill>
+                  <a:srgbClr val="6B6660"/>
                 </a:solidFill>
                 <a:latin typeface="Calibri" pitchFamily="34" charset="0"/>
                 <a:ea typeface="Calibri" pitchFamily="34" charset="-122"/>
                 <a:cs typeface="Calibri" pitchFamily="34" charset="-120"/>
               </a:rPr>
-              <a:t>An average represents a 'typical' value in a data set. There are three types: mean, median, and mode. The range measures how spread out the data is. Each average is useful in different situations — choosing the right one matters.</a:t>
-            </a:r>
-            <a:endParaRPr lang="en-US" sz="1500" dirty="0"/>
+              <a:t>Add all values, divide by how many</a:t>
+            </a:r>
+            <a:endParaRPr lang="en-US" sz="1100" dirty="0"/>
+          </a:p>
+        </p:txBody>
+      </p:sp>
+      <p:sp>
+        <p:nvSpPr>
+          <p:cNvPr id="10" name="Shape 8"/>
+          <p:cNvSpPr/>
+          <p:nvPr/>
+        </p:nvSpPr>
+        <p:spPr>
+          <a:xfrm>
+            <a:off x="4754880" y="1051560"/>
+            <a:ext cx="3657600" cy="658368"/>
+          </a:xfrm>
+          <a:prstGeom prst="rect">
+            <a:avLst/>
+          </a:prstGeom>
+          <a:solidFill>
+            <a:srgbClr val="FFFFFF"/>
+          </a:solidFill>
+          <a:ln/>
+          <a:effectLst>
+            <a:outerShdw sx="100000" sy="100000" kx="0" ky="0" algn="bl" rotWithShape="0" blurRad="50800" dist="25400" dir="8100000">
+              <a:srgbClr val="000000">
+                <a:alpha val="10000"/>
+              </a:srgbClr>
+            </a:outerShdw>
+          </a:effectLst>
+        </p:spPr>
+      </p:sp>
+      <p:sp>
+        <p:nvSpPr>
+          <p:cNvPr id="11" name="Shape 9"/>
+          <p:cNvSpPr/>
+          <p:nvPr/>
+        </p:nvSpPr>
+        <p:spPr>
+          <a:xfrm>
+            <a:off x="4754880" y="1051560"/>
+            <a:ext cx="54864" cy="658368"/>
+          </a:xfrm>
+          <a:prstGeom prst="rect">
+            <a:avLst/>
+          </a:prstGeom>
+          <a:solidFill>
+            <a:srgbClr val="2A9D8F"/>
+          </a:solidFill>
+          <a:ln/>
+        </p:spPr>
+      </p:sp>
+      <p:sp>
+        <p:nvSpPr>
+          <p:cNvPr id="12" name="Text 10"/>
+          <p:cNvSpPr/>
+          <p:nvPr/>
+        </p:nvSpPr>
+        <p:spPr>
+          <a:xfrm>
+            <a:off x="4937760" y="1051560"/>
+            <a:ext cx="1463040" cy="658368"/>
+          </a:xfrm>
+          <a:prstGeom prst="rect">
+            <a:avLst/>
+          </a:prstGeom>
+          <a:noFill/>
+          <a:ln/>
+        </p:spPr>
+        <p:txBody>
+          <a:bodyPr wrap="square" lIns="0" tIns="0" rIns="0" bIns="0" rtlCol="0" anchor="ctr"/>
+          <a:lstStyle/>
+          <a:p>
+            <a:pPr indent="0" marL="0">
+              <a:buNone/>
+            </a:pPr>
+            <a:r>
+              <a:rPr lang="en-US" sz="1300" b="1" dirty="0">
+                <a:solidFill>
+                  <a:srgbClr val="1B2A4A"/>
+                </a:solidFill>
+                <a:latin typeface="Georgia" pitchFamily="34" charset="0"/>
+                <a:ea typeface="Georgia" pitchFamily="34" charset="-122"/>
+                <a:cs typeface="Georgia" pitchFamily="34" charset="-120"/>
+              </a:rPr>
+              <a:t>Median</a:t>
+            </a:r>
+            <a:endParaRPr lang="en-US" sz="1300" dirty="0"/>
+          </a:p>
+        </p:txBody>
+      </p:sp>
+      <p:sp>
+        <p:nvSpPr>
+          <p:cNvPr id="13" name="Text 11"/>
+          <p:cNvSpPr/>
+          <p:nvPr/>
+        </p:nvSpPr>
+        <p:spPr>
+          <a:xfrm>
+            <a:off x="6400800" y="1051560"/>
+            <a:ext cx="1920240" cy="658368"/>
+          </a:xfrm>
+          <a:prstGeom prst="rect">
+            <a:avLst/>
+          </a:prstGeom>
+          <a:noFill/>
+          <a:ln/>
+        </p:spPr>
+        <p:txBody>
+          <a:bodyPr wrap="square" lIns="0" tIns="0" rIns="0" bIns="0" rtlCol="0" anchor="ctr"/>
+          <a:lstStyle/>
+          <a:p>
+            <a:pPr indent="0" marL="0">
+              <a:buNone/>
+            </a:pPr>
+            <a:r>
+              <a:rPr lang="en-US" sz="1100" dirty="0">
+                <a:solidFill>
+                  <a:srgbClr val="6B6660"/>
+                </a:solidFill>
+                <a:latin typeface="Calibri" pitchFamily="34" charset="0"/>
+                <a:ea typeface="Calibri" pitchFamily="34" charset="-122"/>
+                <a:cs typeface="Calibri" pitchFamily="34" charset="-120"/>
+              </a:rPr>
+              <a:t>Middle value when ordered</a:t>
+            </a:r>
+            <a:endParaRPr lang="en-US" sz="1100" dirty="0"/>
+          </a:p>
+        </p:txBody>
+      </p:sp>
+      <p:sp>
+        <p:nvSpPr>
+          <p:cNvPr id="14" name="Shape 12"/>
+          <p:cNvSpPr/>
+          <p:nvPr/>
+        </p:nvSpPr>
+        <p:spPr>
+          <a:xfrm>
+            <a:off x="731520" y="1819656"/>
+            <a:ext cx="3657600" cy="658368"/>
+          </a:xfrm>
+          <a:prstGeom prst="rect">
+            <a:avLst/>
+          </a:prstGeom>
+          <a:solidFill>
+            <a:srgbClr val="FFFFFF"/>
+          </a:solidFill>
+          <a:ln/>
+          <a:effectLst>
+            <a:outerShdw sx="100000" sy="100000" kx="0" ky="0" algn="bl" rotWithShape="0" blurRad="50800" dist="25400" dir="8100000">
+              <a:srgbClr val="000000">
+                <a:alpha val="10000"/>
+              </a:srgbClr>
+            </a:outerShdw>
+          </a:effectLst>
+        </p:spPr>
+      </p:sp>
+      <p:sp>
+        <p:nvSpPr>
+          <p:cNvPr id="15" name="Shape 13"/>
+          <p:cNvSpPr/>
+          <p:nvPr/>
+        </p:nvSpPr>
+        <p:spPr>
+          <a:xfrm>
+            <a:off x="731520" y="1819656"/>
+            <a:ext cx="54864" cy="658368"/>
+          </a:xfrm>
+          <a:prstGeom prst="rect">
+            <a:avLst/>
+          </a:prstGeom>
+          <a:solidFill>
+            <a:srgbClr val="2A9D8F"/>
+          </a:solidFill>
+          <a:ln/>
+        </p:spPr>
+      </p:sp>
+      <p:sp>
+        <p:nvSpPr>
+          <p:cNvPr id="16" name="Text 14"/>
+          <p:cNvSpPr/>
+          <p:nvPr/>
+        </p:nvSpPr>
+        <p:spPr>
+          <a:xfrm>
+            <a:off x="914400" y="1819656"/>
+            <a:ext cx="1463040" cy="658368"/>
+          </a:xfrm>
+          <a:prstGeom prst="rect">
+            <a:avLst/>
+          </a:prstGeom>
+          <a:noFill/>
+          <a:ln/>
+        </p:spPr>
+        <p:txBody>
+          <a:bodyPr wrap="square" lIns="0" tIns="0" rIns="0" bIns="0" rtlCol="0" anchor="ctr"/>
+          <a:lstStyle/>
+          <a:p>
+            <a:pPr indent="0" marL="0">
+              <a:buNone/>
+            </a:pPr>
+            <a:r>
+              <a:rPr lang="en-US" sz="1300" b="1" dirty="0">
+                <a:solidFill>
+                  <a:srgbClr val="1B2A4A"/>
+                </a:solidFill>
+                <a:latin typeface="Georgia" pitchFamily="34" charset="0"/>
+                <a:ea typeface="Georgia" pitchFamily="34" charset="-122"/>
+                <a:cs typeface="Georgia" pitchFamily="34" charset="-120"/>
+              </a:rPr>
+              <a:t>Mode</a:t>
+            </a:r>
+            <a:endParaRPr lang="en-US" sz="1300" dirty="0"/>
+          </a:p>
+        </p:txBody>
+      </p:sp>
+      <p:sp>
+        <p:nvSpPr>
+          <p:cNvPr id="17" name="Text 15"/>
+          <p:cNvSpPr/>
+          <p:nvPr/>
+        </p:nvSpPr>
+        <p:spPr>
+          <a:xfrm>
+            <a:off x="2377440" y="1819656"/>
+            <a:ext cx="1920240" cy="658368"/>
+          </a:xfrm>
+          <a:prstGeom prst="rect">
+            <a:avLst/>
+          </a:prstGeom>
+          <a:noFill/>
+          <a:ln/>
+        </p:spPr>
+        <p:txBody>
+          <a:bodyPr wrap="square" lIns="0" tIns="0" rIns="0" bIns="0" rtlCol="0" anchor="ctr"/>
+          <a:lstStyle/>
+          <a:p>
+            <a:pPr indent="0" marL="0">
+              <a:buNone/>
+            </a:pPr>
+            <a:r>
+              <a:rPr lang="en-US" sz="1100" dirty="0">
+                <a:solidFill>
+                  <a:srgbClr val="6B6660"/>
+                </a:solidFill>
+                <a:latin typeface="Calibri" pitchFamily="34" charset="0"/>
+                <a:ea typeface="Calibri" pitchFamily="34" charset="-122"/>
+                <a:cs typeface="Calibri" pitchFamily="34" charset="-120"/>
+              </a:rPr>
+              <a:t>Most common value</a:t>
+            </a:r>
+            <a:endParaRPr lang="en-US" sz="1100" dirty="0"/>
+          </a:p>
+        </p:txBody>
+      </p:sp>
+      <p:sp>
+        <p:nvSpPr>
+          <p:cNvPr id="18" name="Shape 16"/>
+          <p:cNvSpPr/>
+          <p:nvPr/>
+        </p:nvSpPr>
+        <p:spPr>
+          <a:xfrm>
+            <a:off x="4754880" y="1819656"/>
+            <a:ext cx="3657600" cy="658368"/>
+          </a:xfrm>
+          <a:prstGeom prst="rect">
+            <a:avLst/>
+          </a:prstGeom>
+          <a:solidFill>
+            <a:srgbClr val="FFFFFF"/>
+          </a:solidFill>
+          <a:ln/>
+          <a:effectLst>
+            <a:outerShdw sx="100000" sy="100000" kx="0" ky="0" algn="bl" rotWithShape="0" blurRad="50800" dist="25400" dir="8100000">
+              <a:srgbClr val="000000">
+                <a:alpha val="10000"/>
+              </a:srgbClr>
+            </a:outerShdw>
+          </a:effectLst>
+        </p:spPr>
+      </p:sp>
+      <p:sp>
+        <p:nvSpPr>
+          <p:cNvPr id="19" name="Shape 17"/>
+          <p:cNvSpPr/>
+          <p:nvPr/>
+        </p:nvSpPr>
+        <p:spPr>
+          <a:xfrm>
+            <a:off x="4754880" y="1819656"/>
+            <a:ext cx="54864" cy="658368"/>
+          </a:xfrm>
+          <a:prstGeom prst="rect">
+            <a:avLst/>
+          </a:prstGeom>
+          <a:solidFill>
+            <a:srgbClr val="2A9D8F"/>
+          </a:solidFill>
+          <a:ln/>
+        </p:spPr>
+      </p:sp>
+      <p:sp>
+        <p:nvSpPr>
+          <p:cNvPr id="20" name="Text 18"/>
+          <p:cNvSpPr/>
+          <p:nvPr/>
+        </p:nvSpPr>
+        <p:spPr>
+          <a:xfrm>
+            <a:off x="4937760" y="1819656"/>
+            <a:ext cx="1463040" cy="658368"/>
+          </a:xfrm>
+          <a:prstGeom prst="rect">
+            <a:avLst/>
+          </a:prstGeom>
+          <a:noFill/>
+          <a:ln/>
+        </p:spPr>
+        <p:txBody>
+          <a:bodyPr wrap="square" lIns="0" tIns="0" rIns="0" bIns="0" rtlCol="0" anchor="ctr"/>
+          <a:lstStyle/>
+          <a:p>
+            <a:pPr indent="0" marL="0">
+              <a:buNone/>
+            </a:pPr>
+            <a:r>
+              <a:rPr lang="en-US" sz="1300" b="1" dirty="0">
+                <a:solidFill>
+                  <a:srgbClr val="1B2A4A"/>
+                </a:solidFill>
+                <a:latin typeface="Georgia" pitchFamily="34" charset="0"/>
+                <a:ea typeface="Georgia" pitchFamily="34" charset="-122"/>
+                <a:cs typeface="Georgia" pitchFamily="34" charset="-120"/>
+              </a:rPr>
+              <a:t>Range</a:t>
+            </a:r>
+            <a:endParaRPr lang="en-US" sz="1300" dirty="0"/>
+          </a:p>
+        </p:txBody>
+      </p:sp>
+      <p:sp>
+        <p:nvSpPr>
+          <p:cNvPr id="21" name="Text 19"/>
+          <p:cNvSpPr/>
+          <p:nvPr/>
+        </p:nvSpPr>
+        <p:spPr>
+          <a:xfrm>
+            <a:off x="6400800" y="1819656"/>
+            <a:ext cx="1920240" cy="658368"/>
+          </a:xfrm>
+          <a:prstGeom prst="rect">
+            <a:avLst/>
+          </a:prstGeom>
+          <a:noFill/>
+          <a:ln/>
+        </p:spPr>
+        <p:txBody>
+          <a:bodyPr wrap="square" lIns="0" tIns="0" rIns="0" bIns="0" rtlCol="0" anchor="ctr"/>
+          <a:lstStyle/>
+          <a:p>
+            <a:pPr indent="0" marL="0">
+              <a:buNone/>
+            </a:pPr>
+            <a:r>
+              <a:rPr lang="en-US" sz="1100" dirty="0">
+                <a:solidFill>
+                  <a:srgbClr val="6B6660"/>
+                </a:solidFill>
+                <a:latin typeface="Calibri" pitchFamily="34" charset="0"/>
+                <a:ea typeface="Calibri" pitchFamily="34" charset="-122"/>
+                <a:cs typeface="Calibri" pitchFamily="34" charset="-120"/>
+              </a:rPr>
+              <a:t>Biggest value minus smallest</a:t>
+            </a:r>
+            <a:endParaRPr lang="en-US" sz="1100" dirty="0"/>
+          </a:p>
+        </p:txBody>
+      </p:sp>
+      <p:sp>
+        <p:nvSpPr>
+          <p:cNvPr id="22" name="Shape 20"/>
+          <p:cNvSpPr/>
+          <p:nvPr/>
+        </p:nvSpPr>
+        <p:spPr>
+          <a:xfrm>
+            <a:off x="731520" y="2587752"/>
+            <a:ext cx="3657600" cy="658368"/>
+          </a:xfrm>
+          <a:prstGeom prst="rect">
+            <a:avLst/>
+          </a:prstGeom>
+          <a:solidFill>
+            <a:srgbClr val="FFFFFF"/>
+          </a:solidFill>
+          <a:ln/>
+          <a:effectLst>
+            <a:outerShdw sx="100000" sy="100000" kx="0" ky="0" algn="bl" rotWithShape="0" blurRad="50800" dist="25400" dir="8100000">
+              <a:srgbClr val="000000">
+                <a:alpha val="10000"/>
+              </a:srgbClr>
+            </a:outerShdw>
+          </a:effectLst>
+        </p:spPr>
+      </p:sp>
+      <p:sp>
+        <p:nvSpPr>
+          <p:cNvPr id="23" name="Shape 21"/>
+          <p:cNvSpPr/>
+          <p:nvPr/>
+        </p:nvSpPr>
+        <p:spPr>
+          <a:xfrm>
+            <a:off x="731520" y="2587752"/>
+            <a:ext cx="54864" cy="658368"/>
+          </a:xfrm>
+          <a:prstGeom prst="rect">
+            <a:avLst/>
+          </a:prstGeom>
+          <a:solidFill>
+            <a:srgbClr val="2A9D8F"/>
+          </a:solidFill>
+          <a:ln/>
+        </p:spPr>
+      </p:sp>
+      <p:sp>
+        <p:nvSpPr>
+          <p:cNvPr id="24" name="Text 22"/>
+          <p:cNvSpPr/>
+          <p:nvPr/>
+        </p:nvSpPr>
+        <p:spPr>
+          <a:xfrm>
+            <a:off x="914400" y="2587752"/>
+            <a:ext cx="1463040" cy="658368"/>
+          </a:xfrm>
+          <a:prstGeom prst="rect">
+            <a:avLst/>
+          </a:prstGeom>
+          <a:noFill/>
+          <a:ln/>
+        </p:spPr>
+        <p:txBody>
+          <a:bodyPr wrap="square" lIns="0" tIns="0" rIns="0" bIns="0" rtlCol="0" anchor="ctr"/>
+          <a:lstStyle/>
+          <a:p>
+            <a:pPr indent="0" marL="0">
+              <a:buNone/>
+            </a:pPr>
+            <a:r>
+              <a:rPr lang="en-US" sz="1300" b="1" dirty="0">
+                <a:solidFill>
+                  <a:srgbClr val="1B2A4A"/>
+                </a:solidFill>
+                <a:latin typeface="Georgia" pitchFamily="34" charset="0"/>
+                <a:ea typeface="Georgia" pitchFamily="34" charset="-122"/>
+                <a:cs typeface="Georgia" pitchFamily="34" charset="-120"/>
+              </a:rPr>
+              <a:t>Average</a:t>
+            </a:r>
+            <a:endParaRPr lang="en-US" sz="1300" dirty="0"/>
+          </a:p>
+        </p:txBody>
+      </p:sp>
+      <p:sp>
+        <p:nvSpPr>
+          <p:cNvPr id="25" name="Text 23"/>
+          <p:cNvSpPr/>
+          <p:nvPr/>
+        </p:nvSpPr>
+        <p:spPr>
+          <a:xfrm>
+            <a:off x="2377440" y="2587752"/>
+            <a:ext cx="1920240" cy="658368"/>
+          </a:xfrm>
+          <a:prstGeom prst="rect">
+            <a:avLst/>
+          </a:prstGeom>
+          <a:noFill/>
+          <a:ln/>
+        </p:spPr>
+        <p:txBody>
+          <a:bodyPr wrap="square" lIns="0" tIns="0" rIns="0" bIns="0" rtlCol="0" anchor="ctr"/>
+          <a:lstStyle/>
+          <a:p>
+            <a:pPr indent="0" marL="0">
+              <a:buNone/>
+            </a:pPr>
+            <a:r>
+              <a:rPr lang="en-US" sz="1100" dirty="0">
+                <a:solidFill>
+                  <a:srgbClr val="6B6660"/>
+                </a:solidFill>
+                <a:latin typeface="Calibri" pitchFamily="34" charset="0"/>
+                <a:ea typeface="Calibri" pitchFamily="34" charset="-122"/>
+                <a:cs typeface="Calibri" pitchFamily="34" charset="-120"/>
+              </a:rPr>
+              <a:t>A single value representing the data set</a:t>
+            </a:r>
+            <a:endParaRPr lang="en-US" sz="1100" dirty="0"/>
+          </a:p>
+        </p:txBody>
+      </p:sp>
+      <p:sp>
+        <p:nvSpPr>
+          <p:cNvPr id="26" name="Shape 24"/>
+          <p:cNvSpPr/>
+          <p:nvPr/>
+        </p:nvSpPr>
+        <p:spPr>
+          <a:xfrm>
+            <a:off x="4754880" y="2587752"/>
+            <a:ext cx="3657600" cy="658368"/>
+          </a:xfrm>
+          <a:prstGeom prst="rect">
+            <a:avLst/>
+          </a:prstGeom>
+          <a:solidFill>
+            <a:srgbClr val="FFFFFF"/>
+          </a:solidFill>
+          <a:ln/>
+          <a:effectLst>
+            <a:outerShdw sx="100000" sy="100000" kx="0" ky="0" algn="bl" rotWithShape="0" blurRad="50800" dist="25400" dir="8100000">
+              <a:srgbClr val="000000">
+                <a:alpha val="10000"/>
+              </a:srgbClr>
+            </a:outerShdw>
+          </a:effectLst>
+        </p:spPr>
+      </p:sp>
+      <p:sp>
+        <p:nvSpPr>
+          <p:cNvPr id="27" name="Shape 25"/>
+          <p:cNvSpPr/>
+          <p:nvPr/>
+        </p:nvSpPr>
+        <p:spPr>
+          <a:xfrm>
+            <a:off x="4754880" y="2587752"/>
+            <a:ext cx="54864" cy="658368"/>
+          </a:xfrm>
+          <a:prstGeom prst="rect">
+            <a:avLst/>
+          </a:prstGeom>
+          <a:solidFill>
+            <a:srgbClr val="2A9D8F"/>
+          </a:solidFill>
+          <a:ln/>
+        </p:spPr>
+      </p:sp>
+      <p:sp>
+        <p:nvSpPr>
+          <p:cNvPr id="28" name="Text 26"/>
+          <p:cNvSpPr/>
+          <p:nvPr/>
+        </p:nvSpPr>
+        <p:spPr>
+          <a:xfrm>
+            <a:off x="4937760" y="2587752"/>
+            <a:ext cx="1463040" cy="658368"/>
+          </a:xfrm>
+          <a:prstGeom prst="rect">
+            <a:avLst/>
+          </a:prstGeom>
+          <a:noFill/>
+          <a:ln/>
+        </p:spPr>
+        <p:txBody>
+          <a:bodyPr wrap="square" lIns="0" tIns="0" rIns="0" bIns="0" rtlCol="0" anchor="ctr"/>
+          <a:lstStyle/>
+          <a:p>
+            <a:pPr indent="0" marL="0">
+              <a:buNone/>
+            </a:pPr>
+            <a:r>
+              <a:rPr lang="en-US" sz="1300" b="1" dirty="0">
+                <a:solidFill>
+                  <a:srgbClr val="1B2A4A"/>
+                </a:solidFill>
+                <a:latin typeface="Georgia" pitchFamily="34" charset="0"/>
+                <a:ea typeface="Georgia" pitchFamily="34" charset="-122"/>
+                <a:cs typeface="Georgia" pitchFamily="34" charset="-120"/>
+              </a:rPr>
+              <a:t>Outlier</a:t>
+            </a:r>
+            <a:endParaRPr lang="en-US" sz="1300" dirty="0"/>
+          </a:p>
+        </p:txBody>
+      </p:sp>
+      <p:sp>
+        <p:nvSpPr>
+          <p:cNvPr id="29" name="Text 27"/>
+          <p:cNvSpPr/>
+          <p:nvPr/>
+        </p:nvSpPr>
+        <p:spPr>
+          <a:xfrm>
+            <a:off x="6400800" y="2587752"/>
+            <a:ext cx="1920240" cy="658368"/>
+          </a:xfrm>
+          <a:prstGeom prst="rect">
+            <a:avLst/>
+          </a:prstGeom>
+          <a:noFill/>
+          <a:ln/>
+        </p:spPr>
+        <p:txBody>
+          <a:bodyPr wrap="square" lIns="0" tIns="0" rIns="0" bIns="0" rtlCol="0" anchor="ctr"/>
+          <a:lstStyle/>
+          <a:p>
+            <a:pPr indent="0" marL="0">
+              <a:buNone/>
+            </a:pPr>
+            <a:r>
+              <a:rPr lang="en-US" sz="1100" dirty="0">
+                <a:solidFill>
+                  <a:srgbClr val="6B6660"/>
+                </a:solidFill>
+                <a:latin typeface="Calibri" pitchFamily="34" charset="0"/>
+                <a:ea typeface="Calibri" pitchFamily="34" charset="-122"/>
+                <a:cs typeface="Calibri" pitchFamily="34" charset="-120"/>
+              </a:rPr>
+              <a:t>A value much higher or lower than the rest</a:t>
+            </a:r>
+            <a:endParaRPr lang="en-US" sz="1100" dirty="0"/>
           </a:p>
         </p:txBody>
       </p:sp>
@@ -1744,7 +2559,47 @@
         <p:spPr>
           <a:xfrm>
             <a:off x="0" y="0"/>
-            <a:ext cx="9144000" cy="54864"/>
+            <a:ext cx="9144000" cy="822960"/>
+          </a:xfrm>
+          <a:prstGeom prst="rect">
+            <a:avLst/>
+          </a:prstGeom>
+          <a:solidFill>
+            <a:srgbClr val="FFFFFF"/>
+          </a:solidFill>
+          <a:ln/>
+        </p:spPr>
+      </p:sp>
+      <p:sp>
+        <p:nvSpPr>
+          <p:cNvPr id="3" name="Shape 1"/>
+          <p:cNvSpPr/>
+          <p:nvPr/>
+        </p:nvSpPr>
+        <p:spPr>
+          <a:xfrm>
+            <a:off x="0" y="804672"/>
+            <a:ext cx="9144000" cy="27432"/>
+          </a:xfrm>
+          <a:prstGeom prst="rect">
+            <a:avLst/>
+          </a:prstGeom>
+          <a:solidFill>
+            <a:srgbClr val="E5E2DC"/>
+          </a:solidFill>
+          <a:ln/>
+        </p:spPr>
+      </p:sp>
+      <p:sp>
+        <p:nvSpPr>
+          <p:cNvPr id="4" name="Shape 2"/>
+          <p:cNvSpPr/>
+          <p:nvPr/>
+        </p:nvSpPr>
+        <p:spPr>
+          <a:xfrm>
+            <a:off x="548640" y="201168"/>
+            <a:ext cx="54864" cy="420624"/>
           </a:xfrm>
           <a:prstGeom prst="rect">
             <a:avLst/>
@@ -1757,14 +2612,14 @@
       </p:sp>
       <p:sp>
         <p:nvSpPr>
-          <p:cNvPr id="3" name="Text 1"/>
-          <p:cNvSpPr/>
-          <p:nvPr/>
-        </p:nvSpPr>
-        <p:spPr>
-          <a:xfrm>
-            <a:off x="7772400" y="4709160"/>
-            <a:ext cx="1097280" cy="320040"/>
+          <p:cNvPr id="5" name="Text 3"/>
+          <p:cNvSpPr/>
+          <p:nvPr/>
+        </p:nvSpPr>
+        <p:spPr>
+          <a:xfrm>
+            <a:off x="777240" y="137160"/>
+            <a:ext cx="7772400" cy="548640"/>
           </a:xfrm>
           <a:prstGeom prst="rect">
             <a:avLst/>
@@ -1773,53 +2628,14 @@
           <a:ln/>
         </p:spPr>
         <p:txBody>
-          <a:bodyPr wrap="square" rtlCol="0" anchor="ctr"/>
-          <a:lstStyle/>
-          <a:p>
-            <a:pPr algn="r" indent="0" marL="0">
-              <a:buNone/>
-            </a:pPr>
-            <a:r>
-              <a:rPr lang="en-US" sz="900" dirty="0">
-                <a:solidFill>
-                  <a:srgbClr val="6B6660"/>
-                </a:solidFill>
-                <a:latin typeface="Calibri" pitchFamily="34" charset="0"/>
-                <a:ea typeface="Calibri" pitchFamily="34" charset="-122"/>
-                <a:cs typeface="Calibri" pitchFamily="34" charset="-120"/>
-              </a:rPr>
-              <a:t>3 / 6</a:t>
-            </a:r>
-            <a:endParaRPr lang="en-US" sz="900" dirty="0"/>
-          </a:p>
-        </p:txBody>
-      </p:sp>
-      <p:sp>
-        <p:nvSpPr>
-          <p:cNvPr id="4" name="Text 2"/>
-          <p:cNvSpPr/>
-          <p:nvPr/>
-        </p:nvSpPr>
-        <p:spPr>
-          <a:xfrm>
-            <a:off x="457200" y="274320"/>
-            <a:ext cx="8229600" cy="640080"/>
-          </a:xfrm>
-          <a:prstGeom prst="rect">
-            <a:avLst/>
-          </a:prstGeom>
-          <a:noFill/>
-          <a:ln/>
-        </p:spPr>
-        <p:txBody>
-          <a:bodyPr wrap="square" rtlCol="0" anchor="ctr"/>
+          <a:bodyPr wrap="square" lIns="0" tIns="0" rIns="0" bIns="0" rtlCol="0" anchor="ctr"/>
           <a:lstStyle/>
           <a:p>
             <a:pPr indent="0" marL="0">
               <a:buNone/>
             </a:pPr>
             <a:r>
-              <a:rPr lang="en-US" sz="2600" b="1" dirty="0">
+              <a:rPr lang="en-US" sz="2000" b="1" dirty="0">
                 <a:solidFill>
                   <a:srgbClr val="1B2A4A"/>
                 </a:solidFill>
@@ -1827,22 +2643,22 @@
                 <a:ea typeface="Georgia" pitchFamily="34" charset="-122"/>
                 <a:cs typeface="Georgia" pitchFamily="34" charset="-120"/>
               </a:rPr>
-              <a:t>The Three Averages</a:t>
-            </a:r>
-            <a:endParaRPr lang="en-US" sz="2600" dirty="0"/>
-          </a:p>
-        </p:txBody>
-      </p:sp>
-      <p:sp>
-        <p:nvSpPr>
-          <p:cNvPr id="5" name="Shape 3"/>
-          <p:cNvSpPr/>
-          <p:nvPr/>
-        </p:nvSpPr>
-        <p:spPr>
-          <a:xfrm>
-            <a:off x="457200" y="1188720"/>
-            <a:ext cx="2560320" cy="1828800"/>
+              <a:t>The Three Averages + Range</a:t>
+            </a:r>
+            <a:endParaRPr lang="en-US" sz="2000" dirty="0"/>
+          </a:p>
+        </p:txBody>
+      </p:sp>
+      <p:sp>
+        <p:nvSpPr>
+          <p:cNvPr id="6" name="Shape 4"/>
+          <p:cNvSpPr/>
+          <p:nvPr/>
+        </p:nvSpPr>
+        <p:spPr>
+          <a:xfrm>
+            <a:off x="640080" y="1051560"/>
+            <a:ext cx="2468880" cy="3657600"/>
           </a:xfrm>
           <a:prstGeom prst="rect">
             <a:avLst/>
@@ -1850,12 +2666,7 @@
           <a:solidFill>
             <a:srgbClr val="FFFFFF"/>
           </a:solidFill>
-          <a:ln w="12700">
-            <a:solidFill>
-              <a:srgbClr val="E5E2DC"/>
-            </a:solidFill>
-            <a:prstDash val="solid"/>
-          </a:ln>
+          <a:ln/>
           <a:effectLst>
             <a:outerShdw sx="100000" sy="100000" kx="0" ky="0" algn="bl" rotWithShape="0" blurRad="50800" dist="25400" dir="8100000">
               <a:srgbClr val="000000">
@@ -1867,14 +2678,14 @@
       </p:sp>
       <p:sp>
         <p:nvSpPr>
-          <p:cNvPr id="6" name="Shape 4"/>
-          <p:cNvSpPr/>
-          <p:nvPr/>
-        </p:nvSpPr>
-        <p:spPr>
-          <a:xfrm>
-            <a:off x="457200" y="1188720"/>
-            <a:ext cx="2560320" cy="54864"/>
+          <p:cNvPr id="7" name="Shape 5"/>
+          <p:cNvSpPr/>
+          <p:nvPr/>
+        </p:nvSpPr>
+        <p:spPr>
+          <a:xfrm>
+            <a:off x="640080" y="1051560"/>
+            <a:ext cx="2468880" cy="54864"/>
           </a:xfrm>
           <a:prstGeom prst="rect">
             <a:avLst/>
@@ -1887,14 +2698,14 @@
       </p:sp>
       <p:sp>
         <p:nvSpPr>
-          <p:cNvPr id="7" name="Text 5"/>
-          <p:cNvSpPr/>
-          <p:nvPr/>
-        </p:nvSpPr>
-        <p:spPr>
-          <a:xfrm>
-            <a:off x="594360" y="1325880"/>
-            <a:ext cx="2286000" cy="365760"/>
+          <p:cNvPr id="8" name="Text 6"/>
+          <p:cNvSpPr/>
+          <p:nvPr/>
+        </p:nvSpPr>
+        <p:spPr>
+          <a:xfrm>
+            <a:off x="777240" y="1234440"/>
+            <a:ext cx="2194560" cy="457200"/>
           </a:xfrm>
           <a:prstGeom prst="rect">
             <a:avLst/>
@@ -1906,73 +2717,161 @@
           <a:bodyPr wrap="square" rtlCol="0" anchor="ctr"/>
           <a:lstStyle/>
           <a:p>
-            <a:pPr indent="0" marL="0">
+            <a:pPr algn="ctr" indent="0" marL="0">
               <a:buNone/>
             </a:pPr>
             <a:r>
               <a:rPr lang="en-US" sz="1400" b="1" dirty="0">
                 <a:solidFill>
                   <a:srgbClr val="1B2A4A"/>
+                </a:solidFill>
+                <a:latin typeface="Georgia" pitchFamily="34" charset="0"/>
+                <a:ea typeface="Georgia" pitchFamily="34" charset="-122"/>
+                <a:cs typeface="Georgia" pitchFamily="34" charset="-120"/>
+              </a:rPr>
+              <a:t>Mean</a:t>
+            </a:r>
+            <a:endParaRPr lang="en-US" sz="1400" dirty="0"/>
+          </a:p>
+        </p:txBody>
+      </p:sp>
+      <p:sp>
+        <p:nvSpPr>
+          <p:cNvPr id="9" name="Text 7"/>
+          <p:cNvSpPr/>
+          <p:nvPr/>
+        </p:nvSpPr>
+        <p:spPr>
+          <a:xfrm>
+            <a:off x="777240" y="1737360"/>
+            <a:ext cx="2194560" cy="2834640"/>
+          </a:xfrm>
+          <a:prstGeom prst="rect">
+            <a:avLst/>
+          </a:prstGeom>
+          <a:noFill/>
+          <a:ln/>
+        </p:spPr>
+        <p:txBody>
+          <a:bodyPr wrap="square" rtlCol="0" anchor="t"/>
+          <a:lstStyle/>
+          <a:p>
+            <a:pPr marL="342900" indent="-342900">
+              <a:spcAft>
+                <a:spcPts val="400"/>
+              </a:spcAft>
+              <a:buSzPct val="100000"/>
+              <a:buChar char="•"/>
+            </a:pPr>
+            <a:r>
+              <a:rPr lang="en-US" sz="1100" dirty="0">
+                <a:solidFill>
+                  <a:srgbClr val="6B6660"/>
                 </a:solidFill>
                 <a:latin typeface="Calibri" pitchFamily="34" charset="0"/>
                 <a:ea typeface="Calibri" pitchFamily="34" charset="-122"/>
                 <a:cs typeface="Calibri" pitchFamily="34" charset="-120"/>
               </a:rPr>
-              <a:t>Mean</a:t>
-            </a:r>
-            <a:endParaRPr lang="en-US" sz="1400" dirty="0"/>
-          </a:p>
-        </p:txBody>
-      </p:sp>
-      <p:sp>
-        <p:nvSpPr>
-          <p:cNvPr id="8" name="Text 6"/>
-          <p:cNvSpPr/>
-          <p:nvPr/>
-        </p:nvSpPr>
-        <p:spPr>
-          <a:xfrm>
-            <a:off x="594360" y="1737360"/>
-            <a:ext cx="2286000" cy="1097280"/>
-          </a:xfrm>
-          <a:prstGeom prst="rect">
-            <a:avLst/>
-          </a:prstGeom>
-          <a:noFill/>
-          <a:ln/>
-        </p:spPr>
-        <p:txBody>
-          <a:bodyPr wrap="square" rtlCol="0" anchor="t"/>
-          <a:lstStyle/>
-          <a:p>
-            <a:pPr indent="0" marL="0">
-              <a:buNone/>
+              <a:t>Add ALL values</a:t>
+            </a:r>
+            <a:endParaRPr lang="en-US" sz="1100" dirty="0"/>
+          </a:p>
+          <a:p>
+            <a:pPr marL="342900" indent="-342900">
+              <a:spcAft>
+                <a:spcPts val="400"/>
+              </a:spcAft>
+              <a:buSzPct val="100000"/>
+              <a:buChar char="•"/>
             </a:pPr>
             <a:r>
               <a:rPr lang="en-US" sz="1100" dirty="0">
                 <a:solidFill>
-                  <a:srgbClr val="3D3A36"/>
+                  <a:srgbClr val="6B6660"/>
                 </a:solidFill>
                 <a:latin typeface="Calibri" pitchFamily="34" charset="0"/>
                 <a:ea typeface="Calibri" pitchFamily="34" charset="-122"/>
                 <a:cs typeface="Calibri" pitchFamily="34" charset="-120"/>
               </a:rPr>
-              <a:t>Add all values, divide by how many. Most common average. Affected by outliers. Example: 3,5,7,9,11 → mean = 35÷5 = 7.</a:t>
+              <a:t>Divide by the COUNT</a:t>
             </a:r>
             <a:endParaRPr lang="en-US" sz="1100" dirty="0"/>
           </a:p>
-        </p:txBody>
-      </p:sp>
-      <p:sp>
-        <p:nvSpPr>
-          <p:cNvPr id="9" name="Shape 7"/>
-          <p:cNvSpPr/>
-          <p:nvPr/>
-        </p:nvSpPr>
-        <p:spPr>
-          <a:xfrm>
-            <a:off x="3291840" y="1188720"/>
-            <a:ext cx="2560320" cy="1828800"/>
+          <a:p>
+            <a:pPr marL="342900" indent="-342900">
+              <a:spcAft>
+                <a:spcPts val="400"/>
+              </a:spcAft>
+              <a:buSzPct val="100000"/>
+              <a:buChar char="•"/>
+            </a:pPr>
+            <a:r>
+              <a:rPr lang="en-US" sz="1100" dirty="0">
+                <a:solidFill>
+                  <a:srgbClr val="6B6660"/>
+                </a:solidFill>
+                <a:latin typeface="Calibri" pitchFamily="34" charset="0"/>
+                <a:ea typeface="Calibri" pitchFamily="34" charset="-122"/>
+                <a:cs typeface="Calibri" pitchFamily="34" charset="-120"/>
+              </a:rPr>
+              <a:t>Example: 3,5,7,9,11</a:t>
+            </a:r>
+            <a:endParaRPr lang="en-US" sz="1100" dirty="0"/>
+          </a:p>
+          <a:p>
+            <a:pPr marL="342900" indent="-342900">
+              <a:spcAft>
+                <a:spcPts val="400"/>
+              </a:spcAft>
+              <a:buSzPct val="100000"/>
+              <a:buChar char="•"/>
+            </a:pPr>
+            <a:r>
+              <a:rPr lang="en-US" sz="1100" dirty="0">
+                <a:solidFill>
+                  <a:srgbClr val="6B6660"/>
+                </a:solidFill>
+                <a:latin typeface="Calibri" pitchFamily="34" charset="0"/>
+                <a:ea typeface="Calibri" pitchFamily="34" charset="-122"/>
+                <a:cs typeface="Calibri" pitchFamily="34" charset="-120"/>
+              </a:rPr>
+              <a:t>Sum = 35, Count = 5</a:t>
+            </a:r>
+            <a:endParaRPr lang="en-US" sz="1100" dirty="0"/>
+          </a:p>
+          <a:p>
+            <a:pPr marL="342900" indent="-342900">
+              <a:spcAft>
+                <a:spcPts val="400"/>
+              </a:spcAft>
+              <a:buSzPct val="100000"/>
+              <a:buChar char="•"/>
+            </a:pPr>
+            <a:r>
+              <a:rPr lang="en-US" sz="1100" dirty="0">
+                <a:solidFill>
+                  <a:srgbClr val="6B6660"/>
+                </a:solidFill>
+                <a:latin typeface="Calibri" pitchFamily="34" charset="0"/>
+                <a:ea typeface="Calibri" pitchFamily="34" charset="-122"/>
+                <a:cs typeface="Calibri" pitchFamily="34" charset="-120"/>
+              </a:rPr>
+              <a:t>Mean = 35 ÷ 5 = 7</a:t>
+            </a:r>
+            <a:endParaRPr lang="en-US" sz="1100" dirty="0"/>
+          </a:p>
+        </p:txBody>
+      </p:sp>
+      <p:sp>
+        <p:nvSpPr>
+          <p:cNvPr id="10" name="Shape 8"/>
+          <p:cNvSpPr/>
+          <p:nvPr/>
+        </p:nvSpPr>
+        <p:spPr>
+          <a:xfrm>
+            <a:off x="3246120" y="1051560"/>
+            <a:ext cx="2468880" cy="3657600"/>
           </a:xfrm>
           <a:prstGeom prst="rect">
             <a:avLst/>
@@ -1980,12 +2879,7 @@
           <a:solidFill>
             <a:srgbClr val="FFFFFF"/>
           </a:solidFill>
-          <a:ln w="12700">
-            <a:solidFill>
-              <a:srgbClr val="E5E2DC"/>
-            </a:solidFill>
-            <a:prstDash val="solid"/>
-          </a:ln>
+          <a:ln/>
           <a:effectLst>
             <a:outerShdw sx="100000" sy="100000" kx="0" ky="0" algn="bl" rotWithShape="0" blurRad="50800" dist="25400" dir="8100000">
               <a:srgbClr val="000000">
@@ -1997,34 +2891,34 @@
       </p:sp>
       <p:sp>
         <p:nvSpPr>
-          <p:cNvPr id="10" name="Shape 8"/>
-          <p:cNvSpPr/>
-          <p:nvPr/>
-        </p:nvSpPr>
-        <p:spPr>
-          <a:xfrm>
-            <a:off x="3291840" y="1188720"/>
-            <a:ext cx="2560320" cy="54864"/>
-          </a:xfrm>
-          <a:prstGeom prst="rect">
-            <a:avLst/>
-          </a:prstGeom>
-          <a:solidFill>
-            <a:srgbClr val="2A9D8F"/>
-          </a:solidFill>
-          <a:ln/>
-        </p:spPr>
-      </p:sp>
-      <p:sp>
-        <p:nvSpPr>
-          <p:cNvPr id="11" name="Text 9"/>
-          <p:cNvSpPr/>
-          <p:nvPr/>
-        </p:nvSpPr>
-        <p:spPr>
-          <a:xfrm>
-            <a:off x="3429000" y="1325880"/>
-            <a:ext cx="2286000" cy="365760"/>
+          <p:cNvPr id="11" name="Shape 9"/>
+          <p:cNvSpPr/>
+          <p:nvPr/>
+        </p:nvSpPr>
+        <p:spPr>
+          <a:xfrm>
+            <a:off x="3246120" y="1051560"/>
+            <a:ext cx="2468880" cy="54864"/>
+          </a:xfrm>
+          <a:prstGeom prst="rect">
+            <a:avLst/>
+          </a:prstGeom>
+          <a:solidFill>
+            <a:srgbClr val="E9C46A"/>
+          </a:solidFill>
+          <a:ln/>
+        </p:spPr>
+      </p:sp>
+      <p:sp>
+        <p:nvSpPr>
+          <p:cNvPr id="12" name="Text 10"/>
+          <p:cNvSpPr/>
+          <p:nvPr/>
+        </p:nvSpPr>
+        <p:spPr>
+          <a:xfrm>
+            <a:off x="3383280" y="1234440"/>
+            <a:ext cx="2194560" cy="457200"/>
           </a:xfrm>
           <a:prstGeom prst="rect">
             <a:avLst/>
@@ -2036,73 +2930,161 @@
           <a:bodyPr wrap="square" rtlCol="0" anchor="ctr"/>
           <a:lstStyle/>
           <a:p>
-            <a:pPr indent="0" marL="0">
+            <a:pPr algn="ctr" indent="0" marL="0">
               <a:buNone/>
             </a:pPr>
             <a:r>
               <a:rPr lang="en-US" sz="1400" b="1" dirty="0">
                 <a:solidFill>
                   <a:srgbClr val="1B2A4A"/>
+                </a:solidFill>
+                <a:latin typeface="Georgia" pitchFamily="34" charset="0"/>
+                <a:ea typeface="Georgia" pitchFamily="34" charset="-122"/>
+                <a:cs typeface="Georgia" pitchFamily="34" charset="-120"/>
+              </a:rPr>
+              <a:t>Median</a:t>
+            </a:r>
+            <a:endParaRPr lang="en-US" sz="1400" dirty="0"/>
+          </a:p>
+        </p:txBody>
+      </p:sp>
+      <p:sp>
+        <p:nvSpPr>
+          <p:cNvPr id="13" name="Text 11"/>
+          <p:cNvSpPr/>
+          <p:nvPr/>
+        </p:nvSpPr>
+        <p:spPr>
+          <a:xfrm>
+            <a:off x="3383280" y="1737360"/>
+            <a:ext cx="2194560" cy="2834640"/>
+          </a:xfrm>
+          <a:prstGeom prst="rect">
+            <a:avLst/>
+          </a:prstGeom>
+          <a:noFill/>
+          <a:ln/>
+        </p:spPr>
+        <p:txBody>
+          <a:bodyPr wrap="square" rtlCol="0" anchor="t"/>
+          <a:lstStyle/>
+          <a:p>
+            <a:pPr marL="342900" indent="-342900">
+              <a:spcAft>
+                <a:spcPts val="400"/>
+              </a:spcAft>
+              <a:buSzPct val="100000"/>
+              <a:buChar char="•"/>
+            </a:pPr>
+            <a:r>
+              <a:rPr lang="en-US" sz="1100" dirty="0">
+                <a:solidFill>
+                  <a:srgbClr val="6B6660"/>
                 </a:solidFill>
                 <a:latin typeface="Calibri" pitchFamily="34" charset="0"/>
                 <a:ea typeface="Calibri" pitchFamily="34" charset="-122"/>
                 <a:cs typeface="Calibri" pitchFamily="34" charset="-120"/>
               </a:rPr>
-              <a:t>Median</a:t>
-            </a:r>
-            <a:endParaRPr lang="en-US" sz="1400" dirty="0"/>
-          </a:p>
-        </p:txBody>
-      </p:sp>
-      <p:sp>
-        <p:nvSpPr>
-          <p:cNvPr id="12" name="Text 10"/>
-          <p:cNvSpPr/>
-          <p:nvPr/>
-        </p:nvSpPr>
-        <p:spPr>
-          <a:xfrm>
-            <a:off x="3429000" y="1737360"/>
-            <a:ext cx="2286000" cy="1097280"/>
-          </a:xfrm>
-          <a:prstGeom prst="rect">
-            <a:avLst/>
-          </a:prstGeom>
-          <a:noFill/>
-          <a:ln/>
-        </p:spPr>
-        <p:txBody>
-          <a:bodyPr wrap="square" rtlCol="0" anchor="t"/>
-          <a:lstStyle/>
-          <a:p>
-            <a:pPr indent="0" marL="0">
-              <a:buNone/>
+              <a:t>Put values IN ORDER</a:t>
+            </a:r>
+            <a:endParaRPr lang="en-US" sz="1100" dirty="0"/>
+          </a:p>
+          <a:p>
+            <a:pPr marL="342900" indent="-342900">
+              <a:spcAft>
+                <a:spcPts val="400"/>
+              </a:spcAft>
+              <a:buSzPct val="100000"/>
+              <a:buChar char="•"/>
             </a:pPr>
             <a:r>
               <a:rPr lang="en-US" sz="1100" dirty="0">
                 <a:solidFill>
-                  <a:srgbClr val="3D3A36"/>
+                  <a:srgbClr val="6B6660"/>
                 </a:solidFill>
                 <a:latin typeface="Calibri" pitchFamily="34" charset="0"/>
                 <a:ea typeface="Calibri" pitchFamily="34" charset="-122"/>
                 <a:cs typeface="Calibri" pitchFamily="34" charset="-120"/>
               </a:rPr>
-              <a:t>The MIDDLE value when data is in order. If even number of values, average the two middle ones. Example: 3,5,7,9,11 → median = 7. Example: 2,4,6,8 → median = (4+6)÷2 = 5.</a:t>
+              <a:t>Find the MIDDLE value</a:t>
             </a:r>
             <a:endParaRPr lang="en-US" sz="1100" dirty="0"/>
           </a:p>
-        </p:txBody>
-      </p:sp>
-      <p:sp>
-        <p:nvSpPr>
-          <p:cNvPr id="13" name="Shape 11"/>
-          <p:cNvSpPr/>
-          <p:nvPr/>
-        </p:nvSpPr>
-        <p:spPr>
-          <a:xfrm>
-            <a:off x="6126480" y="1188720"/>
-            <a:ext cx="2560320" cy="1828800"/>
+          <a:p>
+            <a:pPr marL="342900" indent="-342900">
+              <a:spcAft>
+                <a:spcPts val="400"/>
+              </a:spcAft>
+              <a:buSzPct val="100000"/>
+              <a:buChar char="•"/>
+            </a:pPr>
+            <a:r>
+              <a:rPr lang="en-US" sz="1100" dirty="0">
+                <a:solidFill>
+                  <a:srgbClr val="6B6660"/>
+                </a:solidFill>
+                <a:latin typeface="Calibri" pitchFamily="34" charset="0"/>
+                <a:ea typeface="Calibri" pitchFamily="34" charset="-122"/>
+                <a:cs typeface="Calibri" pitchFamily="34" charset="-120"/>
+              </a:rPr>
+              <a:t>Odd count: middle number</a:t>
+            </a:r>
+            <a:endParaRPr lang="en-US" sz="1100" dirty="0"/>
+          </a:p>
+          <a:p>
+            <a:pPr marL="342900" indent="-342900">
+              <a:spcAft>
+                <a:spcPts val="400"/>
+              </a:spcAft>
+              <a:buSzPct val="100000"/>
+              <a:buChar char="•"/>
+            </a:pPr>
+            <a:r>
+              <a:rPr lang="en-US" sz="1100" dirty="0">
+                <a:solidFill>
+                  <a:srgbClr val="6B6660"/>
+                </a:solidFill>
+                <a:latin typeface="Calibri" pitchFamily="34" charset="0"/>
+                <a:ea typeface="Calibri" pitchFamily="34" charset="-122"/>
+                <a:cs typeface="Calibri" pitchFamily="34" charset="-120"/>
+              </a:rPr>
+              <a:t>Even count: mean of two middle</a:t>
+            </a:r>
+            <a:endParaRPr lang="en-US" sz="1100" dirty="0"/>
+          </a:p>
+          <a:p>
+            <a:pPr marL="342900" indent="-342900">
+              <a:spcAft>
+                <a:spcPts val="400"/>
+              </a:spcAft>
+              <a:buSzPct val="100000"/>
+              <a:buChar char="•"/>
+            </a:pPr>
+            <a:r>
+              <a:rPr lang="en-US" sz="1100" dirty="0">
+                <a:solidFill>
+                  <a:srgbClr val="6B6660"/>
+                </a:solidFill>
+                <a:latin typeface="Calibri" pitchFamily="34" charset="0"/>
+                <a:ea typeface="Calibri" pitchFamily="34" charset="-122"/>
+                <a:cs typeface="Calibri" pitchFamily="34" charset="-120"/>
+              </a:rPr>
+              <a:t>Example: 3,5,7,9,11 → median = 7</a:t>
+            </a:r>
+            <a:endParaRPr lang="en-US" sz="1100" dirty="0"/>
+          </a:p>
+        </p:txBody>
+      </p:sp>
+      <p:sp>
+        <p:nvSpPr>
+          <p:cNvPr id="14" name="Shape 12"/>
+          <p:cNvSpPr/>
+          <p:nvPr/>
+        </p:nvSpPr>
+        <p:spPr>
+          <a:xfrm>
+            <a:off x="5852160" y="1051560"/>
+            <a:ext cx="2468880" cy="3657600"/>
           </a:xfrm>
           <a:prstGeom prst="rect">
             <a:avLst/>
@@ -2110,12 +3092,7 @@
           <a:solidFill>
             <a:srgbClr val="FFFFFF"/>
           </a:solidFill>
-          <a:ln w="12700">
-            <a:solidFill>
-              <a:srgbClr val="E5E2DC"/>
-            </a:solidFill>
-            <a:prstDash val="solid"/>
-          </a:ln>
+          <a:ln/>
           <a:effectLst>
             <a:outerShdw sx="100000" sy="100000" kx="0" ky="0" algn="bl" rotWithShape="0" blurRad="50800" dist="25400" dir="8100000">
               <a:srgbClr val="000000">
@@ -2127,34 +3104,34 @@
       </p:sp>
       <p:sp>
         <p:nvSpPr>
-          <p:cNvPr id="14" name="Shape 12"/>
-          <p:cNvSpPr/>
-          <p:nvPr/>
-        </p:nvSpPr>
-        <p:spPr>
-          <a:xfrm>
-            <a:off x="6126480" y="1188720"/>
-            <a:ext cx="2560320" cy="54864"/>
-          </a:xfrm>
-          <a:prstGeom prst="rect">
-            <a:avLst/>
-          </a:prstGeom>
-          <a:solidFill>
-            <a:srgbClr val="2A9D8F"/>
-          </a:solidFill>
-          <a:ln/>
-        </p:spPr>
-      </p:sp>
-      <p:sp>
-        <p:nvSpPr>
-          <p:cNvPr id="15" name="Text 13"/>
-          <p:cNvSpPr/>
-          <p:nvPr/>
-        </p:nvSpPr>
-        <p:spPr>
-          <a:xfrm>
-            <a:off x="6263640" y="1325880"/>
-            <a:ext cx="2286000" cy="365760"/>
+          <p:cNvPr id="15" name="Shape 13"/>
+          <p:cNvSpPr/>
+          <p:nvPr/>
+        </p:nvSpPr>
+        <p:spPr>
+          <a:xfrm>
+            <a:off x="5852160" y="1051560"/>
+            <a:ext cx="2468880" cy="54864"/>
+          </a:xfrm>
+          <a:prstGeom prst="rect">
+            <a:avLst/>
+          </a:prstGeom>
+          <a:solidFill>
+            <a:srgbClr val="9B9690"/>
+          </a:solidFill>
+          <a:ln/>
+        </p:spPr>
+      </p:sp>
+      <p:sp>
+        <p:nvSpPr>
+          <p:cNvPr id="16" name="Text 14"/>
+          <p:cNvSpPr/>
+          <p:nvPr/>
+        </p:nvSpPr>
+        <p:spPr>
+          <a:xfrm>
+            <a:off x="5989320" y="1234440"/>
+            <a:ext cx="2194560" cy="457200"/>
           </a:xfrm>
           <a:prstGeom prst="rect">
             <a:avLst/>
@@ -2166,58 +3143,146 @@
           <a:bodyPr wrap="square" rtlCol="0" anchor="ctr"/>
           <a:lstStyle/>
           <a:p>
-            <a:pPr indent="0" marL="0">
+            <a:pPr algn="ctr" indent="0" marL="0">
               <a:buNone/>
             </a:pPr>
             <a:r>
               <a:rPr lang="en-US" sz="1400" b="1" dirty="0">
                 <a:solidFill>
                   <a:srgbClr val="1B2A4A"/>
+                </a:solidFill>
+                <a:latin typeface="Georgia" pitchFamily="34" charset="0"/>
+                <a:ea typeface="Georgia" pitchFamily="34" charset="-122"/>
+                <a:cs typeface="Georgia" pitchFamily="34" charset="-120"/>
+              </a:rPr>
+              <a:t>Mode &amp; Range</a:t>
+            </a:r>
+            <a:endParaRPr lang="en-US" sz="1400" dirty="0"/>
+          </a:p>
+        </p:txBody>
+      </p:sp>
+      <p:sp>
+        <p:nvSpPr>
+          <p:cNvPr id="17" name="Text 15"/>
+          <p:cNvSpPr/>
+          <p:nvPr/>
+        </p:nvSpPr>
+        <p:spPr>
+          <a:xfrm>
+            <a:off x="5989320" y="1737360"/>
+            <a:ext cx="2194560" cy="2834640"/>
+          </a:xfrm>
+          <a:prstGeom prst="rect">
+            <a:avLst/>
+          </a:prstGeom>
+          <a:noFill/>
+          <a:ln/>
+        </p:spPr>
+        <p:txBody>
+          <a:bodyPr wrap="square" rtlCol="0" anchor="t"/>
+          <a:lstStyle/>
+          <a:p>
+            <a:pPr marL="342900" indent="-342900">
+              <a:spcAft>
+                <a:spcPts val="400"/>
+              </a:spcAft>
+              <a:buSzPct val="100000"/>
+              <a:buChar char="•"/>
+            </a:pPr>
+            <a:r>
+              <a:rPr lang="en-US" sz="1100" dirty="0">
+                <a:solidFill>
+                  <a:srgbClr val="6B6660"/>
                 </a:solidFill>
                 <a:latin typeface="Calibri" pitchFamily="34" charset="0"/>
                 <a:ea typeface="Calibri" pitchFamily="34" charset="-122"/>
                 <a:cs typeface="Calibri" pitchFamily="34" charset="-120"/>
               </a:rPr>
-              <a:t>Mode</a:t>
-            </a:r>
-            <a:endParaRPr lang="en-US" sz="1400" dirty="0"/>
-          </a:p>
-        </p:txBody>
-      </p:sp>
-      <p:sp>
-        <p:nvSpPr>
-          <p:cNvPr id="16" name="Text 14"/>
-          <p:cNvSpPr/>
-          <p:nvPr/>
-        </p:nvSpPr>
-        <p:spPr>
-          <a:xfrm>
-            <a:off x="6263640" y="1737360"/>
-            <a:ext cx="2286000" cy="1097280"/>
-          </a:xfrm>
-          <a:prstGeom prst="rect">
-            <a:avLst/>
-          </a:prstGeom>
-          <a:noFill/>
-          <a:ln/>
-        </p:spPr>
-        <p:txBody>
-          <a:bodyPr wrap="square" rtlCol="0" anchor="t"/>
-          <a:lstStyle/>
-          <a:p>
-            <a:pPr indent="0" marL="0">
-              <a:buNone/>
+              <a:t>Mode = most COMMON value</a:t>
+            </a:r>
+            <a:endParaRPr lang="en-US" sz="1100" dirty="0"/>
+          </a:p>
+          <a:p>
+            <a:pPr marL="342900" indent="-342900">
+              <a:spcAft>
+                <a:spcPts val="400"/>
+              </a:spcAft>
+              <a:buSzPct val="100000"/>
+              <a:buChar char="•"/>
             </a:pPr>
             <a:r>
               <a:rPr lang="en-US" sz="1100" dirty="0">
                 <a:solidFill>
-                  <a:srgbClr val="3D3A36"/>
+                  <a:srgbClr val="6B6660"/>
                 </a:solidFill>
                 <a:latin typeface="Calibri" pitchFamily="34" charset="0"/>
                 <a:ea typeface="Calibri" pitchFamily="34" charset="-122"/>
                 <a:cs typeface="Calibri" pitchFamily="34" charset="-120"/>
               </a:rPr>
-              <a:t>The most FREQUENT value. There can be more than one mode, or no mode. Example: 2,3,3,5,7 → mode = 3. Useful for categorical data (e.g. most popular colour).</a:t>
+              <a:t>Can be no mode, or multiple modes</a:t>
+            </a:r>
+            <a:endParaRPr lang="en-US" sz="1100" dirty="0"/>
+          </a:p>
+          <a:p>
+            <a:pPr marL="342900" indent="-342900">
+              <a:spcAft>
+                <a:spcPts val="400"/>
+              </a:spcAft>
+              <a:buSzPct val="100000"/>
+              <a:buChar char="•"/>
+            </a:pPr>
+            <a:r>
+              <a:rPr lang="en-US" sz="1100" dirty="0">
+                <a:solidFill>
+                  <a:srgbClr val="6B6660"/>
+                </a:solidFill>
+                <a:latin typeface="Calibri" pitchFamily="34" charset="0"/>
+                <a:ea typeface="Calibri" pitchFamily="34" charset="-122"/>
+                <a:cs typeface="Calibri" pitchFamily="34" charset="-120"/>
+              </a:rPr>
+              <a:t>Range = highest − lowest</a:t>
+            </a:r>
+            <a:endParaRPr lang="en-US" sz="1100" dirty="0"/>
+          </a:p>
+          <a:p>
+            <a:pPr marL="342900" indent="-342900">
+              <a:spcAft>
+                <a:spcPts val="400"/>
+              </a:spcAft>
+              <a:buSzPct val="100000"/>
+              <a:buChar char="•"/>
+            </a:pPr>
+            <a:r>
+              <a:rPr lang="en-US" sz="1100" dirty="0">
+                <a:solidFill>
+                  <a:srgbClr val="6B6660"/>
+                </a:solidFill>
+                <a:latin typeface="Calibri" pitchFamily="34" charset="0"/>
+                <a:ea typeface="Calibri" pitchFamily="34" charset="-122"/>
+                <a:cs typeface="Calibri" pitchFamily="34" charset="-120"/>
+              </a:rPr>
+              <a:t>Range measures SPREAD</a:t>
+            </a:r>
+            <a:endParaRPr lang="en-US" sz="1100" dirty="0"/>
+          </a:p>
+          <a:p>
+            <a:pPr marL="342900" indent="-342900">
+              <a:spcAft>
+                <a:spcPts val="400"/>
+              </a:spcAft>
+              <a:buSzPct val="100000"/>
+              <a:buChar char="•"/>
+            </a:pPr>
+            <a:r>
+              <a:rPr lang="en-US" sz="1100" dirty="0">
+                <a:solidFill>
+                  <a:srgbClr val="6B6660"/>
+                </a:solidFill>
+                <a:latin typeface="Calibri" pitchFamily="34" charset="0"/>
+                <a:ea typeface="Calibri" pitchFamily="34" charset="-122"/>
+                <a:cs typeface="Calibri" pitchFamily="34" charset="-120"/>
+              </a:rPr>
+              <a:t>Example: 3,5,5,9,11 → mode=5, range=8</a:t>
             </a:r>
             <a:endParaRPr lang="en-US" sz="1100" dirty="0"/>
           </a:p>
@@ -2264,7 +3329,47 @@
         <p:spPr>
           <a:xfrm>
             <a:off x="0" y="0"/>
-            <a:ext cx="9144000" cy="54864"/>
+            <a:ext cx="9144000" cy="822960"/>
+          </a:xfrm>
+          <a:prstGeom prst="rect">
+            <a:avLst/>
+          </a:prstGeom>
+          <a:solidFill>
+            <a:srgbClr val="FFFFFF"/>
+          </a:solidFill>
+          <a:ln/>
+        </p:spPr>
+      </p:sp>
+      <p:sp>
+        <p:nvSpPr>
+          <p:cNvPr id="3" name="Shape 1"/>
+          <p:cNvSpPr/>
+          <p:nvPr/>
+        </p:nvSpPr>
+        <p:spPr>
+          <a:xfrm>
+            <a:off x="0" y="804672"/>
+            <a:ext cx="9144000" cy="27432"/>
+          </a:xfrm>
+          <a:prstGeom prst="rect">
+            <a:avLst/>
+          </a:prstGeom>
+          <a:solidFill>
+            <a:srgbClr val="E5E2DC"/>
+          </a:solidFill>
+          <a:ln/>
+        </p:spPr>
+      </p:sp>
+      <p:sp>
+        <p:nvSpPr>
+          <p:cNvPr id="4" name="Shape 2"/>
+          <p:cNvSpPr/>
+          <p:nvPr/>
+        </p:nvSpPr>
+        <p:spPr>
+          <a:xfrm>
+            <a:off x="548640" y="201168"/>
+            <a:ext cx="54864" cy="420624"/>
           </a:xfrm>
           <a:prstGeom prst="rect">
             <a:avLst/>
@@ -2277,14 +3382,14 @@
       </p:sp>
       <p:sp>
         <p:nvSpPr>
-          <p:cNvPr id="3" name="Text 1"/>
-          <p:cNvSpPr/>
-          <p:nvPr/>
-        </p:nvSpPr>
-        <p:spPr>
-          <a:xfrm>
-            <a:off x="7772400" y="4709160"/>
-            <a:ext cx="1097280" cy="320040"/>
+          <p:cNvPr id="5" name="Text 3"/>
+          <p:cNvSpPr/>
+          <p:nvPr/>
+        </p:nvSpPr>
+        <p:spPr>
+          <a:xfrm>
+            <a:off x="777240" y="137160"/>
+            <a:ext cx="7772400" cy="548640"/>
           </a:xfrm>
           <a:prstGeom prst="rect">
             <a:avLst/>
@@ -2293,96 +3398,78 @@
           <a:ln/>
         </p:spPr>
         <p:txBody>
-          <a:bodyPr wrap="square" rtlCol="0" anchor="ctr"/>
-          <a:lstStyle/>
-          <a:p>
-            <a:pPr algn="r" indent="0" marL="0">
+          <a:bodyPr wrap="square" lIns="0" tIns="0" rIns="0" bIns="0" rtlCol="0" anchor="ctr"/>
+          <a:lstStyle/>
+          <a:p>
+            <a:pPr indent="0" marL="0">
               <a:buNone/>
             </a:pPr>
             <a:r>
-              <a:rPr lang="en-US" sz="900" dirty="0">
-                <a:solidFill>
-                  <a:srgbClr val="6B6660"/>
+              <a:rPr lang="en-US" sz="2000" b="1" dirty="0">
+                <a:solidFill>
+                  <a:srgbClr val="1B2A4A"/>
+                </a:solidFill>
+                <a:latin typeface="Georgia" pitchFamily="34" charset="0"/>
+                <a:ea typeface="Georgia" pitchFamily="34" charset="-122"/>
+                <a:cs typeface="Georgia" pitchFamily="34" charset="-120"/>
+              </a:rPr>
+              <a:t>Which Average Should I Use?</a:t>
+            </a:r>
+            <a:endParaRPr lang="en-US" sz="2000" dirty="0"/>
+          </a:p>
+        </p:txBody>
+      </p:sp>
+      <p:sp>
+        <p:nvSpPr>
+          <p:cNvPr id="6" name="Text 4"/>
+          <p:cNvSpPr/>
+          <p:nvPr/>
+        </p:nvSpPr>
+        <p:spPr>
+          <a:xfrm>
+            <a:off x="731520" y="1051560"/>
+            <a:ext cx="7680960" cy="3108960"/>
+          </a:xfrm>
+          <a:prstGeom prst="rect">
+            <a:avLst/>
+          </a:prstGeom>
+          <a:noFill/>
+          <a:ln/>
+        </p:spPr>
+        <p:txBody>
+          <a:bodyPr wrap="square" rtlCol="0" anchor="t"/>
+          <a:lstStyle/>
+          <a:p>
+            <a:pPr marL="342900" indent="-342900">
+              <a:spcAft>
+                <a:spcPts val="800"/>
+              </a:spcAft>
+              <a:buSzPct val="100000"/>
+              <a:buChar char="•"/>
+            </a:pPr>
+            <a:r>
+              <a:rPr lang="en-US" sz="1500" dirty="0">
+                <a:solidFill>
+                  <a:srgbClr val="3D3A36"/>
                 </a:solidFill>
                 <a:latin typeface="Calibri" pitchFamily="34" charset="0"/>
                 <a:ea typeface="Calibri" pitchFamily="34" charset="-122"/>
                 <a:cs typeface="Calibri" pitchFamily="34" charset="-120"/>
               </a:rPr>
-              <a:t>4 / 6</a:t>
-            </a:r>
-            <a:endParaRPr lang="en-US" sz="900" dirty="0"/>
-          </a:p>
-        </p:txBody>
-      </p:sp>
-      <p:sp>
-        <p:nvSpPr>
-          <p:cNvPr id="4" name="Text 2"/>
-          <p:cNvSpPr/>
-          <p:nvPr/>
-        </p:nvSpPr>
-        <p:spPr>
-          <a:xfrm>
-            <a:off x="457200" y="274320"/>
-            <a:ext cx="8229600" cy="640080"/>
-          </a:xfrm>
-          <a:prstGeom prst="rect">
-            <a:avLst/>
-          </a:prstGeom>
-          <a:noFill/>
-          <a:ln/>
-        </p:spPr>
-        <p:txBody>
-          <a:bodyPr wrap="square" rtlCol="0" anchor="ctr"/>
-          <a:lstStyle/>
-          <a:p>
-            <a:pPr indent="0" marL="0">
-              <a:buNone/>
-            </a:pPr>
-            <a:r>
-              <a:rPr lang="en-US" sz="2600" b="1" dirty="0">
-                <a:solidFill>
-                  <a:srgbClr val="1B2A4A"/>
-                </a:solidFill>
-                <a:latin typeface="Georgia" pitchFamily="34" charset="0"/>
-                <a:ea typeface="Georgia" pitchFamily="34" charset="-122"/>
-                <a:cs typeface="Georgia" pitchFamily="34" charset="-120"/>
-              </a:rPr>
-              <a:t>Range</a:t>
-            </a:r>
-            <a:endParaRPr lang="en-US" sz="2600" dirty="0"/>
-          </a:p>
-        </p:txBody>
-      </p:sp>
-      <p:sp>
-        <p:nvSpPr>
-          <p:cNvPr id="5" name="Text 3"/>
-          <p:cNvSpPr/>
-          <p:nvPr/>
-        </p:nvSpPr>
-        <p:spPr>
-          <a:xfrm>
-            <a:off x="457200" y="1188720"/>
-            <a:ext cx="3840480" cy="3474720"/>
-          </a:xfrm>
-          <a:prstGeom prst="rect">
-            <a:avLst/>
-          </a:prstGeom>
-          <a:noFill/>
-          <a:ln/>
-        </p:spPr>
-        <p:txBody>
-          <a:bodyPr wrap="square" rtlCol="0" anchor="t"/>
-          <a:lstStyle/>
+              <a:t>MEAN: best for data with no extreme values. Uses ALL the data.</a:t>
+            </a:r>
+            <a:endParaRPr lang="en-US" sz="1500" dirty="0"/>
+          </a:p>
           <a:p>
             <a:pPr marL="342900" indent="-342900">
               <a:spcAft>
-                <a:spcPts val="600"/>
+                <a:spcPts val="800"/>
               </a:spcAft>
               <a:buSzPct val="100000"/>
               <a:buChar char="•"/>
             </a:pPr>
             <a:r>
-              <a:rPr lang="en-US" sz="1400" dirty="0">
+              <a:rPr lang="en-US" sz="1500" dirty="0">
                 <a:solidFill>
                   <a:srgbClr val="3D3A36"/>
                 </a:solidFill>
@@ -2390,20 +3477,20 @@
                 <a:ea typeface="Calibri" pitchFamily="34" charset="-122"/>
                 <a:cs typeface="Calibri" pitchFamily="34" charset="-120"/>
               </a:rPr>
-              <a:t>Range = highest value − lowest value</a:t>
-            </a:r>
-            <a:endParaRPr lang="en-US" sz="1400" dirty="0"/>
+              <a:t>MEDIAN: best when there are outliers (extreme values). Not affected by them.</a:t>
+            </a:r>
+            <a:endParaRPr lang="en-US" sz="1500" dirty="0"/>
           </a:p>
           <a:p>
             <a:pPr marL="342900" indent="-342900">
               <a:spcAft>
-                <a:spcPts val="600"/>
+                <a:spcPts val="800"/>
               </a:spcAft>
               <a:buSzPct val="100000"/>
               <a:buChar char="•"/>
             </a:pPr>
             <a:r>
-              <a:rPr lang="en-US" sz="1400" dirty="0">
+              <a:rPr lang="en-US" sz="1500" dirty="0">
                 <a:solidFill>
                   <a:srgbClr val="3D3A36"/>
                 </a:solidFill>
@@ -2411,20 +3498,20 @@
                 <a:ea typeface="Calibri" pitchFamily="34" charset="-122"/>
                 <a:cs typeface="Calibri" pitchFamily="34" charset="-120"/>
               </a:rPr>
-              <a:t>Measures the SPREAD of data</a:t>
-            </a:r>
-            <a:endParaRPr lang="en-US" sz="1400" dirty="0"/>
+              <a:t>MODE: best for categorical data (e.g. most popular colour).</a:t>
+            </a:r>
+            <a:endParaRPr lang="en-US" sz="1500" dirty="0"/>
           </a:p>
           <a:p>
             <a:pPr marL="342900" indent="-342900">
               <a:spcAft>
-                <a:spcPts val="600"/>
+                <a:spcPts val="800"/>
               </a:spcAft>
               <a:buSzPct val="100000"/>
               <a:buChar char="•"/>
             </a:pPr>
             <a:r>
-              <a:rPr lang="en-US" sz="1400" dirty="0">
+              <a:rPr lang="en-US" sz="1500" dirty="0">
                 <a:solidFill>
                   <a:srgbClr val="3D3A36"/>
                 </a:solidFill>
@@ -2432,20 +3519,20 @@
                 <a:ea typeface="Calibri" pitchFamily="34" charset="-122"/>
                 <a:cs typeface="Calibri" pitchFamily="34" charset="-120"/>
               </a:rPr>
-              <a:t>Example: 3,5,7,9,11 → range = 11−3 = 8</a:t>
-            </a:r>
-            <a:endParaRPr lang="en-US" sz="1400" dirty="0"/>
+              <a:t>RANGE: tells you how spread out the data is (not an average).</a:t>
+            </a:r>
+            <a:endParaRPr lang="en-US" sz="1500" dirty="0"/>
           </a:p>
           <a:p>
             <a:pPr marL="342900" indent="-342900">
               <a:spcAft>
-                <a:spcPts val="600"/>
+                <a:spcPts val="800"/>
               </a:spcAft>
               <a:buSzPct val="100000"/>
               <a:buChar char="•"/>
             </a:pPr>
             <a:r>
-              <a:rPr lang="en-US" sz="1400" dirty="0">
+              <a:rPr lang="en-US" sz="1500" dirty="0">
                 <a:solidFill>
                   <a:srgbClr val="3D3A36"/>
                 </a:solidFill>
@@ -2453,77 +3540,30 @@
                 <a:ea typeface="Calibri" pitchFamily="34" charset="-122"/>
                 <a:cs typeface="Calibri" pitchFamily="34" charset="-120"/>
               </a:rPr>
-              <a:t>A large range = data is spread out</a:t>
-            </a:r>
-            <a:endParaRPr lang="en-US" sz="1400" dirty="0"/>
-          </a:p>
-          <a:p>
-            <a:pPr marL="342900" indent="-342900">
-              <a:spcAft>
-                <a:spcPts val="600"/>
-              </a:spcAft>
-              <a:buSzPct val="100000"/>
-              <a:buChar char="•"/>
-            </a:pPr>
-            <a:r>
-              <a:rPr lang="en-US" sz="1400" dirty="0">
-                <a:solidFill>
-                  <a:srgbClr val="3D3A36"/>
-                </a:solidFill>
-                <a:latin typeface="Calibri" pitchFamily="34" charset="0"/>
-                <a:ea typeface="Calibri" pitchFamily="34" charset="-122"/>
-                <a:cs typeface="Calibri" pitchFamily="34" charset="-120"/>
-              </a:rPr>
-              <a:t>A small range = data is consistent</a:t>
-            </a:r>
-            <a:endParaRPr lang="en-US" sz="1400" dirty="0"/>
-          </a:p>
-          <a:p>
-            <a:pPr marL="342900" indent="-342900">
-              <a:spcAft>
-                <a:spcPts val="600"/>
-              </a:spcAft>
-              <a:buSzPct val="100000"/>
-              <a:buChar char="•"/>
-            </a:pPr>
-            <a:r>
-              <a:rPr lang="en-US" sz="1400" dirty="0">
-                <a:solidFill>
-                  <a:srgbClr val="3D3A36"/>
-                </a:solidFill>
-                <a:latin typeface="Calibri" pitchFamily="34" charset="0"/>
-                <a:ea typeface="Calibri" pitchFamily="34" charset="-122"/>
-                <a:cs typeface="Calibri" pitchFamily="34" charset="-120"/>
-              </a:rPr>
-              <a:t>The range is affected by outliers</a:t>
-            </a:r>
-            <a:endParaRPr lang="en-US" sz="1400" dirty="0"/>
-          </a:p>
-        </p:txBody>
-      </p:sp>
-      <p:sp>
-        <p:nvSpPr>
-          <p:cNvPr id="6" name="Shape 4"/>
-          <p:cNvSpPr/>
-          <p:nvPr/>
-        </p:nvSpPr>
-        <p:spPr>
-          <a:xfrm>
-            <a:off x="4846320" y="1188720"/>
-            <a:ext cx="3840480" cy="3474720"/>
-          </a:xfrm>
-          <a:prstGeom prst="rect">
-            <a:avLst/>
-          </a:prstGeom>
-          <a:solidFill>
-            <a:srgbClr val="FFFFFF"/>
-          </a:solidFill>
-          <a:ln w="12700">
-            <a:solidFill>
-              <a:srgbClr val="E5E2DC"/>
-            </a:solidFill>
-            <a:prstDash val="solid"/>
-          </a:ln>
+              <a:t>In assessments, you may be asked to justify which average is most appropriate.</a:t>
+            </a:r>
+            <a:endParaRPr lang="en-US" sz="1500" dirty="0"/>
+          </a:p>
+        </p:txBody>
+      </p:sp>
+      <p:sp>
+        <p:nvSpPr>
+          <p:cNvPr id="7" name="Shape 5"/>
+          <p:cNvSpPr/>
+          <p:nvPr/>
+        </p:nvSpPr>
+        <p:spPr>
+          <a:xfrm>
+            <a:off x="731520" y="4206240"/>
+            <a:ext cx="7680960" cy="640080"/>
+          </a:xfrm>
+          <a:prstGeom prst="rect">
+            <a:avLst/>
+          </a:prstGeom>
+          <a:solidFill>
+            <a:srgbClr val="E8F5F3"/>
+          </a:solidFill>
+          <a:ln/>
           <a:effectLst>
             <a:outerShdw sx="100000" sy="100000" kx="0" ky="0" algn="bl" rotWithShape="0" blurRad="50800" dist="25400" dir="8100000">
               <a:srgbClr val="000000">
@@ -2535,34 +3575,14 @@
       </p:sp>
       <p:sp>
         <p:nvSpPr>
-          <p:cNvPr id="7" name="Shape 5"/>
-          <p:cNvSpPr/>
-          <p:nvPr/>
-        </p:nvSpPr>
-        <p:spPr>
-          <a:xfrm>
-            <a:off x="4846320" y="1188720"/>
-            <a:ext cx="3840480" cy="54864"/>
-          </a:xfrm>
-          <a:prstGeom prst="rect">
-            <a:avLst/>
-          </a:prstGeom>
-          <a:solidFill>
-            <a:srgbClr val="2A9D8F"/>
-          </a:solidFill>
-          <a:ln/>
-        </p:spPr>
-      </p:sp>
-      <p:sp>
-        <p:nvSpPr>
           <p:cNvPr id="8" name="Text 6"/>
           <p:cNvSpPr/>
           <p:nvPr/>
         </p:nvSpPr>
         <p:spPr>
           <a:xfrm>
-            <a:off x="5120640" y="1371600"/>
-            <a:ext cx="3291840" cy="3108960"/>
+            <a:off x="914400" y="4251960"/>
+            <a:ext cx="7315200" cy="548640"/>
           </a:xfrm>
           <a:prstGeom prst="rect">
             <a:avLst/>
@@ -2571,46 +3591,28 @@
           <a:ln/>
         </p:spPr>
         <p:txBody>
-          <a:bodyPr wrap="square" rtlCol="0" anchor="t"/>
+          <a:bodyPr wrap="square" rtlCol="0" anchor="ctr"/>
           <a:lstStyle/>
           <a:p>
             <a:pPr indent="0" marL="0">
-              <a:spcAft>
-                <a:spcPts val="400"/>
-              </a:spcAft>
               <a:buNone/>
             </a:pPr>
             <a:r>
-              <a:rPr lang="en-US" sz="1600" b="1" dirty="0">
-                <a:solidFill>
-                  <a:srgbClr val="1B2A4A"/>
+              <a:rPr lang="en-US" sz="1200" b="1" dirty="0">
+                <a:solidFill>
+                  <a:srgbClr val="2A9D8F"/>
                 </a:solidFill>
                 <a:latin typeface="Calibri" pitchFamily="34" charset="0"/>
                 <a:ea typeface="Calibri" pitchFamily="34" charset="-122"/>
                 <a:cs typeface="Calibri" pitchFamily="34" charset="-120"/>
               </a:rPr>
-              <a:t>When to Use Which?</a:t>
-            </a:r>
-            <a:endParaRPr lang="en-US" sz="1600" dirty="0"/>
-          </a:p>
-          <a:p>
+              <a:t>Key Idea: </a:t>
+            </a:r>
             <a:pPr indent="0" marL="0">
-              <a:spcAft>
-                <a:spcPts val="400"/>
-              </a:spcAft>
               <a:buNone/>
             </a:pPr>
-            <a:endParaRPr lang="en-US" sz="1600" dirty="0"/>
-          </a:p>
-          <a:p>
-            <a:pPr indent="0" marL="0">
-              <a:spcAft>
-                <a:spcPts val="400"/>
-              </a:spcAft>
-              <a:buNone/>
-            </a:pPr>
-            <a:r>
-              <a:rPr lang="en-US" sz="1300" dirty="0">
+            <a:r>
+              <a:rPr lang="en-US" sz="1200" i="1" dirty="0">
                 <a:solidFill>
                   <a:srgbClr val="3D3A36"/>
                 </a:solidFill>
@@ -2618,89 +3620,9 @@
                 <a:ea typeface="Calibri" pitchFamily="34" charset="-122"/>
                 <a:cs typeface="Calibri" pitchFamily="34" charset="-120"/>
               </a:rPr>
-              <a:t>Mean: best for numerical data without outliers</a:t>
-            </a:r>
-            <a:endParaRPr lang="en-US" sz="1600" dirty="0"/>
-          </a:p>
-          <a:p>
-            <a:pPr indent="0" marL="0">
-              <a:spcAft>
-                <a:spcPts val="400"/>
-              </a:spcAft>
-              <a:buNone/>
-            </a:pPr>
-            <a:r>
-              <a:rPr lang="en-US" sz="1300" dirty="0">
-                <a:solidFill>
-                  <a:srgbClr val="3D3A36"/>
-                </a:solidFill>
-                <a:latin typeface="Calibri" pitchFamily="34" charset="0"/>
-                <a:ea typeface="Calibri" pitchFamily="34" charset="-122"/>
-                <a:cs typeface="Calibri" pitchFamily="34" charset="-120"/>
-              </a:rPr>
-              <a:t>Median: best when there are outliers (not affected)</a:t>
-            </a:r>
-            <a:endParaRPr lang="en-US" sz="1600" dirty="0"/>
-          </a:p>
-          <a:p>
-            <a:pPr indent="0" marL="0">
-              <a:spcAft>
-                <a:spcPts val="400"/>
-              </a:spcAft>
-              <a:buNone/>
-            </a:pPr>
-            <a:r>
-              <a:rPr lang="en-US" sz="1300" dirty="0">
-                <a:solidFill>
-                  <a:srgbClr val="3D3A36"/>
-                </a:solidFill>
-                <a:latin typeface="Calibri" pitchFamily="34" charset="0"/>
-                <a:ea typeface="Calibri" pitchFamily="34" charset="-122"/>
-                <a:cs typeface="Calibri" pitchFamily="34" charset="-120"/>
-              </a:rPr>
-              <a:t>Mode: best for categorical data or 'most popular'</a:t>
-            </a:r>
-            <a:endParaRPr lang="en-US" sz="1600" dirty="0"/>
-          </a:p>
-          <a:p>
-            <a:pPr indent="0" marL="0">
-              <a:spcAft>
-                <a:spcPts val="400"/>
-              </a:spcAft>
-              <a:buNone/>
-            </a:pPr>
-            <a:r>
-              <a:rPr lang="en-US" sz="1300" dirty="0">
-                <a:solidFill>
-                  <a:srgbClr val="3D3A36"/>
-                </a:solidFill>
-                <a:latin typeface="Calibri" pitchFamily="34" charset="0"/>
-                <a:ea typeface="Calibri" pitchFamily="34" charset="-122"/>
-                <a:cs typeface="Calibri" pitchFamily="34" charset="-120"/>
-              </a:rPr>
-              <a:t>Range: always useful to show spread</a:t>
-            </a:r>
-            <a:endParaRPr lang="en-US" sz="1600" dirty="0"/>
-          </a:p>
-          <a:p>
-            <a:pPr indent="0" marL="0">
-              <a:spcAft>
-                <a:spcPts val="400"/>
-              </a:spcAft>
-              <a:buNone/>
-            </a:pPr>
-            <a:r>
-              <a:rPr lang="en-US" sz="1300" dirty="0">
-                <a:solidFill>
-                  <a:srgbClr val="3D3A36"/>
-                </a:solidFill>
-                <a:latin typeface="Calibri" pitchFamily="34" charset="0"/>
-                <a:ea typeface="Calibri" pitchFamily="34" charset="-122"/>
-                <a:cs typeface="Calibri" pitchFamily="34" charset="-120"/>
-              </a:rPr>
-              <a:t>Example: salaries with one billionaire → median is more representative than mean</a:t>
-            </a:r>
-            <a:endParaRPr lang="en-US" sz="1600" dirty="0"/>
+              <a:t>The mean is affected by outliers — one very high/low value can distort it.</a:t>
+            </a:r>
+            <a:endParaRPr lang="en-US" sz="1200" dirty="0"/>
           </a:p>
         </p:txBody>
       </p:sp>
@@ -2745,7 +3667,47 @@
         <p:spPr>
           <a:xfrm>
             <a:off x="0" y="0"/>
-            <a:ext cx="9144000" cy="54864"/>
+            <a:ext cx="9144000" cy="822960"/>
+          </a:xfrm>
+          <a:prstGeom prst="rect">
+            <a:avLst/>
+          </a:prstGeom>
+          <a:solidFill>
+            <a:srgbClr val="FFFFFF"/>
+          </a:solidFill>
+          <a:ln/>
+        </p:spPr>
+      </p:sp>
+      <p:sp>
+        <p:nvSpPr>
+          <p:cNvPr id="3" name="Shape 1"/>
+          <p:cNvSpPr/>
+          <p:nvPr/>
+        </p:nvSpPr>
+        <p:spPr>
+          <a:xfrm>
+            <a:off x="0" y="804672"/>
+            <a:ext cx="9144000" cy="27432"/>
+          </a:xfrm>
+          <a:prstGeom prst="rect">
+            <a:avLst/>
+          </a:prstGeom>
+          <a:solidFill>
+            <a:srgbClr val="E5E2DC"/>
+          </a:solidFill>
+          <a:ln/>
+        </p:spPr>
+      </p:sp>
+      <p:sp>
+        <p:nvSpPr>
+          <p:cNvPr id="4" name="Shape 2"/>
+          <p:cNvSpPr/>
+          <p:nvPr/>
+        </p:nvSpPr>
+        <p:spPr>
+          <a:xfrm>
+            <a:off x="548640" y="201168"/>
+            <a:ext cx="54864" cy="420624"/>
           </a:xfrm>
           <a:prstGeom prst="rect">
             <a:avLst/>
@@ -2758,14 +3720,14 @@
       </p:sp>
       <p:sp>
         <p:nvSpPr>
-          <p:cNvPr id="3" name="Text 1"/>
-          <p:cNvSpPr/>
-          <p:nvPr/>
-        </p:nvSpPr>
-        <p:spPr>
-          <a:xfrm>
-            <a:off x="7772400" y="4709160"/>
-            <a:ext cx="1097280" cy="320040"/>
+          <p:cNvPr id="5" name="Text 3"/>
+          <p:cNvSpPr/>
+          <p:nvPr/>
+        </p:nvSpPr>
+        <p:spPr>
+          <a:xfrm>
+            <a:off x="777240" y="137160"/>
+            <a:ext cx="7772400" cy="548640"/>
           </a:xfrm>
           <a:prstGeom prst="rect">
             <a:avLst/>
@@ -2774,53 +3736,14 @@
           <a:ln/>
         </p:spPr>
         <p:txBody>
-          <a:bodyPr wrap="square" rtlCol="0" anchor="ctr"/>
-          <a:lstStyle/>
-          <a:p>
-            <a:pPr algn="r" indent="0" marL="0">
-              <a:buNone/>
-            </a:pPr>
-            <a:r>
-              <a:rPr lang="en-US" sz="900" dirty="0">
-                <a:solidFill>
-                  <a:srgbClr val="6B6660"/>
-                </a:solidFill>
-                <a:latin typeface="Calibri" pitchFamily="34" charset="0"/>
-                <a:ea typeface="Calibri" pitchFamily="34" charset="-122"/>
-                <a:cs typeface="Calibri" pitchFamily="34" charset="-120"/>
-              </a:rPr>
-              <a:t>5 / 6</a:t>
-            </a:r>
-            <a:endParaRPr lang="en-US" sz="900" dirty="0"/>
-          </a:p>
-        </p:txBody>
-      </p:sp>
-      <p:sp>
-        <p:nvSpPr>
-          <p:cNvPr id="4" name="Text 2"/>
-          <p:cNvSpPr/>
-          <p:nvPr/>
-        </p:nvSpPr>
-        <p:spPr>
-          <a:xfrm>
-            <a:off x="457200" y="274320"/>
-            <a:ext cx="8229600" cy="640080"/>
-          </a:xfrm>
-          <a:prstGeom prst="rect">
-            <a:avLst/>
-          </a:prstGeom>
-          <a:noFill/>
-          <a:ln/>
-        </p:spPr>
-        <p:txBody>
-          <a:bodyPr wrap="square" rtlCol="0" anchor="ctr"/>
+          <a:bodyPr wrap="square" lIns="0" tIns="0" rIns="0" bIns="0" rtlCol="0" anchor="ctr"/>
           <a:lstStyle/>
           <a:p>
             <a:pPr indent="0" marL="0">
               <a:buNone/>
             </a:pPr>
             <a:r>
-              <a:rPr lang="en-US" sz="2600" b="1" dirty="0">
+              <a:rPr lang="en-US" sz="2000" b="1" dirty="0">
                 <a:solidFill>
                   <a:srgbClr val="1B2A4A"/>
                 </a:solidFill>
@@ -2828,22 +3751,22 @@
                 <a:ea typeface="Georgia" pitchFamily="34" charset="-122"/>
                 <a:cs typeface="Georgia" pitchFamily="34" charset="-120"/>
               </a:rPr>
-              <a:t>Calculating from Frequency Tables</a:t>
-            </a:r>
-            <a:endParaRPr lang="en-US" sz="2600" dirty="0"/>
-          </a:p>
-        </p:txBody>
-      </p:sp>
-      <p:sp>
-        <p:nvSpPr>
-          <p:cNvPr id="5" name="Text 3"/>
-          <p:cNvSpPr/>
-          <p:nvPr/>
-        </p:nvSpPr>
-        <p:spPr>
-          <a:xfrm>
-            <a:off x="457200" y="1097280"/>
-            <a:ext cx="8229600" cy="3657600"/>
+              <a:t>Finding the Mean from a Frequency Table</a:t>
+            </a:r>
+            <a:endParaRPr lang="en-US" sz="2000" dirty="0"/>
+          </a:p>
+        </p:txBody>
+      </p:sp>
+      <p:sp>
+        <p:nvSpPr>
+          <p:cNvPr id="6" name="Text 4"/>
+          <p:cNvSpPr/>
+          <p:nvPr/>
+        </p:nvSpPr>
+        <p:spPr>
+          <a:xfrm>
+            <a:off x="731520" y="1051560"/>
+            <a:ext cx="7680960" cy="3108960"/>
           </a:xfrm>
           <a:prstGeom prst="rect">
             <a:avLst/>
@@ -2863,7 +3786,7 @@
               <a:buChar char="•"/>
             </a:pPr>
             <a:r>
-              <a:rPr lang="en-US" sz="1400" dirty="0">
+              <a:rPr lang="en-US" sz="1500" dirty="0">
                 <a:solidFill>
                   <a:srgbClr val="3D3A36"/>
                 </a:solidFill>
@@ -2871,9 +3794,9 @@
                 <a:ea typeface="Calibri" pitchFamily="34" charset="-122"/>
                 <a:cs typeface="Calibri" pitchFamily="34" charset="-120"/>
               </a:rPr>
-              <a:t>Multiply each value by its frequency</a:t>
-            </a:r>
-            <a:endParaRPr lang="en-US" sz="1400" dirty="0"/>
+              <a:t>Multiply each value by its frequency.</a:t>
+            </a:r>
+            <a:endParaRPr lang="en-US" sz="1500" dirty="0"/>
           </a:p>
           <a:p>
             <a:pPr marL="342900" indent="-342900">
@@ -2884,7 +3807,7 @@
               <a:buChar char="•"/>
             </a:pPr>
             <a:r>
-              <a:rPr lang="en-US" sz="1400" dirty="0">
+              <a:rPr lang="en-US" sz="1500" dirty="0">
                 <a:solidFill>
                   <a:srgbClr val="3D3A36"/>
                 </a:solidFill>
@@ -2892,9 +3815,9 @@
                 <a:ea typeface="Calibri" pitchFamily="34" charset="-122"/>
                 <a:cs typeface="Calibri" pitchFamily="34" charset="-120"/>
               </a:rPr>
-              <a:t>Add all the (value × frequency) products</a:t>
-            </a:r>
-            <a:endParaRPr lang="en-US" sz="1400" dirty="0"/>
+              <a:t>Add up all the (value × frequency) products.</a:t>
+            </a:r>
+            <a:endParaRPr lang="en-US" sz="1500" dirty="0"/>
           </a:p>
           <a:p>
             <a:pPr marL="342900" indent="-342900">
@@ -2905,7 +3828,7 @@
               <a:buChar char="•"/>
             </a:pPr>
             <a:r>
-              <a:rPr lang="en-US" sz="1400" dirty="0">
+              <a:rPr lang="en-US" sz="1500" dirty="0">
                 <a:solidFill>
                   <a:srgbClr val="3D3A36"/>
                 </a:solidFill>
@@ -2913,9 +3836,9 @@
                 <a:ea typeface="Calibri" pitchFamily="34" charset="-122"/>
                 <a:cs typeface="Calibri" pitchFamily="34" charset="-120"/>
               </a:rPr>
-              <a:t>Divide by the total frequency</a:t>
-            </a:r>
-            <a:endParaRPr lang="en-US" sz="1400" dirty="0"/>
+              <a:t>Divide by the TOTAL frequency.</a:t>
+            </a:r>
+            <a:endParaRPr lang="en-US" sz="1500" dirty="0"/>
           </a:p>
           <a:p>
             <a:pPr marL="342900" indent="-342900">
@@ -2926,7 +3849,7 @@
               <a:buChar char="•"/>
             </a:pPr>
             <a:r>
-              <a:rPr lang="en-US" sz="1400" dirty="0">
+              <a:rPr lang="en-US" sz="1500" dirty="0">
                 <a:solidFill>
                   <a:srgbClr val="3D3A36"/>
                 </a:solidFill>
@@ -2934,9 +3857,9 @@
                 <a:ea typeface="Calibri" pitchFamily="34" charset="-122"/>
                 <a:cs typeface="Calibri" pitchFamily="34" charset="-120"/>
               </a:rPr>
-              <a:t>Example: Score 1(×3), 2(×5), 3(×2) → mean = (3+10+6)÷10 = 1.9</a:t>
-            </a:r>
-            <a:endParaRPr lang="en-US" sz="1400" dirty="0"/>
+              <a:t>Example: values 2(×3), 4(×5), 6(×2) → (6+20+12) ÷ 10 = 38 ÷ 10 = 3.8.</a:t>
+            </a:r>
+            <a:endParaRPr lang="en-US" sz="1500" dirty="0"/>
           </a:p>
           <a:p>
             <a:pPr marL="342900" indent="-342900">
@@ -2947,7 +3870,7 @@
               <a:buChar char="•"/>
             </a:pPr>
             <a:r>
-              <a:rPr lang="en-US" sz="1400" dirty="0">
+              <a:rPr lang="en-US" sz="1500" dirty="0">
                 <a:solidFill>
                   <a:srgbClr val="3D3A36"/>
                 </a:solidFill>
@@ -2955,9 +3878,9 @@
                 <a:ea typeface="Calibri" pitchFamily="34" charset="-122"/>
                 <a:cs typeface="Calibri" pitchFamily="34" charset="-120"/>
               </a:rPr>
-              <a:t>For grouped data, use the MIDPOINT of each group</a:t>
-            </a:r>
-            <a:endParaRPr lang="en-US" sz="1400" dirty="0"/>
+              <a:t>This method is faster than listing every single value.</a:t>
+            </a:r>
+            <a:endParaRPr lang="en-US" sz="1500" dirty="0"/>
           </a:p>
         </p:txBody>
       </p:sp>
@@ -2975,7 +3898,7 @@
     <p:bg>
       <p:bgPr>
         <a:solidFill>
-          <a:srgbClr val="1B2A4A"/>
+          <a:srgbClr val="FAF8F5"/>
         </a:solidFill>
       </p:bgPr>
     </p:bg>
@@ -3002,27 +3925,67 @@
         <p:spPr>
           <a:xfrm>
             <a:off x="0" y="0"/>
-            <a:ext cx="109728" cy="5143500"/>
-          </a:xfrm>
-          <a:prstGeom prst="rect">
-            <a:avLst/>
-          </a:prstGeom>
-          <a:solidFill>
-            <a:srgbClr val="E9C46A"/>
-          </a:solidFill>
-          <a:ln/>
-        </p:spPr>
-      </p:sp>
-      <p:sp>
-        <p:nvSpPr>
-          <p:cNvPr id="3" name="Text 1"/>
-          <p:cNvSpPr/>
-          <p:nvPr/>
-        </p:nvSpPr>
-        <p:spPr>
-          <a:xfrm>
-            <a:off x="731520" y="457200"/>
-            <a:ext cx="7772400" cy="731520"/>
+            <a:ext cx="9144000" cy="822960"/>
+          </a:xfrm>
+          <a:prstGeom prst="rect">
+            <a:avLst/>
+          </a:prstGeom>
+          <a:solidFill>
+            <a:srgbClr val="FFFFFF"/>
+          </a:solidFill>
+          <a:ln/>
+        </p:spPr>
+      </p:sp>
+      <p:sp>
+        <p:nvSpPr>
+          <p:cNvPr id="3" name="Shape 1"/>
+          <p:cNvSpPr/>
+          <p:nvPr/>
+        </p:nvSpPr>
+        <p:spPr>
+          <a:xfrm>
+            <a:off x="0" y="804672"/>
+            <a:ext cx="9144000" cy="27432"/>
+          </a:xfrm>
+          <a:prstGeom prst="rect">
+            <a:avLst/>
+          </a:prstGeom>
+          <a:solidFill>
+            <a:srgbClr val="E5E2DC"/>
+          </a:solidFill>
+          <a:ln/>
+        </p:spPr>
+      </p:sp>
+      <p:sp>
+        <p:nvSpPr>
+          <p:cNvPr id="4" name="Shape 2"/>
+          <p:cNvSpPr/>
+          <p:nvPr/>
+        </p:nvSpPr>
+        <p:spPr>
+          <a:xfrm>
+            <a:off x="548640" y="201168"/>
+            <a:ext cx="54864" cy="420624"/>
+          </a:xfrm>
+          <a:prstGeom prst="rect">
+            <a:avLst/>
+          </a:prstGeom>
+          <a:solidFill>
+            <a:srgbClr val="2A9D8F"/>
+          </a:solidFill>
+          <a:ln/>
+        </p:spPr>
+      </p:sp>
+      <p:sp>
+        <p:nvSpPr>
+          <p:cNvPr id="5" name="Text 3"/>
+          <p:cNvSpPr/>
+          <p:nvPr/>
+        </p:nvSpPr>
+        <p:spPr>
+          <a:xfrm>
+            <a:off x="777240" y="137160"/>
+            <a:ext cx="7772400" cy="548640"/>
           </a:xfrm>
           <a:prstGeom prst="rect">
             <a:avLst/>
@@ -3031,37 +3994,57 @@
           <a:ln/>
         </p:spPr>
         <p:txBody>
-          <a:bodyPr wrap="square" rtlCol="0" anchor="ctr"/>
+          <a:bodyPr wrap="square" lIns="0" tIns="0" rIns="0" bIns="0" rtlCol="0" anchor="ctr"/>
           <a:lstStyle/>
           <a:p>
             <a:pPr indent="0" marL="0">
               <a:buNone/>
             </a:pPr>
             <a:r>
-              <a:rPr lang="en-US" sz="3200" b="1" dirty="0">
-                <a:solidFill>
-                  <a:srgbClr val="FFFFFF"/>
+              <a:rPr lang="en-US" sz="2000" b="1" dirty="0">
+                <a:solidFill>
+                  <a:srgbClr val="1B2A4A"/>
                 </a:solidFill>
                 <a:latin typeface="Georgia" pitchFamily="34" charset="0"/>
                 <a:ea typeface="Georgia" pitchFamily="34" charset="-122"/>
                 <a:cs typeface="Georgia" pitchFamily="34" charset="-120"/>
               </a:rPr>
-              <a:t>Key Takeaways</a:t>
-            </a:r>
-            <a:endParaRPr lang="en-US" sz="3200" dirty="0"/>
-          </a:p>
-        </p:txBody>
-      </p:sp>
-      <p:sp>
-        <p:nvSpPr>
-          <p:cNvPr id="4" name="Text 2"/>
-          <p:cNvSpPr/>
-          <p:nvPr/>
-        </p:nvSpPr>
-        <p:spPr>
-          <a:xfrm>
-            <a:off x="731520" y="1463040"/>
-            <a:ext cx="7772400" cy="3200400"/>
+              <a:t>Check Your Understanding</a:t>
+            </a:r>
+            <a:endParaRPr lang="en-US" sz="2000" dirty="0"/>
+          </a:p>
+        </p:txBody>
+      </p:sp>
+      <p:sp>
+        <p:nvSpPr>
+          <p:cNvPr id="6" name="Shape 4"/>
+          <p:cNvSpPr/>
+          <p:nvPr/>
+        </p:nvSpPr>
+        <p:spPr>
+          <a:xfrm>
+            <a:off x="731520" y="1051560"/>
+            <a:ext cx="7680960" cy="438912"/>
+          </a:xfrm>
+          <a:prstGeom prst="rect">
+            <a:avLst/>
+          </a:prstGeom>
+          <a:solidFill>
+            <a:srgbClr val="FFFFFF"/>
+          </a:solidFill>
+          <a:ln/>
+        </p:spPr>
+      </p:sp>
+      <p:sp>
+        <p:nvSpPr>
+          <p:cNvPr id="7" name="Text 5"/>
+          <p:cNvSpPr/>
+          <p:nvPr/>
+        </p:nvSpPr>
+        <p:spPr>
+          <a:xfrm>
+            <a:off x="868680" y="1051560"/>
+            <a:ext cx="320040" cy="438912"/>
           </a:xfrm>
           <a:prstGeom prst="rect">
             <a:avLst/>
@@ -3070,125 +4053,480 @@
           <a:ln/>
         </p:spPr>
         <p:txBody>
-          <a:bodyPr wrap="square" rtlCol="0" anchor="t"/>
-          <a:lstStyle/>
-          <a:p>
-            <a:pPr marL="342900" indent="-342900">
-              <a:spcAft>
-                <a:spcPts val="1000"/>
-              </a:spcAft>
-              <a:buSzPct val="100000"/>
-              <a:buChar char="•"/>
-            </a:pPr>
-            <a:r>
-              <a:rPr lang="en-US" sz="1500" dirty="0">
-                <a:solidFill>
-                  <a:srgbClr val="CADCFC"/>
+          <a:bodyPr wrap="square" rtlCol="0" anchor="ctr"/>
+          <a:lstStyle/>
+          <a:p>
+            <a:pPr indent="0" marL="0">
+              <a:buNone/>
+            </a:pPr>
+            <a:r>
+              <a:rPr lang="en-US" sz="1400" dirty="0">
+                <a:solidFill>
+                  <a:srgbClr val="2A9D8F"/>
+                </a:solidFill>
+              </a:rPr>
+              <a:t>☐</a:t>
+            </a:r>
+            <a:endParaRPr lang="en-US" sz="1400" dirty="0"/>
+          </a:p>
+        </p:txBody>
+      </p:sp>
+      <p:sp>
+        <p:nvSpPr>
+          <p:cNvPr id="8" name="Text 6"/>
+          <p:cNvSpPr/>
+          <p:nvPr/>
+        </p:nvSpPr>
+        <p:spPr>
+          <a:xfrm>
+            <a:off x="1234440" y="1051560"/>
+            <a:ext cx="6949440" cy="438912"/>
+          </a:xfrm>
+          <a:prstGeom prst="rect">
+            <a:avLst/>
+          </a:prstGeom>
+          <a:noFill/>
+          <a:ln/>
+        </p:spPr>
+        <p:txBody>
+          <a:bodyPr wrap="square" rtlCol="0" anchor="ctr"/>
+          <a:lstStyle/>
+          <a:p>
+            <a:pPr indent="0" marL="0">
+              <a:buNone/>
+            </a:pPr>
+            <a:r>
+              <a:rPr lang="en-US" sz="1300" dirty="0">
+                <a:solidFill>
+                  <a:srgbClr val="3D3A36"/>
                 </a:solidFill>
                 <a:latin typeface="Calibri" pitchFamily="34" charset="0"/>
                 <a:ea typeface="Calibri" pitchFamily="34" charset="-122"/>
                 <a:cs typeface="Calibri" pitchFamily="34" charset="-120"/>
               </a:rPr>
-              <a:t>Mean: add all ÷ count. Median: middle value. Mode: most frequent. Range: highest−lowest</a:t>
-            </a:r>
-            <a:endParaRPr lang="en-US" sz="1500" dirty="0"/>
-          </a:p>
-          <a:p>
-            <a:pPr marL="342900" indent="-342900">
-              <a:spcAft>
-                <a:spcPts val="1000"/>
-              </a:spcAft>
-              <a:buSzPct val="100000"/>
-              <a:buChar char="•"/>
-            </a:pPr>
-            <a:r>
-              <a:rPr lang="en-US" sz="1500" dirty="0">
-                <a:solidFill>
-                  <a:srgbClr val="CADCFC"/>
+              <a:t>I can calculate mean, median, mode, and range</a:t>
+            </a:r>
+            <a:endParaRPr lang="en-US" sz="1300" dirty="0"/>
+          </a:p>
+        </p:txBody>
+      </p:sp>
+      <p:sp>
+        <p:nvSpPr>
+          <p:cNvPr id="9" name="Shape 7"/>
+          <p:cNvSpPr/>
+          <p:nvPr/>
+        </p:nvSpPr>
+        <p:spPr>
+          <a:xfrm>
+            <a:off x="731520" y="1554480"/>
+            <a:ext cx="7680960" cy="438912"/>
+          </a:xfrm>
+          <a:prstGeom prst="rect">
+            <a:avLst/>
+          </a:prstGeom>
+          <a:solidFill>
+            <a:srgbClr val="F8F6F3"/>
+          </a:solidFill>
+          <a:ln/>
+        </p:spPr>
+      </p:sp>
+      <p:sp>
+        <p:nvSpPr>
+          <p:cNvPr id="10" name="Text 8"/>
+          <p:cNvSpPr/>
+          <p:nvPr/>
+        </p:nvSpPr>
+        <p:spPr>
+          <a:xfrm>
+            <a:off x="868680" y="1554480"/>
+            <a:ext cx="320040" cy="438912"/>
+          </a:xfrm>
+          <a:prstGeom prst="rect">
+            <a:avLst/>
+          </a:prstGeom>
+          <a:noFill/>
+          <a:ln/>
+        </p:spPr>
+        <p:txBody>
+          <a:bodyPr wrap="square" rtlCol="0" anchor="ctr"/>
+          <a:lstStyle/>
+          <a:p>
+            <a:pPr indent="0" marL="0">
+              <a:buNone/>
+            </a:pPr>
+            <a:r>
+              <a:rPr lang="en-US" sz="1400" dirty="0">
+                <a:solidFill>
+                  <a:srgbClr val="2A9D8F"/>
+                </a:solidFill>
+              </a:rPr>
+              <a:t>☐</a:t>
+            </a:r>
+            <a:endParaRPr lang="en-US" sz="1400" dirty="0"/>
+          </a:p>
+        </p:txBody>
+      </p:sp>
+      <p:sp>
+        <p:nvSpPr>
+          <p:cNvPr id="11" name="Text 9"/>
+          <p:cNvSpPr/>
+          <p:nvPr/>
+        </p:nvSpPr>
+        <p:spPr>
+          <a:xfrm>
+            <a:off x="1234440" y="1554480"/>
+            <a:ext cx="6949440" cy="438912"/>
+          </a:xfrm>
+          <a:prstGeom prst="rect">
+            <a:avLst/>
+          </a:prstGeom>
+          <a:noFill/>
+          <a:ln/>
+        </p:spPr>
+        <p:txBody>
+          <a:bodyPr wrap="square" rtlCol="0" anchor="ctr"/>
+          <a:lstStyle/>
+          <a:p>
+            <a:pPr indent="0" marL="0">
+              <a:buNone/>
+            </a:pPr>
+            <a:r>
+              <a:rPr lang="en-US" sz="1300" dirty="0">
+                <a:solidFill>
+                  <a:srgbClr val="3D3A36"/>
                 </a:solidFill>
                 <a:latin typeface="Calibri" pitchFamily="34" charset="0"/>
                 <a:ea typeface="Calibri" pitchFamily="34" charset="-122"/>
                 <a:cs typeface="Calibri" pitchFamily="34" charset="-120"/>
               </a:rPr>
-              <a:t>Mean affected by outliers; median is not</a:t>
-            </a:r>
-            <a:endParaRPr lang="en-US" sz="1500" dirty="0"/>
-          </a:p>
-          <a:p>
-            <a:pPr marL="342900" indent="-342900">
-              <a:spcAft>
-                <a:spcPts val="1000"/>
-              </a:spcAft>
-              <a:buSzPct val="100000"/>
-              <a:buChar char="•"/>
-            </a:pPr>
-            <a:r>
-              <a:rPr lang="en-US" sz="1500" dirty="0">
-                <a:solidFill>
-                  <a:srgbClr val="CADCFC"/>
+              <a:t>I know which average to use for different types of data</a:t>
+            </a:r>
+            <a:endParaRPr lang="en-US" sz="1300" dirty="0"/>
+          </a:p>
+        </p:txBody>
+      </p:sp>
+      <p:sp>
+        <p:nvSpPr>
+          <p:cNvPr id="12" name="Shape 10"/>
+          <p:cNvSpPr/>
+          <p:nvPr/>
+        </p:nvSpPr>
+        <p:spPr>
+          <a:xfrm>
+            <a:off x="731520" y="2057400"/>
+            <a:ext cx="7680960" cy="438912"/>
+          </a:xfrm>
+          <a:prstGeom prst="rect">
+            <a:avLst/>
+          </a:prstGeom>
+          <a:solidFill>
+            <a:srgbClr val="FFFFFF"/>
+          </a:solidFill>
+          <a:ln/>
+        </p:spPr>
+      </p:sp>
+      <p:sp>
+        <p:nvSpPr>
+          <p:cNvPr id="13" name="Text 11"/>
+          <p:cNvSpPr/>
+          <p:nvPr/>
+        </p:nvSpPr>
+        <p:spPr>
+          <a:xfrm>
+            <a:off x="868680" y="2057400"/>
+            <a:ext cx="320040" cy="438912"/>
+          </a:xfrm>
+          <a:prstGeom prst="rect">
+            <a:avLst/>
+          </a:prstGeom>
+          <a:noFill/>
+          <a:ln/>
+        </p:spPr>
+        <p:txBody>
+          <a:bodyPr wrap="square" rtlCol="0" anchor="ctr"/>
+          <a:lstStyle/>
+          <a:p>
+            <a:pPr indent="0" marL="0">
+              <a:buNone/>
+            </a:pPr>
+            <a:r>
+              <a:rPr lang="en-US" sz="1400" dirty="0">
+                <a:solidFill>
+                  <a:srgbClr val="2A9D8F"/>
+                </a:solidFill>
+              </a:rPr>
+              <a:t>☐</a:t>
+            </a:r>
+            <a:endParaRPr lang="en-US" sz="1400" dirty="0"/>
+          </a:p>
+        </p:txBody>
+      </p:sp>
+      <p:sp>
+        <p:nvSpPr>
+          <p:cNvPr id="14" name="Text 12"/>
+          <p:cNvSpPr/>
+          <p:nvPr/>
+        </p:nvSpPr>
+        <p:spPr>
+          <a:xfrm>
+            <a:off x="1234440" y="2057400"/>
+            <a:ext cx="6949440" cy="438912"/>
+          </a:xfrm>
+          <a:prstGeom prst="rect">
+            <a:avLst/>
+          </a:prstGeom>
+          <a:noFill/>
+          <a:ln/>
+        </p:spPr>
+        <p:txBody>
+          <a:bodyPr wrap="square" rtlCol="0" anchor="ctr"/>
+          <a:lstStyle/>
+          <a:p>
+            <a:pPr indent="0" marL="0">
+              <a:buNone/>
+            </a:pPr>
+            <a:r>
+              <a:rPr lang="en-US" sz="1300" dirty="0">
+                <a:solidFill>
+                  <a:srgbClr val="3D3A36"/>
                 </a:solidFill>
                 <a:latin typeface="Calibri" pitchFamily="34" charset="0"/>
                 <a:ea typeface="Calibri" pitchFamily="34" charset="-122"/>
                 <a:cs typeface="Calibri" pitchFamily="34" charset="-120"/>
               </a:rPr>
-              <a:t>From frequency tables: multiply value × frequency, sum, divide by total</a:t>
-            </a:r>
-            <a:endParaRPr lang="en-US" sz="1500" dirty="0"/>
-          </a:p>
-          <a:p>
-            <a:pPr marL="342900" indent="-342900">
-              <a:spcAft>
-                <a:spcPts val="1000"/>
-              </a:spcAft>
-              <a:buSzPct val="100000"/>
-              <a:buChar char="•"/>
-            </a:pPr>
-            <a:r>
-              <a:rPr lang="en-US" sz="1500" dirty="0">
-                <a:solidFill>
-                  <a:srgbClr val="CADCFC"/>
+              <a:t>I can find averages from a frequency table</a:t>
+            </a:r>
+            <a:endParaRPr lang="en-US" sz="1300" dirty="0"/>
+          </a:p>
+        </p:txBody>
+      </p:sp>
+      <p:sp>
+        <p:nvSpPr>
+          <p:cNvPr id="15" name="Shape 13"/>
+          <p:cNvSpPr/>
+          <p:nvPr/>
+        </p:nvSpPr>
+        <p:spPr>
+          <a:xfrm>
+            <a:off x="731520" y="2560320"/>
+            <a:ext cx="7680960" cy="438912"/>
+          </a:xfrm>
+          <a:prstGeom prst="rect">
+            <a:avLst/>
+          </a:prstGeom>
+          <a:solidFill>
+            <a:srgbClr val="F8F6F3"/>
+          </a:solidFill>
+          <a:ln/>
+        </p:spPr>
+      </p:sp>
+      <p:sp>
+        <p:nvSpPr>
+          <p:cNvPr id="16" name="Text 14"/>
+          <p:cNvSpPr/>
+          <p:nvPr/>
+        </p:nvSpPr>
+        <p:spPr>
+          <a:xfrm>
+            <a:off x="868680" y="2560320"/>
+            <a:ext cx="320040" cy="438912"/>
+          </a:xfrm>
+          <a:prstGeom prst="rect">
+            <a:avLst/>
+          </a:prstGeom>
+          <a:noFill/>
+          <a:ln/>
+        </p:spPr>
+        <p:txBody>
+          <a:bodyPr wrap="square" rtlCol="0" anchor="ctr"/>
+          <a:lstStyle/>
+          <a:p>
+            <a:pPr indent="0" marL="0">
+              <a:buNone/>
+            </a:pPr>
+            <a:r>
+              <a:rPr lang="en-US" sz="1400" dirty="0">
+                <a:solidFill>
+                  <a:srgbClr val="2A9D8F"/>
+                </a:solidFill>
+              </a:rPr>
+              <a:t>☐</a:t>
+            </a:r>
+            <a:endParaRPr lang="en-US" sz="1400" dirty="0"/>
+          </a:p>
+        </p:txBody>
+      </p:sp>
+      <p:sp>
+        <p:nvSpPr>
+          <p:cNvPr id="17" name="Text 15"/>
+          <p:cNvSpPr/>
+          <p:nvPr/>
+        </p:nvSpPr>
+        <p:spPr>
+          <a:xfrm>
+            <a:off x="1234440" y="2560320"/>
+            <a:ext cx="6949440" cy="438912"/>
+          </a:xfrm>
+          <a:prstGeom prst="rect">
+            <a:avLst/>
+          </a:prstGeom>
+          <a:noFill/>
+          <a:ln/>
+        </p:spPr>
+        <p:txBody>
+          <a:bodyPr wrap="square" rtlCol="0" anchor="ctr"/>
+          <a:lstStyle/>
+          <a:p>
+            <a:pPr indent="0" marL="0">
+              <a:buNone/>
+            </a:pPr>
+            <a:r>
+              <a:rPr lang="en-US" sz="1300" dirty="0">
+                <a:solidFill>
+                  <a:srgbClr val="3D3A36"/>
                 </a:solidFill>
                 <a:latin typeface="Calibri" pitchFamily="34" charset="0"/>
                 <a:ea typeface="Calibri" pitchFamily="34" charset="-122"/>
                 <a:cs typeface="Calibri" pitchFamily="34" charset="-120"/>
               </a:rPr>
-              <a:t>Choose the right average for the situation</a:t>
-            </a:r>
-            <a:endParaRPr lang="en-US" sz="1500" dirty="0"/>
-          </a:p>
-          <a:p>
-            <a:pPr marL="342900" indent="-342900">
-              <a:spcAft>
-                <a:spcPts val="1000"/>
-              </a:spcAft>
-              <a:buSzPct val="100000"/>
-              <a:buChar char="•"/>
-            </a:pPr>
-            <a:r>
-              <a:rPr lang="en-US" sz="1500" dirty="0">
-                <a:solidFill>
-                  <a:srgbClr val="CADCFC"/>
+              <a:t>I understand how outliers affect the mean</a:t>
+            </a:r>
+            <a:endParaRPr lang="en-US" sz="1300" dirty="0"/>
+          </a:p>
+        </p:txBody>
+      </p:sp>
+      <p:sp>
+        <p:nvSpPr>
+          <p:cNvPr id="18" name="Shape 16"/>
+          <p:cNvSpPr/>
+          <p:nvPr/>
+        </p:nvSpPr>
+        <p:spPr>
+          <a:xfrm>
+            <a:off x="731520" y="3063240"/>
+            <a:ext cx="7680960" cy="438912"/>
+          </a:xfrm>
+          <a:prstGeom prst="rect">
+            <a:avLst/>
+          </a:prstGeom>
+          <a:solidFill>
+            <a:srgbClr val="FFFFFF"/>
+          </a:solidFill>
+          <a:ln/>
+        </p:spPr>
+      </p:sp>
+      <p:sp>
+        <p:nvSpPr>
+          <p:cNvPr id="19" name="Text 17"/>
+          <p:cNvSpPr/>
+          <p:nvPr/>
+        </p:nvSpPr>
+        <p:spPr>
+          <a:xfrm>
+            <a:off x="868680" y="3063240"/>
+            <a:ext cx="320040" cy="438912"/>
+          </a:xfrm>
+          <a:prstGeom prst="rect">
+            <a:avLst/>
+          </a:prstGeom>
+          <a:noFill/>
+          <a:ln/>
+        </p:spPr>
+        <p:txBody>
+          <a:bodyPr wrap="square" rtlCol="0" anchor="ctr"/>
+          <a:lstStyle/>
+          <a:p>
+            <a:pPr indent="0" marL="0">
+              <a:buNone/>
+            </a:pPr>
+            <a:r>
+              <a:rPr lang="en-US" sz="1400" dirty="0">
+                <a:solidFill>
+                  <a:srgbClr val="2A9D8F"/>
+                </a:solidFill>
+              </a:rPr>
+              <a:t>☐</a:t>
+            </a:r>
+            <a:endParaRPr lang="en-US" sz="1400" dirty="0"/>
+          </a:p>
+        </p:txBody>
+      </p:sp>
+      <p:sp>
+        <p:nvSpPr>
+          <p:cNvPr id="20" name="Text 18"/>
+          <p:cNvSpPr/>
+          <p:nvPr/>
+        </p:nvSpPr>
+        <p:spPr>
+          <a:xfrm>
+            <a:off x="1234440" y="3063240"/>
+            <a:ext cx="6949440" cy="438912"/>
+          </a:xfrm>
+          <a:prstGeom prst="rect">
+            <a:avLst/>
+          </a:prstGeom>
+          <a:noFill/>
+          <a:ln/>
+        </p:spPr>
+        <p:txBody>
+          <a:bodyPr wrap="square" rtlCol="0" anchor="ctr"/>
+          <a:lstStyle/>
+          <a:p>
+            <a:pPr indent="0" marL="0">
+              <a:buNone/>
+            </a:pPr>
+            <a:r>
+              <a:rPr lang="en-US" sz="1300" dirty="0">
+                <a:solidFill>
+                  <a:srgbClr val="3D3A36"/>
                 </a:solidFill>
                 <a:latin typeface="Calibri" pitchFamily="34" charset="0"/>
                 <a:ea typeface="Calibri" pitchFamily="34" charset="-122"/>
                 <a:cs typeface="Calibri" pitchFamily="34" charset="-120"/>
               </a:rPr>
-              <a:t>Range measures spread (large = spread out, small = consistent)</a:t>
-            </a:r>
-            <a:endParaRPr lang="en-US" sz="1500" dirty="0"/>
-          </a:p>
-        </p:txBody>
-      </p:sp>
-      <p:sp>
-        <p:nvSpPr>
-          <p:cNvPr id="5" name="Text 3"/>
-          <p:cNvSpPr/>
-          <p:nvPr/>
-        </p:nvSpPr>
-        <p:spPr>
-          <a:xfrm>
-            <a:off x="731520" y="4572000"/>
-            <a:ext cx="7772400" cy="365760"/>
+              <a:t>I can compare data sets using averages and range</a:t>
+            </a:r>
+            <a:endParaRPr lang="en-US" sz="1300" dirty="0"/>
+          </a:p>
+        </p:txBody>
+      </p:sp>
+      <p:sp>
+        <p:nvSpPr>
+          <p:cNvPr id="21" name="Shape 19"/>
+          <p:cNvSpPr/>
+          <p:nvPr/>
+        </p:nvSpPr>
+        <p:spPr>
+          <a:xfrm>
+            <a:off x="731520" y="3749040"/>
+            <a:ext cx="7680960" cy="594360"/>
+          </a:xfrm>
+          <a:prstGeom prst="rect">
+            <a:avLst/>
+          </a:prstGeom>
+          <a:solidFill>
+            <a:srgbClr val="E8F5F3"/>
+          </a:solidFill>
+          <a:ln/>
+          <a:effectLst>
+            <a:outerShdw sx="100000" sy="100000" kx="0" ky="0" algn="bl" rotWithShape="0" blurRad="50800" dist="25400" dir="8100000">
+              <a:srgbClr val="000000">
+                <a:alpha val="10000"/>
+              </a:srgbClr>
+            </a:outerShdw>
+          </a:effectLst>
+        </p:spPr>
+      </p:sp>
+      <p:sp>
+        <p:nvSpPr>
+          <p:cNvPr id="22" name="Text 20"/>
+          <p:cNvSpPr/>
+          <p:nvPr/>
+        </p:nvSpPr>
+        <p:spPr>
+          <a:xfrm>
+            <a:off x="914400" y="3749040"/>
+            <a:ext cx="7315200" cy="594360"/>
           </a:xfrm>
           <a:prstGeom prst="rect">
             <a:avLst/>
@@ -3204,17 +4542,235 @@
               <a:buNone/>
             </a:pPr>
             <a:r>
-              <a:rPr lang="en-US" sz="1100" dirty="0">
-                <a:solidFill>
-                  <a:srgbClr val="E9C46A"/>
+              <a:rPr lang="en-US" sz="1200" b="1" dirty="0">
+                <a:solidFill>
+                  <a:srgbClr val="2A9D8F"/>
                 </a:solidFill>
                 <a:latin typeface="Calibri" pitchFamily="34" charset="0"/>
                 <a:ea typeface="Calibri" pitchFamily="34" charset="-122"/>
                 <a:cs typeface="Calibri" pitchFamily="34" charset="-120"/>
               </a:rPr>
+              <a:t>Key Idea: </a:t>
+            </a:r>
+            <a:pPr indent="0" marL="0">
+              <a:buNone/>
+            </a:pPr>
+            <a:r>
+              <a:rPr lang="en-US" sz="1200" i="1" dirty="0">
+                <a:solidFill>
+                  <a:srgbClr val="3D3A36"/>
+                </a:solidFill>
+                <a:latin typeface="Calibri" pitchFamily="34" charset="0"/>
+                <a:ea typeface="Calibri" pitchFamily="34" charset="-122"/>
+                <a:cs typeface="Calibri" pitchFamily="34" charset="-120"/>
+              </a:rPr>
+              <a:t>Mean uses all data, median resists outliers, mode shows most common.</a:t>
+            </a:r>
+            <a:endParaRPr lang="en-US" sz="1200" dirty="0"/>
+          </a:p>
+        </p:txBody>
+      </p:sp>
+    </p:spTree>
+  </p:cSld>
+  <p:clrMapOvr>
+    <a:masterClrMapping/>
+  </p:clrMapOvr>
+</p:sld>
+</file>
+
+<file path=ppt/slides/slide7.xml><?xml version="1.0" encoding="utf-8"?>
+<p:sld xmlns:a="http://schemas.openxmlformats.org/drawingml/2006/main" xmlns:r="http://schemas.openxmlformats.org/officeDocument/2006/relationships" xmlns:p="http://schemas.openxmlformats.org/presentationml/2006/main">
+  <p:cSld name="Slide 7">
+    <p:spTree>
+      <p:nvGrpSpPr>
+        <p:cNvPr id="1" name=""/>
+        <p:cNvGrpSpPr/>
+        <p:nvPr/>
+      </p:nvGrpSpPr>
+      <p:grpSpPr>
+        <a:xfrm>
+          <a:off x="0" y="0"/>
+          <a:ext cx="0" cy="0"/>
+          <a:chOff x="0" y="0"/>
+          <a:chExt cx="0" cy="0"/>
+        </a:xfrm>
+      </p:grpSpPr>
+      <p:sp>
+        <p:nvSpPr>
+          <p:cNvPr id="2" name="Shape 0"/>
+          <p:cNvSpPr/>
+          <p:nvPr/>
+        </p:nvSpPr>
+        <p:spPr>
+          <a:xfrm>
+            <a:off x="0" y="0"/>
+            <a:ext cx="9144000" cy="5143500"/>
+          </a:xfrm>
+          <a:prstGeom prst="rect">
+            <a:avLst/>
+          </a:prstGeom>
+          <a:solidFill>
+            <a:srgbClr val="1B2A4A"/>
+          </a:solidFill>
+          <a:ln/>
+        </p:spPr>
+      </p:sp>
+      <p:sp>
+        <p:nvSpPr>
+          <p:cNvPr id="3" name="Shape 1"/>
+          <p:cNvSpPr/>
+          <p:nvPr/>
+        </p:nvSpPr>
+        <p:spPr>
+          <a:xfrm>
+            <a:off x="0" y="4777740"/>
+            <a:ext cx="9144000" cy="365760"/>
+          </a:xfrm>
+          <a:prstGeom prst="rect">
+            <a:avLst/>
+          </a:prstGeom>
+          <a:solidFill>
+            <a:srgbClr val="2A9D8F"/>
+          </a:solidFill>
+          <a:ln/>
+        </p:spPr>
+      </p:sp>
+      <p:sp>
+        <p:nvSpPr>
+          <p:cNvPr id="4" name="Shape 2"/>
+          <p:cNvSpPr/>
+          <p:nvPr/>
+        </p:nvSpPr>
+        <p:spPr>
+          <a:xfrm>
+            <a:off x="-914400" y="-914400"/>
+            <a:ext cx="3657600" cy="3657600"/>
+          </a:xfrm>
+          <a:prstGeom prst="ellipse">
+            <a:avLst/>
+          </a:prstGeom>
+          <a:solidFill>
+            <a:srgbClr val="2A9D8F">
+              <a:alpha val="10000"/>
+            </a:srgbClr>
+          </a:solidFill>
+          <a:ln/>
+        </p:spPr>
+      </p:sp>
+      <p:sp>
+        <p:nvSpPr>
+          <p:cNvPr id="5" name="Text 3"/>
+          <p:cNvSpPr/>
+          <p:nvPr/>
+        </p:nvSpPr>
+        <p:spPr>
+          <a:xfrm>
+            <a:off x="731520" y="1463040"/>
+            <a:ext cx="7680960" cy="822960"/>
+          </a:xfrm>
+          <a:prstGeom prst="rect">
+            <a:avLst/>
+          </a:prstGeom>
+          <a:noFill/>
+          <a:ln/>
+        </p:spPr>
+        <p:txBody>
+          <a:bodyPr wrap="square" rtlCol="0" anchor="ctr"/>
+          <a:lstStyle/>
+          <a:p>
+            <a:pPr algn="ctr" indent="0" marL="0">
+              <a:buNone/>
+            </a:pPr>
+            <a:r>
+              <a:rPr lang="en-US" sz="3400" b="1" dirty="0">
+                <a:solidFill>
+                  <a:srgbClr val="FFFFFF"/>
+                </a:solidFill>
+                <a:latin typeface="Georgia" pitchFamily="34" charset="0"/>
+                <a:ea typeface="Georgia" pitchFamily="34" charset="-122"/>
+                <a:cs typeface="Georgia" pitchFamily="34" charset="-120"/>
+              </a:rPr>
+              <a:t>Review &amp; Practise</a:t>
+            </a:r>
+            <a:endParaRPr lang="en-US" sz="3400" dirty="0"/>
+          </a:p>
+        </p:txBody>
+      </p:sp>
+      <p:sp>
+        <p:nvSpPr>
+          <p:cNvPr id="6" name="Text 4"/>
+          <p:cNvSpPr/>
+          <p:nvPr/>
+        </p:nvSpPr>
+        <p:spPr>
+          <a:xfrm>
+            <a:off x="731520" y="2468880"/>
+            <a:ext cx="7680960" cy="457200"/>
+          </a:xfrm>
+          <a:prstGeom prst="rect">
+            <a:avLst/>
+          </a:prstGeom>
+          <a:noFill/>
+          <a:ln/>
+        </p:spPr>
+        <p:txBody>
+          <a:bodyPr wrap="square" rtlCol="0" anchor="ctr"/>
+          <a:lstStyle/>
+          <a:p>
+            <a:pPr algn="ctr" indent="0" marL="0">
+              <a:buNone/>
+            </a:pPr>
+            <a:r>
+              <a:rPr lang="en-US" sz="1800" dirty="0">
+                <a:solidFill>
+                  <a:srgbClr val="2A9D8F"/>
+                </a:solidFill>
+                <a:latin typeface="Calibri" pitchFamily="34" charset="0"/>
+                <a:ea typeface="Calibri" pitchFamily="34" charset="-122"/>
+                <a:cs typeface="Calibri" pitchFamily="34" charset="-120"/>
+              </a:rPr>
               <a:t>mrzocchi.com</a:t>
             </a:r>
-            <a:endParaRPr lang="en-US" sz="1100" dirty="0"/>
+            <a:endParaRPr lang="en-US" sz="1800" dirty="0"/>
+          </a:p>
+        </p:txBody>
+      </p:sp>
+      <p:sp>
+        <p:nvSpPr>
+          <p:cNvPr id="7" name="Text 5"/>
+          <p:cNvSpPr/>
+          <p:nvPr/>
+        </p:nvSpPr>
+        <p:spPr>
+          <a:xfrm>
+            <a:off x="731520" y="3108960"/>
+            <a:ext cx="7680960" cy="457200"/>
+          </a:xfrm>
+          <a:prstGeom prst="rect">
+            <a:avLst/>
+          </a:prstGeom>
+          <a:noFill/>
+          <a:ln/>
+        </p:spPr>
+        <p:txBody>
+          <a:bodyPr wrap="square" rtlCol="0" anchor="ctr"/>
+          <a:lstStyle/>
+          <a:p>
+            <a:pPr algn="ctr" indent="0" marL="0">
+              <a:buNone/>
+            </a:pPr>
+            <a:r>
+              <a:rPr lang="en-US" sz="1300" dirty="0">
+                <a:solidFill>
+                  <a:srgbClr val="9B9690"/>
+                </a:solidFill>
+                <a:latin typeface="Calibri" pitchFamily="34" charset="0"/>
+                <a:ea typeface="Calibri" pitchFamily="34" charset="-122"/>
+                <a:cs typeface="Calibri" pitchFamily="34" charset="-120"/>
+              </a:rPr>
+              <a:t>Use the Self-Quiz, Review Games, and Practice Builder to test yourself.</a:t>
+            </a:r>
+            <a:endParaRPr lang="en-US" sz="1300" dirty="0"/>
           </a:p>
         </p:txBody>
       </p:sp>
